--- a/Materjalid/Day7 SQL/7-paev-andmetarkus-esitlus.pptx
+++ b/Materjalid/Day7 SQL/7-paev-andmetarkus-esitlus.pptx
@@ -11,12 +11,12 @@
     <p:sldId id="256" r:id="rId2"/>
     <p:sldId id="489" r:id="rId3"/>
     <p:sldId id="258" r:id="rId4"/>
-    <p:sldId id="260" r:id="rId5"/>
-    <p:sldId id="261" r:id="rId6"/>
-    <p:sldId id="263" r:id="rId7"/>
-    <p:sldId id="264" r:id="rId8"/>
-    <p:sldId id="265" r:id="rId9"/>
-    <p:sldId id="266" r:id="rId10"/>
+    <p:sldId id="261" r:id="rId5"/>
+    <p:sldId id="263" r:id="rId6"/>
+    <p:sldId id="264" r:id="rId7"/>
+    <p:sldId id="265" r:id="rId8"/>
+    <p:sldId id="266" r:id="rId9"/>
+    <p:sldId id="490" r:id="rId10"/>
     <p:sldId id="267" r:id="rId11"/>
     <p:sldId id="268" r:id="rId12"/>
     <p:sldId id="269" r:id="rId13"/>
@@ -1001,7 +1001,7 @@
           <a:p>
             <a:fld id="{A5AA0B6A-941B-4944-B140-87817CB84C4C}" type="datetimeFigureOut">
               <a:rPr lang="en-GB" smtClean="0"/>
-              <a:t>07/09/2026</a:t>
+              <a:t>08/09/2026</a:t>
             </a:fld>
             <a:endParaRPr lang="en-GB"/>
           </a:p>
@@ -1297,6 +1297,13 @@
           </p:nvPr>
         </p:nvSpPr>
         <p:spPr/>
+        <p:txBody>
+          <a:bodyPr/>
+          <a:lstStyle/>
+          <a:p>
+            <a:endParaRPr lang="en-GB"/>
+          </a:p>
+        </p:txBody>
       </p:sp>
       <p:sp>
         <p:nvSpPr>
@@ -1330,6 +1337,13 @@
           </p:nvPr>
         </p:nvSpPr>
         <p:spPr/>
+        <p:txBody>
+          <a:bodyPr/>
+          <a:lstStyle/>
+          <a:p>
+            <a:endParaRPr lang="en-GB"/>
+          </a:p>
+        </p:txBody>
       </p:sp>
     </p:spTree>
   </p:cSld>
@@ -1367,6 +1381,13 @@
           </p:nvPr>
         </p:nvSpPr>
         <p:spPr/>
+        <p:txBody>
+          <a:bodyPr/>
+          <a:lstStyle/>
+          <a:p>
+            <a:endParaRPr lang="en-GB"/>
+          </a:p>
+        </p:txBody>
       </p:sp>
       <p:sp>
         <p:nvSpPr>
@@ -1400,6 +1421,13 @@
           </p:nvPr>
         </p:nvSpPr>
         <p:spPr/>
+        <p:txBody>
+          <a:bodyPr/>
+          <a:lstStyle/>
+          <a:p>
+            <a:endParaRPr lang="en-GB"/>
+          </a:p>
+        </p:txBody>
       </p:sp>
     </p:spTree>
   </p:cSld>
@@ -1437,6 +1465,13 @@
           </p:nvPr>
         </p:nvSpPr>
         <p:spPr/>
+        <p:txBody>
+          <a:bodyPr/>
+          <a:lstStyle/>
+          <a:p>
+            <a:endParaRPr lang="en-GB"/>
+          </a:p>
+        </p:txBody>
       </p:sp>
       <p:sp>
         <p:nvSpPr>
@@ -1470,6 +1505,13 @@
           </p:nvPr>
         </p:nvSpPr>
         <p:spPr/>
+        <p:txBody>
+          <a:bodyPr/>
+          <a:lstStyle/>
+          <a:p>
+            <a:endParaRPr lang="en-GB"/>
+          </a:p>
+        </p:txBody>
       </p:sp>
     </p:spTree>
   </p:cSld>
@@ -1507,6 +1549,13 @@
           </p:nvPr>
         </p:nvSpPr>
         <p:spPr/>
+        <p:txBody>
+          <a:bodyPr/>
+          <a:lstStyle/>
+          <a:p>
+            <a:endParaRPr lang="en-GB"/>
+          </a:p>
+        </p:txBody>
       </p:sp>
       <p:sp>
         <p:nvSpPr>
@@ -1540,6 +1589,13 @@
           </p:nvPr>
         </p:nvSpPr>
         <p:spPr/>
+        <p:txBody>
+          <a:bodyPr/>
+          <a:lstStyle/>
+          <a:p>
+            <a:endParaRPr lang="en-GB"/>
+          </a:p>
+        </p:txBody>
       </p:sp>
     </p:spTree>
   </p:cSld>
@@ -1577,6 +1633,13 @@
           </p:nvPr>
         </p:nvSpPr>
         <p:spPr/>
+        <p:txBody>
+          <a:bodyPr/>
+          <a:lstStyle/>
+          <a:p>
+            <a:endParaRPr lang="en-GB"/>
+          </a:p>
+        </p:txBody>
       </p:sp>
       <p:sp>
         <p:nvSpPr>
@@ -1610,6 +1673,13 @@
           </p:nvPr>
         </p:nvSpPr>
         <p:spPr/>
+        <p:txBody>
+          <a:bodyPr/>
+          <a:lstStyle/>
+          <a:p>
+            <a:endParaRPr lang="en-GB"/>
+          </a:p>
+        </p:txBody>
       </p:sp>
     </p:spTree>
   </p:cSld>
@@ -1647,6 +1717,13 @@
           </p:nvPr>
         </p:nvSpPr>
         <p:spPr/>
+        <p:txBody>
+          <a:bodyPr/>
+          <a:lstStyle/>
+          <a:p>
+            <a:endParaRPr lang="en-GB"/>
+          </a:p>
+        </p:txBody>
       </p:sp>
       <p:sp>
         <p:nvSpPr>
@@ -1680,6 +1757,13 @@
           </p:nvPr>
         </p:nvSpPr>
         <p:spPr/>
+        <p:txBody>
+          <a:bodyPr/>
+          <a:lstStyle/>
+          <a:p>
+            <a:endParaRPr lang="en-GB"/>
+          </a:p>
+        </p:txBody>
       </p:sp>
     </p:spTree>
   </p:cSld>
@@ -1717,6 +1801,13 @@
           </p:nvPr>
         </p:nvSpPr>
         <p:spPr/>
+        <p:txBody>
+          <a:bodyPr/>
+          <a:lstStyle/>
+          <a:p>
+            <a:endParaRPr lang="en-GB"/>
+          </a:p>
+        </p:txBody>
       </p:sp>
       <p:sp>
         <p:nvSpPr>
@@ -1750,6 +1841,13 @@
           </p:nvPr>
         </p:nvSpPr>
         <p:spPr/>
+        <p:txBody>
+          <a:bodyPr/>
+          <a:lstStyle/>
+          <a:p>
+            <a:endParaRPr lang="en-GB"/>
+          </a:p>
+        </p:txBody>
       </p:sp>
     </p:spTree>
   </p:cSld>
@@ -1787,6 +1885,13 @@
           </p:nvPr>
         </p:nvSpPr>
         <p:spPr/>
+        <p:txBody>
+          <a:bodyPr/>
+          <a:lstStyle/>
+          <a:p>
+            <a:endParaRPr lang="en-GB"/>
+          </a:p>
+        </p:txBody>
       </p:sp>
       <p:sp>
         <p:nvSpPr>
@@ -1820,6 +1925,13 @@
           </p:nvPr>
         </p:nvSpPr>
         <p:spPr/>
+        <p:txBody>
+          <a:bodyPr/>
+          <a:lstStyle/>
+          <a:p>
+            <a:endParaRPr lang="en-GB"/>
+          </a:p>
+        </p:txBody>
       </p:sp>
     </p:spTree>
   </p:cSld>
@@ -2008,7 +2120,7 @@
           <a:p>
             <a:fld id="{5BCAD085-E8A6-8845-BD4E-CB4CCA059FC4}" type="datetimeFigureOut">
               <a:rPr lang="en-US" smtClean="0"/>
-              <a:t>9/7/2026</a:t>
+              <a:t>9/8/2026</a:t>
             </a:fld>
             <a:endParaRPr lang="en-US"/>
           </a:p>
@@ -2176,7 +2288,7 @@
           <a:p>
             <a:fld id="{5BCAD085-E8A6-8845-BD4E-CB4CCA059FC4}" type="datetimeFigureOut">
               <a:rPr lang="en-US" smtClean="0"/>
-              <a:t>9/7/2026</a:t>
+              <a:t>9/8/2026</a:t>
             </a:fld>
             <a:endParaRPr lang="en-US"/>
           </a:p>
@@ -2354,7 +2466,7 @@
           <a:p>
             <a:fld id="{5BCAD085-E8A6-8845-BD4E-CB4CCA059FC4}" type="datetimeFigureOut">
               <a:rPr lang="en-US" smtClean="0"/>
-              <a:t>9/7/2026</a:t>
+              <a:t>9/8/2026</a:t>
             </a:fld>
             <a:endParaRPr lang="en-US"/>
           </a:p>
@@ -3254,7 +3366,7 @@
           <a:p>
             <a:fld id="{5BCAD085-E8A6-8845-BD4E-CB4CCA059FC4}" type="datetimeFigureOut">
               <a:rPr lang="en-US" smtClean="0"/>
-              <a:t>9/7/2026</a:t>
+              <a:t>9/8/2026</a:t>
             </a:fld>
             <a:endParaRPr lang="en-US"/>
           </a:p>
@@ -3499,7 +3611,7 @@
           <a:p>
             <a:fld id="{5BCAD085-E8A6-8845-BD4E-CB4CCA059FC4}" type="datetimeFigureOut">
               <a:rPr lang="en-US" smtClean="0"/>
-              <a:t>9/7/2026</a:t>
+              <a:t>9/8/2026</a:t>
             </a:fld>
             <a:endParaRPr lang="en-US"/>
           </a:p>
@@ -3784,7 +3896,7 @@
           <a:p>
             <a:fld id="{5BCAD085-E8A6-8845-BD4E-CB4CCA059FC4}" type="datetimeFigureOut">
               <a:rPr lang="en-US" smtClean="0"/>
-              <a:t>9/7/2026</a:t>
+              <a:t>9/8/2026</a:t>
             </a:fld>
             <a:endParaRPr lang="en-US"/>
           </a:p>
@@ -4203,7 +4315,7 @@
           <a:p>
             <a:fld id="{5BCAD085-E8A6-8845-BD4E-CB4CCA059FC4}" type="datetimeFigureOut">
               <a:rPr lang="en-US" smtClean="0"/>
-              <a:t>9/7/2026</a:t>
+              <a:t>9/8/2026</a:t>
             </a:fld>
             <a:endParaRPr lang="en-US"/>
           </a:p>
@@ -4320,7 +4432,7 @@
           <a:p>
             <a:fld id="{5BCAD085-E8A6-8845-BD4E-CB4CCA059FC4}" type="datetimeFigureOut">
               <a:rPr lang="en-US" smtClean="0"/>
-              <a:t>9/7/2026</a:t>
+              <a:t>9/8/2026</a:t>
             </a:fld>
             <a:endParaRPr lang="en-US"/>
           </a:p>
@@ -4415,7 +4527,7 @@
           <a:p>
             <a:fld id="{5BCAD085-E8A6-8845-BD4E-CB4CCA059FC4}" type="datetimeFigureOut">
               <a:rPr lang="en-US" smtClean="0"/>
-              <a:t>9/7/2026</a:t>
+              <a:t>9/8/2026</a:t>
             </a:fld>
             <a:endParaRPr lang="en-US"/>
           </a:p>
@@ -4690,7 +4802,7 @@
           <a:p>
             <a:fld id="{5BCAD085-E8A6-8845-BD4E-CB4CCA059FC4}" type="datetimeFigureOut">
               <a:rPr lang="en-US" smtClean="0"/>
-              <a:t>9/7/2026</a:t>
+              <a:t>9/8/2026</a:t>
             </a:fld>
             <a:endParaRPr lang="en-US"/>
           </a:p>
@@ -4942,7 +5054,7 @@
           <a:p>
             <a:fld id="{5BCAD085-E8A6-8845-BD4E-CB4CCA059FC4}" type="datetimeFigureOut">
               <a:rPr lang="en-US" smtClean="0"/>
-              <a:t>9/7/2026</a:t>
+              <a:t>9/8/2026</a:t>
             </a:fld>
             <a:endParaRPr lang="en-US"/>
           </a:p>
@@ -5153,7 +5265,7 @@
           <a:p>
             <a:fld id="{5BCAD085-E8A6-8845-BD4E-CB4CCA059FC4}" type="datetimeFigureOut">
               <a:rPr lang="en-US" smtClean="0"/>
-              <a:t>9/7/2026</a:t>
+              <a:t>9/8/2026</a:t>
             </a:fld>
             <a:endParaRPr lang="en-US"/>
           </a:p>
@@ -7041,7 +7153,7 @@
         </p:nvSpPr>
         <p:spPr>
           <a:xfrm>
-            <a:off x="365760" y="1691640"/>
+            <a:off x="365760" y="1682496"/>
             <a:ext cx="5669280" cy="4617720"/>
           </a:xfrm>
           <a:prstGeom prst="roundRect">
@@ -7088,7 +7200,7 @@
         </p:nvSpPr>
         <p:spPr>
           <a:xfrm>
-            <a:off x="411480" y="2650338"/>
+            <a:off x="411480" y="1562202"/>
             <a:ext cx="5669280" cy="502920"/>
           </a:xfrm>
           <a:prstGeom prst="rect">
@@ -7133,7 +7245,7 @@
         </p:nvSpPr>
         <p:spPr>
           <a:xfrm>
-            <a:off x="365760" y="2615184"/>
+            <a:off x="365760" y="1527048"/>
             <a:ext cx="5669280" cy="502920"/>
           </a:xfrm>
           <a:prstGeom prst="rect">
@@ -7168,7 +7280,7 @@
         </p:nvSpPr>
         <p:spPr>
           <a:xfrm>
-            <a:off x="548640" y="3209544"/>
+            <a:off x="548640" y="2121408"/>
             <a:ext cx="5303520" cy="1477328"/>
           </a:xfrm>
           <a:prstGeom prst="rect">
@@ -7435,7 +7547,7 @@
         </p:nvSpPr>
         <p:spPr>
           <a:xfrm>
-            <a:off x="6263640" y="1691640"/>
+            <a:off x="6263640" y="1682496"/>
             <a:ext cx="5532120" cy="4617720"/>
           </a:xfrm>
           <a:prstGeom prst="roundRect">
@@ -7482,7 +7594,7 @@
         </p:nvSpPr>
         <p:spPr>
           <a:xfrm>
-            <a:off x="6309360" y="2660904"/>
+            <a:off x="6309360" y="1572768"/>
             <a:ext cx="5532120" cy="502920"/>
           </a:xfrm>
           <a:prstGeom prst="rect">
@@ -7527,7 +7639,7 @@
         </p:nvSpPr>
         <p:spPr>
           <a:xfrm>
-            <a:off x="6263640" y="2615184"/>
+            <a:off x="6263640" y="1527048"/>
             <a:ext cx="5532120" cy="502920"/>
           </a:xfrm>
           <a:prstGeom prst="rect">
@@ -7562,7 +7674,7 @@
         </p:nvSpPr>
         <p:spPr>
           <a:xfrm>
-            <a:off x="6446520" y="3209544"/>
+            <a:off x="6446520" y="2121408"/>
             <a:ext cx="5166359" cy="1708160"/>
           </a:xfrm>
           <a:prstGeom prst="rect">
@@ -7803,6 +7915,126 @@
           </a:p>
         </p:txBody>
       </p:sp>
+      <p:pic>
+        <p:nvPicPr>
+          <p:cNvPr id="6" name="Picture 5">
+            <a:extLst>
+              <a:ext uri="{FF2B5EF4-FFF2-40B4-BE49-F238E27FC236}">
+                <a16:creationId xmlns:a16="http://schemas.microsoft.com/office/drawing/2014/main" id="{23DFA6BA-1741-9429-6307-625BE86BC457}"/>
+              </a:ext>
+            </a:extLst>
+          </p:cNvPr>
+          <p:cNvPicPr>
+            <a:picLocks noChangeAspect="1"/>
+          </p:cNvPicPr>
+          <p:nvPr/>
+        </p:nvPicPr>
+        <p:blipFill>
+          <a:blip r:embed="rId3"/>
+          <a:stretch>
+            <a:fillRect/>
+          </a:stretch>
+        </p:blipFill>
+        <p:spPr>
+          <a:xfrm>
+            <a:off x="656897" y="3799804"/>
+            <a:ext cx="1971950" cy="695422"/>
+          </a:xfrm>
+          <a:prstGeom prst="rect">
+            <a:avLst/>
+          </a:prstGeom>
+        </p:spPr>
+      </p:pic>
+      <p:pic>
+        <p:nvPicPr>
+          <p:cNvPr id="11" name="Picture 10">
+            <a:extLst>
+              <a:ext uri="{FF2B5EF4-FFF2-40B4-BE49-F238E27FC236}">
+                <a16:creationId xmlns:a16="http://schemas.microsoft.com/office/drawing/2014/main" id="{2129F0E7-AF41-9867-A98A-DFAD004E1821}"/>
+              </a:ext>
+            </a:extLst>
+          </p:cNvPr>
+          <p:cNvPicPr>
+            <a:picLocks noChangeAspect="1"/>
+          </p:cNvPicPr>
+          <p:nvPr/>
+        </p:nvPicPr>
+        <p:blipFill>
+          <a:blip r:embed="rId4"/>
+          <a:stretch>
+            <a:fillRect/>
+          </a:stretch>
+        </p:blipFill>
+        <p:spPr>
+          <a:xfrm>
+            <a:off x="2857447" y="3799804"/>
+            <a:ext cx="2429214" cy="676369"/>
+          </a:xfrm>
+          <a:prstGeom prst="rect">
+            <a:avLst/>
+          </a:prstGeom>
+        </p:spPr>
+      </p:pic>
+      <p:pic>
+        <p:nvPicPr>
+          <p:cNvPr id="21" name="Picture 20">
+            <a:extLst>
+              <a:ext uri="{FF2B5EF4-FFF2-40B4-BE49-F238E27FC236}">
+                <a16:creationId xmlns:a16="http://schemas.microsoft.com/office/drawing/2014/main" id="{2F2DA2FC-B335-E9DF-E720-C7CE859BEE4F}"/>
+              </a:ext>
+            </a:extLst>
+          </p:cNvPr>
+          <p:cNvPicPr>
+            <a:picLocks noChangeAspect="1"/>
+          </p:cNvPicPr>
+          <p:nvPr/>
+        </p:nvPicPr>
+        <p:blipFill>
+          <a:blip r:embed="rId5"/>
+          <a:stretch>
+            <a:fillRect/>
+          </a:stretch>
+        </p:blipFill>
+        <p:spPr>
+          <a:xfrm>
+            <a:off x="750870" y="4827793"/>
+            <a:ext cx="1162212" cy="695422"/>
+          </a:xfrm>
+          <a:prstGeom prst="rect">
+            <a:avLst/>
+          </a:prstGeom>
+        </p:spPr>
+      </p:pic>
+      <p:pic>
+        <p:nvPicPr>
+          <p:cNvPr id="23" name="Picture 22">
+            <a:extLst>
+              <a:ext uri="{FF2B5EF4-FFF2-40B4-BE49-F238E27FC236}">
+                <a16:creationId xmlns:a16="http://schemas.microsoft.com/office/drawing/2014/main" id="{E036F9AB-6CDC-4DA3-AD98-8DA0BB1621E1}"/>
+              </a:ext>
+            </a:extLst>
+          </p:cNvPr>
+          <p:cNvPicPr>
+            <a:picLocks noChangeAspect="1"/>
+          </p:cNvPicPr>
+          <p:nvPr/>
+        </p:nvPicPr>
+        <p:blipFill>
+          <a:blip r:embed="rId6"/>
+          <a:stretch>
+            <a:fillRect/>
+          </a:stretch>
+        </p:blipFill>
+        <p:spPr>
+          <a:xfrm>
+            <a:off x="2857447" y="4875424"/>
+            <a:ext cx="2010056" cy="600159"/>
+          </a:xfrm>
+          <a:prstGeom prst="rect">
+            <a:avLst/>
+          </a:prstGeom>
+        </p:spPr>
+      </p:pic>
     </p:spTree>
   </p:cSld>
   <p:clrMapOvr>
@@ -8509,13 +8741,67 @@
           <a:p>
             <a:pPr algn="l"/>
             <a:r>
-              <a:rPr sz="1400" b="1">
+              <a:rPr sz="1400" b="1" dirty="0">
                 <a:solidFill>
                   <a:srgbClr val="0F203E"/>
                 </a:solidFill>
                 <a:latin typeface="Calibri"/>
               </a:rPr>
-              <a:t>3.  Mitu klienti elab Tallinnas?</a:t>
+              <a:t>3.  Mitu </a:t>
+            </a:r>
+            <a:r>
+              <a:rPr sz="1400" b="1" dirty="0" err="1">
+                <a:solidFill>
+                  <a:srgbClr val="0F203E"/>
+                </a:solidFill>
+                <a:latin typeface="Calibri"/>
+              </a:rPr>
+              <a:t>klienti</a:t>
+            </a:r>
+            <a:r>
+              <a:rPr sz="1400" b="1" dirty="0">
+                <a:solidFill>
+                  <a:srgbClr val="0F203E"/>
+                </a:solidFill>
+                <a:latin typeface="Calibri"/>
+              </a:rPr>
+              <a:t> </a:t>
+            </a:r>
+            <a:r>
+              <a:rPr sz="1400" b="1" dirty="0" err="1">
+                <a:solidFill>
+                  <a:srgbClr val="0F203E"/>
+                </a:solidFill>
+                <a:latin typeface="Calibri"/>
+              </a:rPr>
+              <a:t>elab</a:t>
+            </a:r>
+            <a:r>
+              <a:rPr sz="1400" b="1" dirty="0">
+                <a:solidFill>
+                  <a:srgbClr val="0F203E"/>
+                </a:solidFill>
+                <a:latin typeface="Calibri"/>
+              </a:rPr>
+              <a:t> </a:t>
+            </a:r>
+            <a:r>
+              <a:rPr sz="1400" b="1" dirty="0" err="1">
+                <a:solidFill>
+                  <a:srgbClr val="0F203E"/>
+                </a:solidFill>
+                <a:latin typeface="Calibri"/>
+              </a:rPr>
+              <a:t>Tallinnas</a:t>
+            </a:r>
+            <a:r>
+              <a:rPr sz="1400" b="1" dirty="0">
+                <a:solidFill>
+                  <a:srgbClr val="0F203E"/>
+                </a:solidFill>
+                <a:latin typeface="Calibri"/>
+              </a:rPr>
+              <a:t>?</a:t>
             </a:r>
           </a:p>
         </p:txBody>
@@ -8842,7 +9128,25 @@
                 </a:solidFill>
                 <a:latin typeface="Consolas"/>
               </a:rPr>
-              <a:t>hindade_summa</a:t>
+              <a:t>hindade</a:t>
+            </a:r>
+            <a:r>
+              <a:rPr sz="1000" b="0" dirty="0">
+                <a:solidFill>
+                  <a:srgbClr val="E2E8F0"/>
+                </a:solidFill>
+                <a:latin typeface="Consolas"/>
+              </a:rPr>
+              <a:t>_</a:t>
+            </a:r>
+            <a:r>
+              <a:rPr lang="en-GB" sz="1000" dirty="0" err="1">
+                <a:solidFill>
+                  <a:srgbClr val="E2E8F0"/>
+                </a:solidFill>
+                <a:latin typeface="Consolas"/>
+              </a:rPr>
+              <a:t>keskmine</a:t>
             </a:r>
             <a:endParaRPr lang="en-GB" sz="1200" b="0" dirty="0">
               <a:solidFill>
@@ -12146,103 +12450,13 @@
               </a:spcAft>
             </a:pPr>
             <a:r>
-              <a:rPr sz="1500" b="0" dirty="0">
-                <a:solidFill>
-                  <a:srgbClr val="334155"/>
-                </a:solidFill>
-                <a:latin typeface="Calibri"/>
-              </a:rPr>
-              <a:t>1.  </a:t>
-            </a:r>
-            <a:r>
-              <a:rPr sz="1500" b="0" dirty="0" err="1">
-                <a:solidFill>
-                  <a:srgbClr val="334155"/>
-                </a:solidFill>
-                <a:latin typeface="Calibri"/>
-              </a:rPr>
-              <a:t>Arvuta</a:t>
-            </a:r>
-            <a:r>
-              <a:rPr sz="1500" b="0" dirty="0">
-                <a:solidFill>
-                  <a:srgbClr val="334155"/>
-                </a:solidFill>
-                <a:latin typeface="Calibri"/>
-              </a:rPr>
-              <a:t> </a:t>
-            </a:r>
-            <a:r>
-              <a:rPr sz="1500" b="0" dirty="0" err="1">
-                <a:solidFill>
-                  <a:srgbClr val="334155"/>
-                </a:solidFill>
-                <a:latin typeface="Calibri"/>
-              </a:rPr>
-              <a:t>toodete</a:t>
-            </a:r>
-            <a:r>
-              <a:rPr sz="1500" b="0" dirty="0">
-                <a:solidFill>
-                  <a:srgbClr val="334155"/>
-                </a:solidFill>
-                <a:latin typeface="Calibri"/>
-              </a:rPr>
-              <a:t> </a:t>
-            </a:r>
-            <a:r>
-              <a:rPr sz="1500" b="0" dirty="0" err="1">
-                <a:solidFill>
-                  <a:srgbClr val="334155"/>
-                </a:solidFill>
-                <a:latin typeface="Calibri"/>
-              </a:rPr>
-              <a:t>keskmine</a:t>
-            </a:r>
-            <a:r>
-              <a:rPr sz="1500" b="0" dirty="0">
-                <a:solidFill>
-                  <a:srgbClr val="334155"/>
-                </a:solidFill>
-                <a:latin typeface="Calibri"/>
-              </a:rPr>
-              <a:t> hind </a:t>
-            </a:r>
-            <a:r>
-              <a:rPr sz="1500" b="0" dirty="0" err="1">
-                <a:solidFill>
-                  <a:srgbClr val="334155"/>
-                </a:solidFill>
-                <a:latin typeface="Calibri"/>
-              </a:rPr>
-              <a:t>tootekategooriate</a:t>
-            </a:r>
-            <a:r>
-              <a:rPr sz="1500" b="0" dirty="0">
-                <a:solidFill>
-                  <a:srgbClr val="334155"/>
-                </a:solidFill>
-                <a:latin typeface="Calibri"/>
-              </a:rPr>
-              <a:t> </a:t>
-            </a:r>
-            <a:r>
-              <a:rPr sz="1500" b="0" dirty="0" err="1">
-                <a:solidFill>
-                  <a:srgbClr val="334155"/>
-                </a:solidFill>
-                <a:latin typeface="Calibri"/>
-              </a:rPr>
-              <a:t>lõikes</a:t>
-            </a:r>
-            <a:r>
-              <a:rPr sz="1500" b="0" dirty="0">
-                <a:solidFill>
-                  <a:srgbClr val="334155"/>
-                </a:solidFill>
-                <a:latin typeface="Calibri"/>
-              </a:rPr>
-              <a:t>.</a:t>
+              <a:rPr sz="1500" b="0">
+                <a:solidFill>
+                  <a:srgbClr val="334155"/>
+                </a:solidFill>
+                <a:latin typeface="Calibri"/>
+              </a:rPr>
+              <a:t>1.  Arvuta toodete keskmine hind tootekategooriate lõikes.</a:t>
             </a:r>
           </a:p>
           <a:p>
@@ -12252,85 +12466,13 @@
               </a:spcAft>
             </a:pPr>
             <a:r>
-              <a:rPr sz="1500" b="0" dirty="0">
-                <a:solidFill>
-                  <a:srgbClr val="334155"/>
-                </a:solidFill>
-                <a:latin typeface="Calibri"/>
-              </a:rPr>
-              <a:t>2.  Leia </a:t>
-            </a:r>
-            <a:r>
-              <a:rPr sz="1500" b="0" dirty="0" err="1">
-                <a:solidFill>
-                  <a:srgbClr val="334155"/>
-                </a:solidFill>
-                <a:latin typeface="Calibri"/>
-              </a:rPr>
-              <a:t>toodete</a:t>
-            </a:r>
-            <a:r>
-              <a:rPr sz="1500" b="0" dirty="0">
-                <a:solidFill>
-                  <a:srgbClr val="334155"/>
-                </a:solidFill>
-                <a:latin typeface="Calibri"/>
-              </a:rPr>
-              <a:t> </a:t>
-            </a:r>
-            <a:r>
-              <a:rPr sz="1500" b="0" dirty="0" err="1">
-                <a:solidFill>
-                  <a:srgbClr val="334155"/>
-                </a:solidFill>
-                <a:latin typeface="Calibri"/>
-              </a:rPr>
-              <a:t>arv</a:t>
-            </a:r>
-            <a:r>
-              <a:rPr sz="1500" b="0" dirty="0">
-                <a:solidFill>
-                  <a:srgbClr val="334155"/>
-                </a:solidFill>
-                <a:latin typeface="Calibri"/>
-              </a:rPr>
-              <a:t> </a:t>
-            </a:r>
-            <a:r>
-              <a:rPr sz="1500" b="0" dirty="0" err="1">
-                <a:solidFill>
-                  <a:srgbClr val="334155"/>
-                </a:solidFill>
-                <a:latin typeface="Calibri"/>
-              </a:rPr>
-              <a:t>kategooriate</a:t>
-            </a:r>
-            <a:r>
-              <a:rPr sz="1500" b="0" dirty="0">
-                <a:solidFill>
-                  <a:srgbClr val="334155"/>
-                </a:solidFill>
-                <a:latin typeface="Calibri"/>
-              </a:rPr>
-              <a:t> </a:t>
-            </a:r>
-            <a:r>
-              <a:rPr sz="1500" b="0" dirty="0" err="1">
-                <a:solidFill>
-                  <a:srgbClr val="334155"/>
-                </a:solidFill>
-                <a:latin typeface="Calibri"/>
-              </a:rPr>
-              <a:t>lõikes</a:t>
-            </a:r>
-            <a:r>
-              <a:rPr sz="1500" b="0" dirty="0">
-                <a:solidFill>
-                  <a:srgbClr val="334155"/>
-                </a:solidFill>
-                <a:latin typeface="Calibri"/>
-              </a:rPr>
-              <a:t>.</a:t>
+              <a:rPr sz="1500" b="0">
+                <a:solidFill>
+                  <a:srgbClr val="334155"/>
+                </a:solidFill>
+                <a:latin typeface="Calibri"/>
+              </a:rPr>
+              <a:t>2.  Leia toodete arv kategooriate lõikes.</a:t>
             </a:r>
           </a:p>
           <a:p>
@@ -12340,85 +12482,13 @@
               </a:spcAft>
             </a:pPr>
             <a:r>
-              <a:rPr sz="1500" b="0" dirty="0">
-                <a:solidFill>
-                  <a:srgbClr val="334155"/>
-                </a:solidFill>
-                <a:latin typeface="Calibri"/>
-              </a:rPr>
-              <a:t>3.  Leia </a:t>
-            </a:r>
-            <a:r>
-              <a:rPr sz="1500" b="0" dirty="0" err="1">
-                <a:solidFill>
-                  <a:srgbClr val="334155"/>
-                </a:solidFill>
-                <a:latin typeface="Calibri"/>
-              </a:rPr>
-              <a:t>odavaim</a:t>
-            </a:r>
-            <a:r>
-              <a:rPr sz="1500" b="0" dirty="0">
-                <a:solidFill>
-                  <a:srgbClr val="334155"/>
-                </a:solidFill>
-                <a:latin typeface="Calibri"/>
-              </a:rPr>
-              <a:t> ja </a:t>
-            </a:r>
-            <a:r>
-              <a:rPr sz="1500" b="0" dirty="0" err="1">
-                <a:solidFill>
-                  <a:srgbClr val="334155"/>
-                </a:solidFill>
-                <a:latin typeface="Calibri"/>
-              </a:rPr>
-              <a:t>kalleim</a:t>
-            </a:r>
-            <a:r>
-              <a:rPr sz="1500" b="0" dirty="0">
-                <a:solidFill>
-                  <a:srgbClr val="334155"/>
-                </a:solidFill>
-                <a:latin typeface="Calibri"/>
-              </a:rPr>
-              <a:t> hind </a:t>
-            </a:r>
-            <a:r>
-              <a:rPr sz="1500" b="0" dirty="0" err="1">
-                <a:solidFill>
-                  <a:srgbClr val="334155"/>
-                </a:solidFill>
-                <a:latin typeface="Calibri"/>
-              </a:rPr>
-              <a:t>igas</a:t>
-            </a:r>
-            <a:r>
-              <a:rPr sz="1500" b="0" dirty="0">
-                <a:solidFill>
-                  <a:srgbClr val="334155"/>
-                </a:solidFill>
-                <a:latin typeface="Calibri"/>
-              </a:rPr>
-              <a:t> </a:t>
-            </a:r>
-            <a:r>
-              <a:rPr sz="1500" b="0" dirty="0" err="1">
-                <a:solidFill>
-                  <a:srgbClr val="334155"/>
-                </a:solidFill>
-                <a:latin typeface="Calibri"/>
-              </a:rPr>
-              <a:t>kategoorias</a:t>
-            </a:r>
-            <a:r>
-              <a:rPr sz="1500" b="0" dirty="0">
-                <a:solidFill>
-                  <a:srgbClr val="334155"/>
-                </a:solidFill>
-                <a:latin typeface="Calibri"/>
-              </a:rPr>
-              <a:t>.</a:t>
+              <a:rPr sz="1500" b="0">
+                <a:solidFill>
+                  <a:srgbClr val="334155"/>
+                </a:solidFill>
+                <a:latin typeface="Calibri"/>
+              </a:rPr>
+              <a:t>3.  Leia odavaim ja kalleim hind igas kategoorias.</a:t>
             </a:r>
           </a:p>
           <a:p>
@@ -12428,86 +12498,20 @@
               </a:spcAft>
             </a:pPr>
             <a:r>
-              <a:rPr sz="1500" b="0" dirty="0">
-                <a:solidFill>
-                  <a:srgbClr val="334155"/>
-                </a:solidFill>
-                <a:latin typeface="Calibri"/>
-              </a:rPr>
-              <a:t>4.  Kuva </a:t>
-            </a:r>
-            <a:r>
-              <a:rPr sz="1500" b="0" dirty="0" err="1">
-                <a:solidFill>
-                  <a:srgbClr val="334155"/>
-                </a:solidFill>
-                <a:latin typeface="Calibri"/>
-              </a:rPr>
-              <a:t>tellimuste</a:t>
-            </a:r>
-            <a:r>
-              <a:rPr sz="1500" b="0" dirty="0">
-                <a:solidFill>
-                  <a:srgbClr val="334155"/>
-                </a:solidFill>
-                <a:latin typeface="Calibri"/>
-              </a:rPr>
-              <a:t> </a:t>
-            </a:r>
-            <a:r>
-              <a:rPr sz="1500" b="0" dirty="0" err="1">
-                <a:solidFill>
-                  <a:srgbClr val="334155"/>
-                </a:solidFill>
-                <a:latin typeface="Calibri"/>
-              </a:rPr>
-              <a:t>arv</a:t>
-            </a:r>
-            <a:r>
-              <a:rPr sz="1500" b="0" dirty="0">
-                <a:solidFill>
-                  <a:srgbClr val="334155"/>
-                </a:solidFill>
-                <a:latin typeface="Calibri"/>
-              </a:rPr>
-              <a:t> </a:t>
-            </a:r>
-            <a:r>
-              <a:rPr sz="1500" b="0" dirty="0" err="1">
-                <a:solidFill>
-                  <a:srgbClr val="334155"/>
-                </a:solidFill>
-                <a:latin typeface="Calibri"/>
-              </a:rPr>
-              <a:t>tarneviiside</a:t>
-            </a:r>
-            <a:r>
-              <a:rPr sz="1500" b="0" dirty="0">
-                <a:solidFill>
-                  <a:srgbClr val="334155"/>
-                </a:solidFill>
-                <a:latin typeface="Calibri"/>
-              </a:rPr>
-              <a:t> </a:t>
-            </a:r>
-            <a:r>
-              <a:rPr sz="1500" b="0" dirty="0" err="1">
-                <a:solidFill>
-                  <a:srgbClr val="334155"/>
-                </a:solidFill>
-                <a:latin typeface="Calibri"/>
-              </a:rPr>
-              <a:t>lõikes</a:t>
-            </a:r>
-            <a:r>
-              <a:rPr sz="1500" b="0" dirty="0">
-                <a:solidFill>
-                  <a:srgbClr val="334155"/>
-                </a:solidFill>
-                <a:latin typeface="Calibri"/>
-              </a:rPr>
-              <a:t>.</a:t>
-            </a:r>
+              <a:rPr sz="1500" b="0">
+                <a:solidFill>
+                  <a:srgbClr val="334155"/>
+                </a:solidFill>
+                <a:latin typeface="Calibri"/>
+              </a:rPr>
+              <a:t>4.  Kuva tellimuste arv tarneviiside lõikes.</a:t>
+            </a:r>
+            <a:endParaRPr sz="1500" b="0" dirty="0">
+              <a:solidFill>
+                <a:srgbClr val="334155"/>
+              </a:solidFill>
+              <a:latin typeface="Calibri"/>
+            </a:endParaRPr>
           </a:p>
         </p:txBody>
       </p:sp>
@@ -13175,6 +13179,126 @@
           </a:p>
         </p:txBody>
       </p:sp>
+      <p:pic>
+        <p:nvPicPr>
+          <p:cNvPr id="6" name="Picture 5">
+            <a:extLst>
+              <a:ext uri="{FF2B5EF4-FFF2-40B4-BE49-F238E27FC236}">
+                <a16:creationId xmlns:a16="http://schemas.microsoft.com/office/drawing/2014/main" id="{329EF109-E1C4-CBA3-5332-8D6183863990}"/>
+              </a:ext>
+            </a:extLst>
+          </p:cNvPr>
+          <p:cNvPicPr>
+            <a:picLocks noChangeAspect="1"/>
+          </p:cNvPicPr>
+          <p:nvPr/>
+        </p:nvPicPr>
+        <p:blipFill>
+          <a:blip r:embed="rId3"/>
+          <a:stretch>
+            <a:fillRect/>
+          </a:stretch>
+        </p:blipFill>
+        <p:spPr>
+          <a:xfrm>
+            <a:off x="579121" y="4000500"/>
+            <a:ext cx="1986373" cy="1324248"/>
+          </a:xfrm>
+          <a:prstGeom prst="rect">
+            <a:avLst/>
+          </a:prstGeom>
+        </p:spPr>
+      </p:pic>
+      <p:pic>
+        <p:nvPicPr>
+          <p:cNvPr id="11" name="Picture 10">
+            <a:extLst>
+              <a:ext uri="{FF2B5EF4-FFF2-40B4-BE49-F238E27FC236}">
+                <a16:creationId xmlns:a16="http://schemas.microsoft.com/office/drawing/2014/main" id="{9BD6B515-AC88-95D8-F626-70550F40EC6C}"/>
+              </a:ext>
+            </a:extLst>
+          </p:cNvPr>
+          <p:cNvPicPr>
+            <a:picLocks noChangeAspect="1"/>
+          </p:cNvPicPr>
+          <p:nvPr/>
+        </p:nvPicPr>
+        <p:blipFill>
+          <a:blip r:embed="rId4"/>
+          <a:stretch>
+            <a:fillRect/>
+          </a:stretch>
+        </p:blipFill>
+        <p:spPr>
+          <a:xfrm>
+            <a:off x="2794094" y="3947059"/>
+            <a:ext cx="1918924" cy="1377689"/>
+          </a:xfrm>
+          <a:prstGeom prst="rect">
+            <a:avLst/>
+          </a:prstGeom>
+        </p:spPr>
+      </p:pic>
+      <p:pic>
+        <p:nvPicPr>
+          <p:cNvPr id="21" name="Picture 20">
+            <a:extLst>
+              <a:ext uri="{FF2B5EF4-FFF2-40B4-BE49-F238E27FC236}">
+                <a16:creationId xmlns:a16="http://schemas.microsoft.com/office/drawing/2014/main" id="{0D0F2A09-765B-0053-1D7F-EB23BFC92564}"/>
+              </a:ext>
+            </a:extLst>
+          </p:cNvPr>
+          <p:cNvPicPr>
+            <a:picLocks noChangeAspect="1"/>
+          </p:cNvPicPr>
+          <p:nvPr/>
+        </p:nvPicPr>
+        <p:blipFill>
+          <a:blip r:embed="rId5"/>
+          <a:stretch>
+            <a:fillRect/>
+          </a:stretch>
+        </p:blipFill>
+        <p:spPr>
+          <a:xfrm>
+            <a:off x="368808" y="5422900"/>
+            <a:ext cx="2613931" cy="1435100"/>
+          </a:xfrm>
+          <a:prstGeom prst="rect">
+            <a:avLst/>
+          </a:prstGeom>
+        </p:spPr>
+      </p:pic>
+      <p:pic>
+        <p:nvPicPr>
+          <p:cNvPr id="23" name="Picture 22">
+            <a:extLst>
+              <a:ext uri="{FF2B5EF4-FFF2-40B4-BE49-F238E27FC236}">
+                <a16:creationId xmlns:a16="http://schemas.microsoft.com/office/drawing/2014/main" id="{92784E76-94B5-0B65-038F-853095981F56}"/>
+              </a:ext>
+            </a:extLst>
+          </p:cNvPr>
+          <p:cNvPicPr>
+            <a:picLocks noChangeAspect="1"/>
+          </p:cNvPicPr>
+          <p:nvPr/>
+        </p:nvPicPr>
+        <p:blipFill>
+          <a:blip r:embed="rId6"/>
+          <a:stretch>
+            <a:fillRect/>
+          </a:stretch>
+        </p:blipFill>
+        <p:spPr>
+          <a:xfrm>
+            <a:off x="3262862" y="5490856"/>
+            <a:ext cx="2886478" cy="1219370"/>
+          </a:xfrm>
+          <a:prstGeom prst="rect">
+            <a:avLst/>
+          </a:prstGeom>
+        </p:spPr>
+      </p:pic>
     </p:spTree>
   </p:cSld>
   <p:clrMapOvr>
@@ -13552,14 +13676,47 @@
               </a:spcAft>
             </a:pPr>
             <a:r>
-              <a:rPr sz="1000" b="0">
-                <a:solidFill>
-                  <a:srgbClr val="E2E8F0"/>
-                </a:solidFill>
-                <a:latin typeface="Consolas"/>
-              </a:rPr>
-              <a:t>SELECT kategooria, AVG(hind) AS keskmine_hind</a:t>
-            </a:r>
+              <a:rPr sz="1000" b="0" dirty="0">
+                <a:solidFill>
+                  <a:srgbClr val="E2E8F0"/>
+                </a:solidFill>
+                <a:latin typeface="Consolas"/>
+              </a:rPr>
+              <a:t>SELECT </a:t>
+            </a:r>
+            <a:r>
+              <a:rPr sz="1000" b="0" dirty="0" err="1">
+                <a:solidFill>
+                  <a:srgbClr val="E2E8F0"/>
+                </a:solidFill>
+                <a:latin typeface="Consolas"/>
+              </a:rPr>
+              <a:t>kategooria</a:t>
+            </a:r>
+            <a:r>
+              <a:rPr sz="1000" b="0" dirty="0">
+                <a:solidFill>
+                  <a:srgbClr val="E2E8F0"/>
+                </a:solidFill>
+                <a:latin typeface="Consolas"/>
+              </a:rPr>
+              <a:t>, AVG(hind) AS </a:t>
+            </a:r>
+            <a:r>
+              <a:rPr sz="1000" b="0" dirty="0" err="1">
+                <a:solidFill>
+                  <a:srgbClr val="E2E8F0"/>
+                </a:solidFill>
+                <a:latin typeface="Consolas"/>
+              </a:rPr>
+              <a:t>keskmine_hind</a:t>
+            </a:r>
+            <a:endParaRPr sz="1000" b="0" dirty="0">
+              <a:solidFill>
+                <a:srgbClr val="E2E8F0"/>
+              </a:solidFill>
+              <a:latin typeface="Consolas"/>
+            </a:endParaRPr>
           </a:p>
           <a:p>
             <a:pPr>
@@ -13568,7 +13725,7 @@
               </a:spcAft>
             </a:pPr>
             <a:r>
-              <a:rPr sz="1000" b="0">
+              <a:rPr sz="1000" b="0" dirty="0">
                 <a:solidFill>
                   <a:srgbClr val="E2E8F0"/>
                 </a:solidFill>
@@ -13584,13 +13741,31 @@
               </a:spcAft>
             </a:pPr>
             <a:r>
-              <a:rPr sz="1000" b="0">
-                <a:solidFill>
-                  <a:srgbClr val="E2E8F0"/>
-                </a:solidFill>
-                <a:latin typeface="Consolas"/>
-              </a:rPr>
-              <a:t>GROUP BY kategooria;</a:t>
+              <a:rPr sz="1000" b="0" dirty="0">
+                <a:solidFill>
+                  <a:srgbClr val="E2E8F0"/>
+                </a:solidFill>
+                <a:latin typeface="Consolas"/>
+              </a:rPr>
+              <a:t>GROUP BY </a:t>
+            </a:r>
+            <a:r>
+              <a:rPr sz="1000" b="0" dirty="0" err="1">
+                <a:solidFill>
+                  <a:srgbClr val="E2E8F0"/>
+                </a:solidFill>
+                <a:latin typeface="Consolas"/>
+              </a:rPr>
+              <a:t>kategooria</a:t>
+            </a:r>
+            <a:r>
+              <a:rPr sz="1000" b="0" dirty="0">
+                <a:solidFill>
+                  <a:srgbClr val="E2E8F0"/>
+                </a:solidFill>
+                <a:latin typeface="Consolas"/>
+              </a:rPr>
+              <a:t>;</a:t>
             </a:r>
           </a:p>
         </p:txBody>
@@ -13705,14 +13880,47 @@
               </a:spcAft>
             </a:pPr>
             <a:r>
-              <a:rPr sz="1000" b="0">
-                <a:solidFill>
-                  <a:srgbClr val="E2E8F0"/>
-                </a:solidFill>
-                <a:latin typeface="Consolas"/>
-              </a:rPr>
-              <a:t>SELECT kategooria, COUNT(*) AS toodete_arv</a:t>
-            </a:r>
+              <a:rPr sz="1000" b="0" dirty="0">
+                <a:solidFill>
+                  <a:srgbClr val="E2E8F0"/>
+                </a:solidFill>
+                <a:latin typeface="Consolas"/>
+              </a:rPr>
+              <a:t>SELECT </a:t>
+            </a:r>
+            <a:r>
+              <a:rPr sz="1000" b="0" dirty="0" err="1">
+                <a:solidFill>
+                  <a:srgbClr val="E2E8F0"/>
+                </a:solidFill>
+                <a:latin typeface="Consolas"/>
+              </a:rPr>
+              <a:t>kategooria</a:t>
+            </a:r>
+            <a:r>
+              <a:rPr sz="1000" b="0" dirty="0">
+                <a:solidFill>
+                  <a:srgbClr val="E2E8F0"/>
+                </a:solidFill>
+                <a:latin typeface="Consolas"/>
+              </a:rPr>
+              <a:t>, COUNT(*) AS </a:t>
+            </a:r>
+            <a:r>
+              <a:rPr sz="1000" b="0" dirty="0" err="1">
+                <a:solidFill>
+                  <a:srgbClr val="E2E8F0"/>
+                </a:solidFill>
+                <a:latin typeface="Consolas"/>
+              </a:rPr>
+              <a:t>toodete_arv</a:t>
+            </a:r>
+            <a:endParaRPr sz="1000" b="0" dirty="0">
+              <a:solidFill>
+                <a:srgbClr val="E2E8F0"/>
+              </a:solidFill>
+              <a:latin typeface="Consolas"/>
+            </a:endParaRPr>
           </a:p>
           <a:p>
             <a:pPr>
@@ -13721,7 +13929,7 @@
               </a:spcAft>
             </a:pPr>
             <a:r>
-              <a:rPr sz="1000" b="0">
+              <a:rPr sz="1000" b="0" dirty="0">
                 <a:solidFill>
                   <a:srgbClr val="E2E8F0"/>
                 </a:solidFill>
@@ -13737,13 +13945,31 @@
               </a:spcAft>
             </a:pPr>
             <a:r>
-              <a:rPr sz="1000" b="0">
-                <a:solidFill>
-                  <a:srgbClr val="E2E8F0"/>
-                </a:solidFill>
-                <a:latin typeface="Consolas"/>
-              </a:rPr>
-              <a:t>GROUP BY kategooria;</a:t>
+              <a:rPr sz="1000" b="0" dirty="0">
+                <a:solidFill>
+                  <a:srgbClr val="E2E8F0"/>
+                </a:solidFill>
+                <a:latin typeface="Consolas"/>
+              </a:rPr>
+              <a:t>GROUP BY </a:t>
+            </a:r>
+            <a:r>
+              <a:rPr sz="1000" b="0" dirty="0" err="1">
+                <a:solidFill>
+                  <a:srgbClr val="E2E8F0"/>
+                </a:solidFill>
+                <a:latin typeface="Consolas"/>
+              </a:rPr>
+              <a:t>kategooria</a:t>
+            </a:r>
+            <a:r>
+              <a:rPr sz="1000" b="0" dirty="0">
+                <a:solidFill>
+                  <a:srgbClr val="E2E8F0"/>
+                </a:solidFill>
+                <a:latin typeface="Consolas"/>
+              </a:rPr>
+              <a:t>;</a:t>
             </a:r>
           </a:p>
         </p:txBody>
@@ -13858,14 +14084,65 @@
               </a:spcAft>
             </a:pPr>
             <a:r>
-              <a:rPr sz="1000" b="0">
-                <a:solidFill>
-                  <a:srgbClr val="E2E8F0"/>
-                </a:solidFill>
-                <a:latin typeface="Consolas"/>
-              </a:rPr>
-              <a:t>SELECT kategooria, MIN(hind) AS odavaim, MAX(hind) AS kalleim</a:t>
-            </a:r>
+              <a:rPr sz="1000" b="0" dirty="0">
+                <a:solidFill>
+                  <a:srgbClr val="E2E8F0"/>
+                </a:solidFill>
+                <a:latin typeface="Consolas"/>
+              </a:rPr>
+              <a:t>SELECT </a:t>
+            </a:r>
+            <a:r>
+              <a:rPr sz="1000" b="0" dirty="0" err="1">
+                <a:solidFill>
+                  <a:srgbClr val="E2E8F0"/>
+                </a:solidFill>
+                <a:latin typeface="Consolas"/>
+              </a:rPr>
+              <a:t>kategooria</a:t>
+            </a:r>
+            <a:r>
+              <a:rPr sz="1000" b="0" dirty="0">
+                <a:solidFill>
+                  <a:srgbClr val="E2E8F0"/>
+                </a:solidFill>
+                <a:latin typeface="Consolas"/>
+              </a:rPr>
+              <a:t>, MIN(hind) AS </a:t>
+            </a:r>
+            <a:r>
+              <a:rPr sz="1000" b="0" dirty="0" err="1">
+                <a:solidFill>
+                  <a:srgbClr val="E2E8F0"/>
+                </a:solidFill>
+                <a:latin typeface="Consolas"/>
+              </a:rPr>
+              <a:t>odavaim</a:t>
+            </a:r>
+            <a:r>
+              <a:rPr sz="1000" b="0" dirty="0">
+                <a:solidFill>
+                  <a:srgbClr val="E2E8F0"/>
+                </a:solidFill>
+                <a:latin typeface="Consolas"/>
+              </a:rPr>
+              <a:t>, MAX(hind) AS </a:t>
+            </a:r>
+            <a:r>
+              <a:rPr sz="1000" b="0" dirty="0" err="1">
+                <a:solidFill>
+                  <a:srgbClr val="E2E8F0"/>
+                </a:solidFill>
+                <a:latin typeface="Consolas"/>
+              </a:rPr>
+              <a:t>kalleim</a:t>
+            </a:r>
+            <a:endParaRPr sz="1000" b="0" dirty="0">
+              <a:solidFill>
+                <a:srgbClr val="E2E8F0"/>
+              </a:solidFill>
+              <a:latin typeface="Consolas"/>
+            </a:endParaRPr>
           </a:p>
           <a:p>
             <a:pPr>
@@ -13874,7 +14151,7 @@
               </a:spcAft>
             </a:pPr>
             <a:r>
-              <a:rPr sz="1000" b="0">
+              <a:rPr sz="1000" b="0" dirty="0">
                 <a:solidFill>
                   <a:srgbClr val="E2E8F0"/>
                 </a:solidFill>
@@ -13890,13 +14167,31 @@
               </a:spcAft>
             </a:pPr>
             <a:r>
-              <a:rPr sz="1000" b="0">
-                <a:solidFill>
-                  <a:srgbClr val="E2E8F0"/>
-                </a:solidFill>
-                <a:latin typeface="Consolas"/>
-              </a:rPr>
-              <a:t>GROUP BY kategooria;</a:t>
+              <a:rPr sz="1000" b="0" dirty="0">
+                <a:solidFill>
+                  <a:srgbClr val="E2E8F0"/>
+                </a:solidFill>
+                <a:latin typeface="Consolas"/>
+              </a:rPr>
+              <a:t>GROUP BY </a:t>
+            </a:r>
+            <a:r>
+              <a:rPr sz="1000" b="0" dirty="0" err="1">
+                <a:solidFill>
+                  <a:srgbClr val="E2E8F0"/>
+                </a:solidFill>
+                <a:latin typeface="Consolas"/>
+              </a:rPr>
+              <a:t>kategooria</a:t>
+            </a:r>
+            <a:r>
+              <a:rPr sz="1000" b="0" dirty="0">
+                <a:solidFill>
+                  <a:srgbClr val="E2E8F0"/>
+                </a:solidFill>
+                <a:latin typeface="Consolas"/>
+              </a:rPr>
+              <a:t>;</a:t>
             </a:r>
           </a:p>
         </p:txBody>
@@ -14011,35 +14306,101 @@
               </a:spcAft>
             </a:pPr>
             <a:r>
-              <a:rPr sz="1000" b="0">
-                <a:solidFill>
-                  <a:srgbClr val="E2E8F0"/>
-                </a:solidFill>
-                <a:latin typeface="Consolas"/>
-              </a:rPr>
-              <a:t>SELECT tarneviis, COUNT(*) AS tellimuste_arv</a:t>
-            </a:r>
-          </a:p>
-          <a:p>
-            <a:r>
-              <a:rPr sz="1000" b="0">
-                <a:solidFill>
-                  <a:srgbClr val="E2E8F0"/>
-                </a:solidFill>
-                <a:latin typeface="Consolas"/>
-              </a:rPr>
-              <a:t>FROM tellimused</a:t>
-            </a:r>
-          </a:p>
-          <a:p>
-            <a:r>
-              <a:rPr sz="1000" b="0">
-                <a:solidFill>
-                  <a:srgbClr val="E2E8F0"/>
-                </a:solidFill>
-                <a:latin typeface="Consolas"/>
-              </a:rPr>
-              <a:t>GROUP BY tarneviis;</a:t>
+              <a:rPr sz="1000" b="0" dirty="0">
+                <a:solidFill>
+                  <a:srgbClr val="E2E8F0"/>
+                </a:solidFill>
+                <a:latin typeface="Consolas"/>
+              </a:rPr>
+              <a:t>SELECT </a:t>
+            </a:r>
+            <a:r>
+              <a:rPr sz="1000" b="0" dirty="0" err="1">
+                <a:solidFill>
+                  <a:srgbClr val="E2E8F0"/>
+                </a:solidFill>
+                <a:latin typeface="Consolas"/>
+              </a:rPr>
+              <a:t>tarneviis</a:t>
+            </a:r>
+            <a:r>
+              <a:rPr sz="1000" b="0" dirty="0">
+                <a:solidFill>
+                  <a:srgbClr val="E2E8F0"/>
+                </a:solidFill>
+                <a:latin typeface="Consolas"/>
+              </a:rPr>
+              <a:t>, COUNT(*) AS </a:t>
+            </a:r>
+            <a:r>
+              <a:rPr sz="1000" b="0" dirty="0" err="1">
+                <a:solidFill>
+                  <a:srgbClr val="E2E8F0"/>
+                </a:solidFill>
+                <a:latin typeface="Consolas"/>
+              </a:rPr>
+              <a:t>tellimuste_arv</a:t>
+            </a:r>
+            <a:endParaRPr sz="1000" b="0" dirty="0">
+              <a:solidFill>
+                <a:srgbClr val="E2E8F0"/>
+              </a:solidFill>
+              <a:latin typeface="Consolas"/>
+            </a:endParaRPr>
+          </a:p>
+          <a:p>
+            <a:r>
+              <a:rPr sz="1000" b="0" dirty="0">
+                <a:solidFill>
+                  <a:srgbClr val="E2E8F0"/>
+                </a:solidFill>
+                <a:latin typeface="Consolas"/>
+              </a:rPr>
+              <a:t>FROM </a:t>
+            </a:r>
+            <a:r>
+              <a:rPr sz="1000" b="0" dirty="0" err="1">
+                <a:solidFill>
+                  <a:srgbClr val="E2E8F0"/>
+                </a:solidFill>
+                <a:latin typeface="Consolas"/>
+              </a:rPr>
+              <a:t>tellimused</a:t>
+            </a:r>
+            <a:endParaRPr sz="1000" b="0" dirty="0">
+              <a:solidFill>
+                <a:srgbClr val="E2E8F0"/>
+              </a:solidFill>
+              <a:latin typeface="Consolas"/>
+            </a:endParaRPr>
+          </a:p>
+          <a:p>
+            <a:r>
+              <a:rPr sz="1000" b="0" dirty="0">
+                <a:solidFill>
+                  <a:srgbClr val="E2E8F0"/>
+                </a:solidFill>
+                <a:latin typeface="Consolas"/>
+              </a:rPr>
+              <a:t>GROUP BY </a:t>
+            </a:r>
+            <a:r>
+              <a:rPr sz="1000" b="0" dirty="0" err="1">
+                <a:solidFill>
+                  <a:srgbClr val="E2E8F0"/>
+                </a:solidFill>
+                <a:latin typeface="Consolas"/>
+              </a:rPr>
+              <a:t>tarneviis</a:t>
+            </a:r>
+            <a:r>
+              <a:rPr sz="1000" b="0" dirty="0">
+                <a:solidFill>
+                  <a:srgbClr val="E2E8F0"/>
+                </a:solidFill>
+                <a:latin typeface="Consolas"/>
+              </a:rPr>
+              <a:t>;</a:t>
             </a:r>
           </a:p>
         </p:txBody>
@@ -15352,7 +15713,7 @@
             <p:ph sz="quarter" idx="10"/>
             <p:extLst>
               <p:ext uri="{D42A27DB-BD31-4B8C-83A1-F6EECF244321}">
-                <p14:modId xmlns:p14="http://schemas.microsoft.com/office/powerpoint/2010/main" val="2087612740"/>
+                <p14:modId xmlns:p14="http://schemas.microsoft.com/office/powerpoint/2010/main" val="2184050408"/>
               </p:ext>
             </p:extLst>
           </p:nvPr>
@@ -15651,11 +16012,13 @@
                         <a:t> – </a:t>
                       </a:r>
                       <a:r>
-                        <a:rPr lang="en-GB" sz="1800" b="1" dirty="0">
+                        <a:rPr lang="en-GB" sz="2400" b="0" kern="1200" dirty="0">
                           <a:solidFill>
                             <a:srgbClr val="0F203E"/>
                           </a:solidFill>
                           <a:latin typeface="+mn-lt"/>
+                          <a:ea typeface="+mn-ea"/>
+                          <a:cs typeface="+mn-cs"/>
                         </a:rPr>
                         <a:t>GROUP BY</a:t>
                       </a:r>
@@ -18535,6 +18898,126 @@
           </a:p>
         </p:txBody>
       </p:sp>
+      <p:pic>
+        <p:nvPicPr>
+          <p:cNvPr id="7" name="Picture 6">
+            <a:extLst>
+              <a:ext uri="{FF2B5EF4-FFF2-40B4-BE49-F238E27FC236}">
+                <a16:creationId xmlns:a16="http://schemas.microsoft.com/office/drawing/2014/main" id="{E13B4D4B-D643-E7EE-71E2-2EFFDF4AE32F}"/>
+              </a:ext>
+            </a:extLst>
+          </p:cNvPr>
+          <p:cNvPicPr>
+            <a:picLocks noChangeAspect="1"/>
+          </p:cNvPicPr>
+          <p:nvPr/>
+        </p:nvPicPr>
+        <p:blipFill>
+          <a:blip r:embed="rId3"/>
+          <a:stretch>
+            <a:fillRect/>
+          </a:stretch>
+        </p:blipFill>
+        <p:spPr>
+          <a:xfrm>
+            <a:off x="256764" y="3819834"/>
+            <a:ext cx="2943636" cy="1028844"/>
+          </a:xfrm>
+          <a:prstGeom prst="rect">
+            <a:avLst/>
+          </a:prstGeom>
+        </p:spPr>
+      </p:pic>
+      <p:pic>
+        <p:nvPicPr>
+          <p:cNvPr id="20" name="Picture 19">
+            <a:extLst>
+              <a:ext uri="{FF2B5EF4-FFF2-40B4-BE49-F238E27FC236}">
+                <a16:creationId xmlns:a16="http://schemas.microsoft.com/office/drawing/2014/main" id="{C2977B29-EE8E-89F1-696B-7C74AF2294A2}"/>
+              </a:ext>
+            </a:extLst>
+          </p:cNvPr>
+          <p:cNvPicPr>
+            <a:picLocks noChangeAspect="1"/>
+          </p:cNvPicPr>
+          <p:nvPr/>
+        </p:nvPicPr>
+        <p:blipFill>
+          <a:blip r:embed="rId4"/>
+          <a:stretch>
+            <a:fillRect/>
+          </a:stretch>
+        </p:blipFill>
+        <p:spPr>
+          <a:xfrm>
+            <a:off x="3309396" y="3841912"/>
+            <a:ext cx="2981741" cy="676369"/>
+          </a:xfrm>
+          <a:prstGeom prst="rect">
+            <a:avLst/>
+          </a:prstGeom>
+        </p:spPr>
+      </p:pic>
+      <p:pic>
+        <p:nvPicPr>
+          <p:cNvPr id="22" name="Picture 21">
+            <a:extLst>
+              <a:ext uri="{FF2B5EF4-FFF2-40B4-BE49-F238E27FC236}">
+                <a16:creationId xmlns:a16="http://schemas.microsoft.com/office/drawing/2014/main" id="{8E4DCBAD-695D-F96A-157F-08AC6F4B3F94}"/>
+              </a:ext>
+            </a:extLst>
+          </p:cNvPr>
+          <p:cNvPicPr>
+            <a:picLocks noChangeAspect="1"/>
+          </p:cNvPicPr>
+          <p:nvPr/>
+        </p:nvPicPr>
+        <p:blipFill>
+          <a:blip r:embed="rId5"/>
+          <a:stretch>
+            <a:fillRect/>
+          </a:stretch>
+        </p:blipFill>
+        <p:spPr>
+          <a:xfrm>
+            <a:off x="256764" y="5217655"/>
+            <a:ext cx="2438740" cy="1000265"/>
+          </a:xfrm>
+          <a:prstGeom prst="rect">
+            <a:avLst/>
+          </a:prstGeom>
+        </p:spPr>
+      </p:pic>
+      <p:pic>
+        <p:nvPicPr>
+          <p:cNvPr id="24" name="Picture 23">
+            <a:extLst>
+              <a:ext uri="{FF2B5EF4-FFF2-40B4-BE49-F238E27FC236}">
+                <a16:creationId xmlns:a16="http://schemas.microsoft.com/office/drawing/2014/main" id="{03D9C963-A352-3536-741E-89A631E4A63C}"/>
+              </a:ext>
+            </a:extLst>
+          </p:cNvPr>
+          <p:cNvPicPr>
+            <a:picLocks noChangeAspect="1"/>
+          </p:cNvPicPr>
+          <p:nvPr/>
+        </p:nvPicPr>
+        <p:blipFill>
+          <a:blip r:embed="rId6"/>
+          <a:stretch>
+            <a:fillRect/>
+          </a:stretch>
+        </p:blipFill>
+        <p:spPr>
+          <a:xfrm>
+            <a:off x="3375856" y="5073928"/>
+            <a:ext cx="2648320" cy="1000265"/>
+          </a:xfrm>
+          <a:prstGeom prst="rect">
+            <a:avLst/>
+          </a:prstGeom>
+        </p:spPr>
+      </p:pic>
     </p:spTree>
   </p:cSld>
   <p:clrMapOvr>
@@ -19144,14 +19627,47 @@
               </a:spcAft>
             </a:pPr>
             <a:r>
-              <a:rPr sz="1000" b="0">
-                <a:solidFill>
-                  <a:srgbClr val="E2E8F0"/>
-                </a:solidFill>
-                <a:latin typeface="Consolas"/>
-              </a:rPr>
-              <a:t>SELECT kategooria, COUNT(*) AS toodete_arv</a:t>
-            </a:r>
+              <a:rPr sz="1000" b="0" dirty="0">
+                <a:solidFill>
+                  <a:srgbClr val="E2E8F0"/>
+                </a:solidFill>
+                <a:latin typeface="Consolas"/>
+              </a:rPr>
+              <a:t>SELECT </a:t>
+            </a:r>
+            <a:r>
+              <a:rPr sz="1000" b="0" dirty="0" err="1">
+                <a:solidFill>
+                  <a:srgbClr val="E2E8F0"/>
+                </a:solidFill>
+                <a:latin typeface="Consolas"/>
+              </a:rPr>
+              <a:t>kategooria</a:t>
+            </a:r>
+            <a:r>
+              <a:rPr sz="1000" b="0" dirty="0">
+                <a:solidFill>
+                  <a:srgbClr val="E2E8F0"/>
+                </a:solidFill>
+                <a:latin typeface="Consolas"/>
+              </a:rPr>
+              <a:t>, COUNT(*) AS </a:t>
+            </a:r>
+            <a:r>
+              <a:rPr sz="1000" b="0" dirty="0" err="1">
+                <a:solidFill>
+                  <a:srgbClr val="E2E8F0"/>
+                </a:solidFill>
+                <a:latin typeface="Consolas"/>
+              </a:rPr>
+              <a:t>toodete_arv</a:t>
+            </a:r>
+            <a:endParaRPr sz="1000" b="0" dirty="0">
+              <a:solidFill>
+                <a:srgbClr val="E2E8F0"/>
+              </a:solidFill>
+              <a:latin typeface="Consolas"/>
+            </a:endParaRPr>
           </a:p>
           <a:p>
             <a:pPr>
@@ -19160,7 +19676,7 @@
               </a:spcAft>
             </a:pPr>
             <a:r>
-              <a:rPr sz="1000" b="0">
+              <a:rPr sz="1000" b="0" dirty="0">
                 <a:solidFill>
                   <a:srgbClr val="E2E8F0"/>
                 </a:solidFill>
@@ -19176,14 +19692,29 @@
               </a:spcAft>
             </a:pPr>
             <a:r>
-              <a:rPr sz="1000" b="0">
-                <a:solidFill>
-                  <a:srgbClr val="E2E8F0"/>
-                </a:solidFill>
-                <a:latin typeface="Consolas"/>
-              </a:rPr>
-              <a:t>GROUP BY kategooria</a:t>
-            </a:r>
+              <a:rPr sz="1000" b="0" dirty="0">
+                <a:solidFill>
+                  <a:srgbClr val="E2E8F0"/>
+                </a:solidFill>
+                <a:latin typeface="Consolas"/>
+              </a:rPr>
+              <a:t>GROUP BY </a:t>
+            </a:r>
+            <a:r>
+              <a:rPr sz="1000" b="0" dirty="0" err="1">
+                <a:solidFill>
+                  <a:srgbClr val="E2E8F0"/>
+                </a:solidFill>
+                <a:latin typeface="Consolas"/>
+              </a:rPr>
+              <a:t>kategooria</a:t>
+            </a:r>
+            <a:endParaRPr sz="1000" b="0" dirty="0">
+              <a:solidFill>
+                <a:srgbClr val="E2E8F0"/>
+              </a:solidFill>
+              <a:latin typeface="Consolas"/>
+            </a:endParaRPr>
           </a:p>
           <a:p>
             <a:pPr>
@@ -19192,7 +19723,7 @@
               </a:spcAft>
             </a:pPr>
             <a:r>
-              <a:rPr sz="1000" b="0">
+              <a:rPr sz="1000" b="0" dirty="0">
                 <a:solidFill>
                   <a:srgbClr val="E2E8F0"/>
                 </a:solidFill>
@@ -19313,14 +19844,29 @@
               </a:spcAft>
             </a:pPr>
             <a:r>
-              <a:rPr sz="1000" b="0">
-                <a:solidFill>
-                  <a:srgbClr val="E2E8F0"/>
-                </a:solidFill>
-                <a:latin typeface="Consolas"/>
-              </a:rPr>
-              <a:t>SELECT linn, COUNT(*) AS klientide_arv</a:t>
-            </a:r>
+              <a:rPr sz="1000" b="0" dirty="0">
+                <a:solidFill>
+                  <a:srgbClr val="E2E8F0"/>
+                </a:solidFill>
+                <a:latin typeface="Consolas"/>
+              </a:rPr>
+              <a:t>SELECT linn, COUNT(*) AS </a:t>
+            </a:r>
+            <a:r>
+              <a:rPr sz="1000" b="0" dirty="0" err="1">
+                <a:solidFill>
+                  <a:srgbClr val="E2E8F0"/>
+                </a:solidFill>
+                <a:latin typeface="Consolas"/>
+              </a:rPr>
+              <a:t>klientide_arv</a:t>
+            </a:r>
+            <a:endParaRPr sz="1000" b="0" dirty="0">
+              <a:solidFill>
+                <a:srgbClr val="E2E8F0"/>
+              </a:solidFill>
+              <a:latin typeface="Consolas"/>
+            </a:endParaRPr>
           </a:p>
           <a:p>
             <a:pPr>
@@ -19329,14 +19875,29 @@
               </a:spcAft>
             </a:pPr>
             <a:r>
-              <a:rPr sz="1000" b="0">
-                <a:solidFill>
-                  <a:srgbClr val="E2E8F0"/>
-                </a:solidFill>
-                <a:latin typeface="Consolas"/>
-              </a:rPr>
-              <a:t>FROM kliendid</a:t>
-            </a:r>
+              <a:rPr sz="1000" b="0" dirty="0">
+                <a:solidFill>
+                  <a:srgbClr val="E2E8F0"/>
+                </a:solidFill>
+                <a:latin typeface="Consolas"/>
+              </a:rPr>
+              <a:t>FROM </a:t>
+            </a:r>
+            <a:r>
+              <a:rPr sz="1000" b="0" dirty="0" err="1">
+                <a:solidFill>
+                  <a:srgbClr val="E2E8F0"/>
+                </a:solidFill>
+                <a:latin typeface="Consolas"/>
+              </a:rPr>
+              <a:t>kliendid</a:t>
+            </a:r>
+            <a:endParaRPr sz="1000" b="0" dirty="0">
+              <a:solidFill>
+                <a:srgbClr val="E2E8F0"/>
+              </a:solidFill>
+              <a:latin typeface="Consolas"/>
+            </a:endParaRPr>
           </a:p>
           <a:p>
             <a:pPr>
@@ -19345,7 +19906,7 @@
               </a:spcAft>
             </a:pPr>
             <a:r>
-              <a:rPr sz="1000" b="0">
+              <a:rPr sz="1000" b="0" dirty="0">
                 <a:solidFill>
                   <a:srgbClr val="E2E8F0"/>
                 </a:solidFill>
@@ -19361,7 +19922,7 @@
               </a:spcAft>
             </a:pPr>
             <a:r>
-              <a:rPr sz="1000" b="0">
+              <a:rPr sz="1000" b="0" dirty="0">
                 <a:solidFill>
                   <a:srgbClr val="E2E8F0"/>
                 </a:solidFill>
@@ -19482,18 +20043,51 @@
               </a:spcAft>
             </a:pPr>
             <a:r>
-              <a:rPr sz="1000" b="0">
-                <a:solidFill>
-                  <a:srgbClr val="E2E8F0"/>
-                </a:solidFill>
-                <a:latin typeface="Consolas"/>
-              </a:rPr>
-              <a:t>SELECT kategooria, MAX(hind) AS kalleim</a:t>
-            </a:r>
-          </a:p>
-          <a:p>
-            <a:r>
-              <a:rPr sz="1000" b="0">
+              <a:rPr sz="1000" b="0" dirty="0">
+                <a:solidFill>
+                  <a:srgbClr val="E2E8F0"/>
+                </a:solidFill>
+                <a:latin typeface="Consolas"/>
+              </a:rPr>
+              <a:t>SELECT </a:t>
+            </a:r>
+            <a:r>
+              <a:rPr sz="1000" b="0" dirty="0" err="1">
+                <a:solidFill>
+                  <a:srgbClr val="E2E8F0"/>
+                </a:solidFill>
+                <a:latin typeface="Consolas"/>
+              </a:rPr>
+              <a:t>kategooria</a:t>
+            </a:r>
+            <a:r>
+              <a:rPr sz="1000" b="0" dirty="0">
+                <a:solidFill>
+                  <a:srgbClr val="E2E8F0"/>
+                </a:solidFill>
+                <a:latin typeface="Consolas"/>
+              </a:rPr>
+              <a:t>, MAX(hind) AS </a:t>
+            </a:r>
+            <a:r>
+              <a:rPr sz="1000" b="0" dirty="0" err="1">
+                <a:solidFill>
+                  <a:srgbClr val="E2E8F0"/>
+                </a:solidFill>
+                <a:latin typeface="Consolas"/>
+              </a:rPr>
+              <a:t>kalleim</a:t>
+            </a:r>
+            <a:endParaRPr sz="1000" b="0" dirty="0">
+              <a:solidFill>
+                <a:srgbClr val="E2E8F0"/>
+              </a:solidFill>
+              <a:latin typeface="Consolas"/>
+            </a:endParaRPr>
+          </a:p>
+          <a:p>
+            <a:r>
+              <a:rPr sz="1000" b="0" dirty="0">
                 <a:solidFill>
                   <a:srgbClr val="E2E8F0"/>
                 </a:solidFill>
@@ -19504,18 +20098,33 @@
           </a:p>
           <a:p>
             <a:r>
-              <a:rPr sz="1000" b="0">
-                <a:solidFill>
-                  <a:srgbClr val="E2E8F0"/>
-                </a:solidFill>
-                <a:latin typeface="Consolas"/>
-              </a:rPr>
-              <a:t>GROUP BY kategooria</a:t>
-            </a:r>
-          </a:p>
-          <a:p>
-            <a:r>
-              <a:rPr sz="1000" b="0">
+              <a:rPr sz="1000" b="0" dirty="0">
+                <a:solidFill>
+                  <a:srgbClr val="E2E8F0"/>
+                </a:solidFill>
+                <a:latin typeface="Consolas"/>
+              </a:rPr>
+              <a:t>GROUP BY </a:t>
+            </a:r>
+            <a:r>
+              <a:rPr sz="1000" b="0" dirty="0" err="1">
+                <a:solidFill>
+                  <a:srgbClr val="E2E8F0"/>
+                </a:solidFill>
+                <a:latin typeface="Consolas"/>
+              </a:rPr>
+              <a:t>kategooria</a:t>
+            </a:r>
+            <a:endParaRPr sz="1000" b="0" dirty="0">
+              <a:solidFill>
+                <a:srgbClr val="E2E8F0"/>
+              </a:solidFill>
+              <a:latin typeface="Consolas"/>
+            </a:endParaRPr>
+          </a:p>
+          <a:p>
+            <a:r>
+              <a:rPr sz="1000" b="0" dirty="0">
                 <a:solidFill>
                   <a:srgbClr val="E2E8F0"/>
                 </a:solidFill>
@@ -21533,13 +22142,31 @@
               </a:spcAft>
             </a:pPr>
             <a:r>
-              <a:rPr sz="1600" b="0">
-                <a:solidFill>
-                  <a:srgbClr val="E2E8F0"/>
-                </a:solidFill>
-                <a:latin typeface="Consolas"/>
-              </a:rPr>
-              <a:t>SELECT nimetus, hind,</a:t>
+              <a:rPr sz="1600" b="0" dirty="0">
+                <a:solidFill>
+                  <a:srgbClr val="E2E8F0"/>
+                </a:solidFill>
+                <a:latin typeface="Consolas"/>
+              </a:rPr>
+              <a:t>SELECT </a:t>
+            </a:r>
+            <a:r>
+              <a:rPr sz="1600" b="0" dirty="0" err="1">
+                <a:solidFill>
+                  <a:srgbClr val="E2E8F0"/>
+                </a:solidFill>
+                <a:latin typeface="Consolas"/>
+              </a:rPr>
+              <a:t>nimetus</a:t>
+            </a:r>
+            <a:r>
+              <a:rPr sz="1600" b="0" dirty="0">
+                <a:solidFill>
+                  <a:srgbClr val="E2E8F0"/>
+                </a:solidFill>
+                <a:latin typeface="Consolas"/>
+              </a:rPr>
+              <a:t>, hind,</a:t>
             </a:r>
           </a:p>
           <a:p>
@@ -21549,7 +22176,7 @@
               </a:spcAft>
             </a:pPr>
             <a:r>
-              <a:rPr sz="1600" b="0">
+              <a:rPr sz="1600" b="0" dirty="0">
                 <a:solidFill>
                   <a:srgbClr val="E2E8F0"/>
                 </a:solidFill>
@@ -21565,7 +22192,7 @@
               </a:spcAft>
             </a:pPr>
             <a:r>
-              <a:rPr sz="1600" b="0">
+              <a:rPr sz="1600" b="0" dirty="0">
                 <a:solidFill>
                   <a:srgbClr val="E2E8F0"/>
                 </a:solidFill>
@@ -21581,13 +22208,31 @@
               </a:spcAft>
             </a:pPr>
             <a:r>
-              <a:rPr sz="1600" b="0">
-                <a:solidFill>
-                  <a:srgbClr val="E2E8F0"/>
-                </a:solidFill>
-                <a:latin typeface="Consolas"/>
-              </a:rPr>
-              <a:t>           WHEN hind BETWEEN 100 AND 500 THEN 'Kesklahendus'</a:t>
+              <a:rPr sz="1600" b="0" dirty="0">
+                <a:solidFill>
+                  <a:srgbClr val="E2E8F0"/>
+                </a:solidFill>
+                <a:latin typeface="Consolas"/>
+              </a:rPr>
+              <a:t>           WHEN hind BETWEEN 100 AND 500 THEN '</a:t>
+            </a:r>
+            <a:r>
+              <a:rPr sz="1600" b="0" dirty="0" err="1">
+                <a:solidFill>
+                  <a:srgbClr val="E2E8F0"/>
+                </a:solidFill>
+                <a:latin typeface="Consolas"/>
+              </a:rPr>
+              <a:t>Kesklahendus</a:t>
+            </a:r>
+            <a:r>
+              <a:rPr sz="1600" b="0" dirty="0">
+                <a:solidFill>
+                  <a:srgbClr val="E2E8F0"/>
+                </a:solidFill>
+                <a:latin typeface="Consolas"/>
+              </a:rPr>
+              <a:t>'</a:t>
             </a:r>
           </a:p>
           <a:p>
@@ -21597,7 +22242,7 @@
               </a:spcAft>
             </a:pPr>
             <a:r>
-              <a:rPr sz="1600" b="0">
+              <a:rPr sz="1600" b="0" dirty="0">
                 <a:solidFill>
                   <a:srgbClr val="E2E8F0"/>
                 </a:solidFill>
@@ -21613,14 +22258,29 @@
               </a:spcAft>
             </a:pPr>
             <a:r>
-              <a:rPr sz="1600" b="0">
-                <a:solidFill>
-                  <a:srgbClr val="E2E8F0"/>
-                </a:solidFill>
-                <a:latin typeface="Consolas"/>
-              </a:rPr>
-              <a:t>       END AS hinnaklass</a:t>
-            </a:r>
+              <a:rPr sz="1600" b="0" dirty="0">
+                <a:solidFill>
+                  <a:srgbClr val="E2E8F0"/>
+                </a:solidFill>
+                <a:latin typeface="Consolas"/>
+              </a:rPr>
+              <a:t>       END AS </a:t>
+            </a:r>
+            <a:r>
+              <a:rPr sz="1600" b="0" dirty="0" err="1">
+                <a:solidFill>
+                  <a:srgbClr val="E2E8F0"/>
+                </a:solidFill>
+                <a:latin typeface="Consolas"/>
+              </a:rPr>
+              <a:t>hinnaklass</a:t>
+            </a:r>
+            <a:endParaRPr sz="1600" b="0" dirty="0">
+              <a:solidFill>
+                <a:srgbClr val="E2E8F0"/>
+              </a:solidFill>
+              <a:latin typeface="Consolas"/>
+            </a:endParaRPr>
           </a:p>
           <a:p>
             <a:pPr>
@@ -21629,7 +22289,7 @@
               </a:spcAft>
             </a:pPr>
             <a:r>
-              <a:rPr sz="1600" b="0">
+              <a:rPr sz="1600" b="0" dirty="0">
                 <a:solidFill>
                   <a:srgbClr val="E2E8F0"/>
                 </a:solidFill>
@@ -23038,6 +23698,128 @@
           </a:p>
         </p:txBody>
       </p:sp>
+      <p:pic>
+        <p:nvPicPr>
+          <p:cNvPr id="22" name="Picture 21">
+            <a:extLst>
+              <a:ext uri="{FF2B5EF4-FFF2-40B4-BE49-F238E27FC236}">
+                <a16:creationId xmlns:a16="http://schemas.microsoft.com/office/drawing/2014/main" id="{218AD7DF-95F2-B40A-15BE-473C56EF0EEE}"/>
+              </a:ext>
+            </a:extLst>
+          </p:cNvPr>
+          <p:cNvPicPr>
+            <a:picLocks noChangeAspect="1"/>
+          </p:cNvPicPr>
+          <p:nvPr/>
+        </p:nvPicPr>
+        <p:blipFill>
+          <a:blip r:embed="rId3"/>
+          <a:srcRect b="40979"/>
+          <a:stretch>
+            <a:fillRect/>
+          </a:stretch>
+        </p:blipFill>
+        <p:spPr>
+          <a:xfrm>
+            <a:off x="182879" y="4778097"/>
+            <a:ext cx="1773936" cy="968322"/>
+          </a:xfrm>
+          <a:prstGeom prst="rect">
+            <a:avLst/>
+          </a:prstGeom>
+        </p:spPr>
+      </p:pic>
+      <p:pic>
+        <p:nvPicPr>
+          <p:cNvPr id="24" name="Picture 23">
+            <a:extLst>
+              <a:ext uri="{FF2B5EF4-FFF2-40B4-BE49-F238E27FC236}">
+                <a16:creationId xmlns:a16="http://schemas.microsoft.com/office/drawing/2014/main" id="{E090DADB-7A2B-33A8-E49D-F21E0B823839}"/>
+              </a:ext>
+            </a:extLst>
+          </p:cNvPr>
+          <p:cNvPicPr>
+            <a:picLocks noChangeAspect="1"/>
+          </p:cNvPicPr>
+          <p:nvPr/>
+        </p:nvPicPr>
+        <p:blipFill>
+          <a:blip r:embed="rId4"/>
+          <a:srcRect b="62125"/>
+          <a:stretch>
+            <a:fillRect/>
+          </a:stretch>
+        </p:blipFill>
+        <p:spPr>
+          <a:xfrm>
+            <a:off x="2124455" y="4821169"/>
+            <a:ext cx="2016364" cy="782232"/>
+          </a:xfrm>
+          <a:prstGeom prst="rect">
+            <a:avLst/>
+          </a:prstGeom>
+        </p:spPr>
+      </p:pic>
+      <p:pic>
+        <p:nvPicPr>
+          <p:cNvPr id="26" name="Picture 25">
+            <a:extLst>
+              <a:ext uri="{FF2B5EF4-FFF2-40B4-BE49-F238E27FC236}">
+                <a16:creationId xmlns:a16="http://schemas.microsoft.com/office/drawing/2014/main" id="{362827D2-C386-743E-EC10-3DF05F13682F}"/>
+              </a:ext>
+            </a:extLst>
+          </p:cNvPr>
+          <p:cNvPicPr>
+            <a:picLocks noChangeAspect="1"/>
+          </p:cNvPicPr>
+          <p:nvPr/>
+        </p:nvPicPr>
+        <p:blipFill>
+          <a:blip r:embed="rId5"/>
+          <a:stretch>
+            <a:fillRect/>
+          </a:stretch>
+        </p:blipFill>
+        <p:spPr>
+          <a:xfrm>
+            <a:off x="4308459" y="4833573"/>
+            <a:ext cx="2381583" cy="857370"/>
+          </a:xfrm>
+          <a:prstGeom prst="rect">
+            <a:avLst/>
+          </a:prstGeom>
+        </p:spPr>
+      </p:pic>
+      <p:pic>
+        <p:nvPicPr>
+          <p:cNvPr id="28" name="Picture 27">
+            <a:extLst>
+              <a:ext uri="{FF2B5EF4-FFF2-40B4-BE49-F238E27FC236}">
+                <a16:creationId xmlns:a16="http://schemas.microsoft.com/office/drawing/2014/main" id="{8973662A-B4FD-9EB7-1FA0-A7BD5BB28E39}"/>
+              </a:ext>
+            </a:extLst>
+          </p:cNvPr>
+          <p:cNvPicPr>
+            <a:picLocks noChangeAspect="1"/>
+          </p:cNvPicPr>
+          <p:nvPr/>
+        </p:nvPicPr>
+        <p:blipFill>
+          <a:blip r:embed="rId6"/>
+          <a:stretch>
+            <a:fillRect/>
+          </a:stretch>
+        </p:blipFill>
+        <p:spPr>
+          <a:xfrm>
+            <a:off x="2167743" y="5806143"/>
+            <a:ext cx="2261150" cy="923841"/>
+          </a:xfrm>
+          <a:prstGeom prst="rect">
+            <a:avLst/>
+          </a:prstGeom>
+        </p:spPr>
+      </p:pic>
     </p:spTree>
   </p:cSld>
   <p:clrMapOvr>
@@ -23902,13 +24684,49 @@
               </a:spcAft>
             </a:pPr>
             <a:r>
-              <a:rPr sz="1000" b="0">
-                <a:solidFill>
-                  <a:srgbClr val="E2E8F0"/>
-                </a:solidFill>
-                <a:latin typeface="Consolas"/>
-              </a:rPr>
-              <a:t>SELECT tellimus_id, staatus,</a:t>
+              <a:rPr sz="1000" b="0" dirty="0">
+                <a:solidFill>
+                  <a:srgbClr val="E2E8F0"/>
+                </a:solidFill>
+                <a:latin typeface="Consolas"/>
+              </a:rPr>
+              <a:t>SELECT </a:t>
+            </a:r>
+            <a:r>
+              <a:rPr sz="1000" b="0" dirty="0" err="1">
+                <a:solidFill>
+                  <a:srgbClr val="E2E8F0"/>
+                </a:solidFill>
+                <a:latin typeface="Consolas"/>
+              </a:rPr>
+              <a:t>tellimus_id</a:t>
+            </a:r>
+            <a:r>
+              <a:rPr sz="1000" b="0" dirty="0">
+                <a:solidFill>
+                  <a:srgbClr val="E2E8F0"/>
+                </a:solidFill>
+                <a:latin typeface="Consolas"/>
+              </a:rPr>
+              <a:t>, </a:t>
+            </a:r>
+            <a:r>
+              <a:rPr sz="1000" b="0" dirty="0" err="1">
+                <a:solidFill>
+                  <a:srgbClr val="E2E8F0"/>
+                </a:solidFill>
+                <a:latin typeface="Consolas"/>
+              </a:rPr>
+              <a:t>staatus</a:t>
+            </a:r>
+            <a:r>
+              <a:rPr sz="1000" b="0" dirty="0">
+                <a:solidFill>
+                  <a:srgbClr val="E2E8F0"/>
+                </a:solidFill>
+                <a:latin typeface="Consolas"/>
+              </a:rPr>
+              <a:t>,</a:t>
             </a:r>
           </a:p>
           <a:p>
@@ -23918,13 +24736,49 @@
               </a:spcAft>
             </a:pPr>
             <a:r>
-              <a:rPr sz="1000" b="0">
-                <a:solidFill>
-                  <a:srgbClr val="E2E8F0"/>
-                </a:solidFill>
-                <a:latin typeface="Consolas"/>
-              </a:rPr>
-              <a:t>       CASE WHEN staatus = 'Täidetud' THEN 'OK'</a:t>
+              <a:rPr sz="1000" b="0" dirty="0">
+                <a:solidFill>
+                  <a:srgbClr val="E2E8F0"/>
+                </a:solidFill>
+                <a:latin typeface="Consolas"/>
+              </a:rPr>
+              <a:t>       CASE WHEN </a:t>
+            </a:r>
+            <a:r>
+              <a:rPr sz="1000" b="0" dirty="0" err="1">
+                <a:solidFill>
+                  <a:srgbClr val="E2E8F0"/>
+                </a:solidFill>
+                <a:latin typeface="Consolas"/>
+              </a:rPr>
+              <a:t>staatus</a:t>
+            </a:r>
+            <a:r>
+              <a:rPr sz="1000" b="0" dirty="0">
+                <a:solidFill>
+                  <a:srgbClr val="E2E8F0"/>
+                </a:solidFill>
+                <a:latin typeface="Consolas"/>
+              </a:rPr>
+              <a:t> = '</a:t>
+            </a:r>
+            <a:r>
+              <a:rPr sz="1000" b="0" dirty="0" err="1">
+                <a:solidFill>
+                  <a:srgbClr val="E2E8F0"/>
+                </a:solidFill>
+                <a:latin typeface="Consolas"/>
+              </a:rPr>
+              <a:t>Täidetud</a:t>
+            </a:r>
+            <a:r>
+              <a:rPr sz="1000" b="0" dirty="0">
+                <a:solidFill>
+                  <a:srgbClr val="E2E8F0"/>
+                </a:solidFill>
+                <a:latin typeface="Consolas"/>
+              </a:rPr>
+              <a:t>' THEN 'OK'</a:t>
             </a:r>
           </a:p>
           <a:p>
@@ -23934,13 +24788,67 @@
               </a:spcAft>
             </a:pPr>
             <a:r>
-              <a:rPr sz="1000" b="0">
-                <a:solidFill>
-                  <a:srgbClr val="E2E8F0"/>
-                </a:solidFill>
-                <a:latin typeface="Consolas"/>
-              </a:rPr>
-              <a:t>            WHEN staatus = 'Tühistatud' THEN 'Katkestatud'</a:t>
+              <a:rPr sz="1000" b="0" dirty="0">
+                <a:solidFill>
+                  <a:srgbClr val="E2E8F0"/>
+                </a:solidFill>
+                <a:latin typeface="Consolas"/>
+              </a:rPr>
+              <a:t>            WHEN </a:t>
+            </a:r>
+            <a:r>
+              <a:rPr sz="1000" b="0" dirty="0" err="1">
+                <a:solidFill>
+                  <a:srgbClr val="E2E8F0"/>
+                </a:solidFill>
+                <a:latin typeface="Consolas"/>
+              </a:rPr>
+              <a:t>staatus</a:t>
+            </a:r>
+            <a:r>
+              <a:rPr sz="1000" b="0" dirty="0">
+                <a:solidFill>
+                  <a:srgbClr val="E2E8F0"/>
+                </a:solidFill>
+                <a:latin typeface="Consolas"/>
+              </a:rPr>
+              <a:t> = '</a:t>
+            </a:r>
+            <a:r>
+              <a:rPr sz="1000" b="0" dirty="0" err="1">
+                <a:solidFill>
+                  <a:srgbClr val="E2E8F0"/>
+                </a:solidFill>
+                <a:latin typeface="Consolas"/>
+              </a:rPr>
+              <a:t>Tühistatud</a:t>
+            </a:r>
+            <a:r>
+              <a:rPr sz="1000" b="0" dirty="0">
+                <a:solidFill>
+                  <a:srgbClr val="E2E8F0"/>
+                </a:solidFill>
+                <a:latin typeface="Consolas"/>
+              </a:rPr>
+              <a:t>' THEN '</a:t>
+            </a:r>
+            <a:r>
+              <a:rPr sz="1000" b="0" dirty="0" err="1">
+                <a:solidFill>
+                  <a:srgbClr val="E2E8F0"/>
+                </a:solidFill>
+                <a:latin typeface="Consolas"/>
+              </a:rPr>
+              <a:t>Katkestatud</a:t>
+            </a:r>
+            <a:r>
+              <a:rPr sz="1000" b="0" dirty="0">
+                <a:solidFill>
+                  <a:srgbClr val="E2E8F0"/>
+                </a:solidFill>
+                <a:latin typeface="Consolas"/>
+              </a:rPr>
+              <a:t>'</a:t>
             </a:r>
           </a:p>
           <a:p>
@@ -23950,13 +24858,31 @@
               </a:spcAft>
             </a:pPr>
             <a:r>
-              <a:rPr sz="1000" b="0">
-                <a:solidFill>
-                  <a:srgbClr val="E2E8F0"/>
-                </a:solidFill>
-                <a:latin typeface="Consolas"/>
-              </a:rPr>
-              <a:t>            ELSE 'Töös' END AS seis</a:t>
+              <a:rPr sz="1000" b="0" dirty="0">
+                <a:solidFill>
+                  <a:srgbClr val="E2E8F0"/>
+                </a:solidFill>
+                <a:latin typeface="Consolas"/>
+              </a:rPr>
+              <a:t>            ELSE '</a:t>
+            </a:r>
+            <a:r>
+              <a:rPr sz="1000" b="0" dirty="0" err="1">
+                <a:solidFill>
+                  <a:srgbClr val="E2E8F0"/>
+                </a:solidFill>
+                <a:latin typeface="Consolas"/>
+              </a:rPr>
+              <a:t>Töös</a:t>
+            </a:r>
+            <a:r>
+              <a:rPr sz="1000" b="0" dirty="0">
+                <a:solidFill>
+                  <a:srgbClr val="E2E8F0"/>
+                </a:solidFill>
+                <a:latin typeface="Consolas"/>
+              </a:rPr>
+              <a:t>' END AS seis</a:t>
             </a:r>
           </a:p>
           <a:p>
@@ -23966,13 +24892,31 @@
               </a:spcAft>
             </a:pPr>
             <a:r>
-              <a:rPr sz="1000" b="0">
-                <a:solidFill>
-                  <a:srgbClr val="E2E8F0"/>
-                </a:solidFill>
-                <a:latin typeface="Consolas"/>
-              </a:rPr>
-              <a:t>FROM tellimused;</a:t>
+              <a:rPr sz="1000" b="0" dirty="0">
+                <a:solidFill>
+                  <a:srgbClr val="E2E8F0"/>
+                </a:solidFill>
+                <a:latin typeface="Consolas"/>
+              </a:rPr>
+              <a:t>FROM </a:t>
+            </a:r>
+            <a:r>
+              <a:rPr sz="1000" b="0" dirty="0" err="1">
+                <a:solidFill>
+                  <a:srgbClr val="E2E8F0"/>
+                </a:solidFill>
+                <a:latin typeface="Consolas"/>
+              </a:rPr>
+              <a:t>tellimused</a:t>
+            </a:r>
+            <a:r>
+              <a:rPr sz="1000" b="0" dirty="0">
+                <a:solidFill>
+                  <a:srgbClr val="E2E8F0"/>
+                </a:solidFill>
+                <a:latin typeface="Consolas"/>
+              </a:rPr>
+              <a:t>;</a:t>
             </a:r>
           </a:p>
         </p:txBody>
@@ -24341,46 +25285,133 @@
               </a:spcAft>
             </a:pPr>
             <a:r>
-              <a:rPr sz="1000" b="0">
-                <a:solidFill>
-                  <a:srgbClr val="E2E8F0"/>
-                </a:solidFill>
-                <a:latin typeface="Consolas"/>
-              </a:rPr>
-              <a:t>SELECT nimi, linn,</a:t>
-            </a:r>
-          </a:p>
-          <a:p>
-            <a:r>
-              <a:rPr sz="1000" b="0">
-                <a:solidFill>
-                  <a:srgbClr val="E2E8F0"/>
-                </a:solidFill>
-                <a:latin typeface="Consolas"/>
-              </a:rPr>
-              <a:t>       CASE WHEN linn = 'Tallinn' THEN 'Pealinn'</a:t>
-            </a:r>
-          </a:p>
-          <a:p>
-            <a:r>
-              <a:rPr sz="1000" b="0">
-                <a:solidFill>
-                  <a:srgbClr val="E2E8F0"/>
-                </a:solidFill>
-                <a:latin typeface="Consolas"/>
-              </a:rPr>
-              <a:t>            ELSE 'Muu linn' END AS linnatüüp</a:t>
-            </a:r>
-          </a:p>
-          <a:p>
-            <a:r>
-              <a:rPr sz="1000" b="0">
-                <a:solidFill>
-                  <a:srgbClr val="E2E8F0"/>
-                </a:solidFill>
-                <a:latin typeface="Consolas"/>
-              </a:rPr>
-              <a:t>FROM kliendid;</a:t>
+              <a:rPr sz="1000" b="0" dirty="0">
+                <a:solidFill>
+                  <a:srgbClr val="E2E8F0"/>
+                </a:solidFill>
+                <a:latin typeface="Consolas"/>
+              </a:rPr>
+              <a:t>SELECT </a:t>
+            </a:r>
+            <a:r>
+              <a:rPr sz="1000" b="0" dirty="0" err="1">
+                <a:solidFill>
+                  <a:srgbClr val="E2E8F0"/>
+                </a:solidFill>
+                <a:latin typeface="Consolas"/>
+              </a:rPr>
+              <a:t>nimi</a:t>
+            </a:r>
+            <a:r>
+              <a:rPr sz="1000" b="0" dirty="0">
+                <a:solidFill>
+                  <a:srgbClr val="E2E8F0"/>
+                </a:solidFill>
+                <a:latin typeface="Consolas"/>
+              </a:rPr>
+              <a:t>, linn,</a:t>
+            </a:r>
+          </a:p>
+          <a:p>
+            <a:r>
+              <a:rPr sz="1000" b="0" dirty="0">
+                <a:solidFill>
+                  <a:srgbClr val="E2E8F0"/>
+                </a:solidFill>
+                <a:latin typeface="Consolas"/>
+              </a:rPr>
+              <a:t>       CASE WHEN linn = 'Tallinn' THEN '</a:t>
+            </a:r>
+            <a:r>
+              <a:rPr sz="1000" b="0" dirty="0" err="1">
+                <a:solidFill>
+                  <a:srgbClr val="E2E8F0"/>
+                </a:solidFill>
+                <a:latin typeface="Consolas"/>
+              </a:rPr>
+              <a:t>Pealinn</a:t>
+            </a:r>
+            <a:r>
+              <a:rPr sz="1000" b="0" dirty="0">
+                <a:solidFill>
+                  <a:srgbClr val="E2E8F0"/>
+                </a:solidFill>
+                <a:latin typeface="Consolas"/>
+              </a:rPr>
+              <a:t>'</a:t>
+            </a:r>
+          </a:p>
+          <a:p>
+            <a:r>
+              <a:rPr sz="1000" b="0" dirty="0">
+                <a:solidFill>
+                  <a:srgbClr val="E2E8F0"/>
+                </a:solidFill>
+                <a:latin typeface="Consolas"/>
+              </a:rPr>
+              <a:t>            ELSE '</a:t>
+            </a:r>
+            <a:r>
+              <a:rPr sz="1000" b="0" dirty="0" err="1">
+                <a:solidFill>
+                  <a:srgbClr val="E2E8F0"/>
+                </a:solidFill>
+                <a:latin typeface="Consolas"/>
+              </a:rPr>
+              <a:t>Muu</a:t>
+            </a:r>
+            <a:r>
+              <a:rPr sz="1000" b="0" dirty="0">
+                <a:solidFill>
+                  <a:srgbClr val="E2E8F0"/>
+                </a:solidFill>
+                <a:latin typeface="Consolas"/>
+              </a:rPr>
+              <a:t> linn' END AS </a:t>
+            </a:r>
+            <a:r>
+              <a:rPr sz="1000" b="0" dirty="0" err="1">
+                <a:solidFill>
+                  <a:srgbClr val="E2E8F0"/>
+                </a:solidFill>
+                <a:latin typeface="Consolas"/>
+              </a:rPr>
+              <a:t>linnatüüp</a:t>
+            </a:r>
+            <a:endParaRPr sz="1000" b="0" dirty="0">
+              <a:solidFill>
+                <a:srgbClr val="E2E8F0"/>
+              </a:solidFill>
+              <a:latin typeface="Consolas"/>
+            </a:endParaRPr>
+          </a:p>
+          <a:p>
+            <a:r>
+              <a:rPr sz="1000" b="0" dirty="0">
+                <a:solidFill>
+                  <a:srgbClr val="E2E8F0"/>
+                </a:solidFill>
+                <a:latin typeface="Consolas"/>
+              </a:rPr>
+              <a:t>FROM </a:t>
+            </a:r>
+            <a:r>
+              <a:rPr sz="1000" b="0" dirty="0" err="1">
+                <a:solidFill>
+                  <a:srgbClr val="E2E8F0"/>
+                </a:solidFill>
+                <a:latin typeface="Consolas"/>
+              </a:rPr>
+              <a:t>kliendid</a:t>
+            </a:r>
+            <a:r>
+              <a:rPr sz="1000" b="0" dirty="0">
+                <a:solidFill>
+                  <a:srgbClr val="E2E8F0"/>
+                </a:solidFill>
+                <a:latin typeface="Consolas"/>
+              </a:rPr>
+              <a:t>;</a:t>
             </a:r>
           </a:p>
         </p:txBody>
@@ -29178,6 +30209,66 @@
           </a:p>
         </p:txBody>
       </p:sp>
+      <p:pic>
+        <p:nvPicPr>
+          <p:cNvPr id="6" name="Picture 5">
+            <a:extLst>
+              <a:ext uri="{FF2B5EF4-FFF2-40B4-BE49-F238E27FC236}">
+                <a16:creationId xmlns:a16="http://schemas.microsoft.com/office/drawing/2014/main" id="{11A65BC0-18F8-CC24-12C4-31210232A3E2}"/>
+              </a:ext>
+            </a:extLst>
+          </p:cNvPr>
+          <p:cNvPicPr>
+            <a:picLocks noChangeAspect="1"/>
+          </p:cNvPicPr>
+          <p:nvPr/>
+        </p:nvPicPr>
+        <p:blipFill>
+          <a:blip r:embed="rId3"/>
+          <a:stretch>
+            <a:fillRect/>
+          </a:stretch>
+        </p:blipFill>
+        <p:spPr>
+          <a:xfrm>
+            <a:off x="481142" y="4204042"/>
+            <a:ext cx="3620623" cy="1292662"/>
+          </a:xfrm>
+          <a:prstGeom prst="rect">
+            <a:avLst/>
+          </a:prstGeom>
+        </p:spPr>
+      </p:pic>
+      <p:pic>
+        <p:nvPicPr>
+          <p:cNvPr id="11" name="Picture 10">
+            <a:extLst>
+              <a:ext uri="{FF2B5EF4-FFF2-40B4-BE49-F238E27FC236}">
+                <a16:creationId xmlns:a16="http://schemas.microsoft.com/office/drawing/2014/main" id="{3D51F50A-4D59-0527-3B4C-1E7B2464EE98}"/>
+              </a:ext>
+            </a:extLst>
+          </p:cNvPr>
+          <p:cNvPicPr>
+            <a:picLocks noChangeAspect="1"/>
+          </p:cNvPicPr>
+          <p:nvPr/>
+        </p:nvPicPr>
+        <p:blipFill>
+          <a:blip r:embed="rId4"/>
+          <a:stretch>
+            <a:fillRect/>
+          </a:stretch>
+        </p:blipFill>
+        <p:spPr>
+          <a:xfrm>
+            <a:off x="499430" y="5590965"/>
+            <a:ext cx="2194561" cy="707592"/>
+          </a:xfrm>
+          <a:prstGeom prst="rect">
+            <a:avLst/>
+          </a:prstGeom>
+        </p:spPr>
+      </p:pic>
     </p:spTree>
   </p:cSld>
   <p:clrMapOvr>
@@ -29672,13 +30763,31 @@
               </a:spcAft>
             </a:pPr>
             <a:r>
-              <a:rPr sz="1200" b="0">
-                <a:solidFill>
-                  <a:srgbClr val="E2E8F0"/>
-                </a:solidFill>
-                <a:latin typeface="Consolas"/>
-              </a:rPr>
-              <a:t>SELECT kategooria,</a:t>
+              <a:rPr sz="1200" b="0" dirty="0">
+                <a:solidFill>
+                  <a:srgbClr val="E2E8F0"/>
+                </a:solidFill>
+                <a:latin typeface="Consolas"/>
+              </a:rPr>
+              <a:t>SELECT </a:t>
+            </a:r>
+            <a:r>
+              <a:rPr sz="1200" b="0" dirty="0" err="1">
+                <a:solidFill>
+                  <a:srgbClr val="E2E8F0"/>
+                </a:solidFill>
+                <a:latin typeface="Consolas"/>
+              </a:rPr>
+              <a:t>kategooria</a:t>
+            </a:r>
+            <a:r>
+              <a:rPr sz="1200" b="0" dirty="0">
+                <a:solidFill>
+                  <a:srgbClr val="E2E8F0"/>
+                </a:solidFill>
+                <a:latin typeface="Consolas"/>
+              </a:rPr>
+              <a:t>,</a:t>
             </a:r>
           </a:p>
           <a:p>
@@ -29688,13 +30797,31 @@
               </a:spcAft>
             </a:pPr>
             <a:r>
-              <a:rPr sz="1200" b="0">
-                <a:solidFill>
-                  <a:srgbClr val="E2E8F0"/>
-                </a:solidFill>
-                <a:latin typeface="Consolas"/>
-              </a:rPr>
-              <a:t>       COUNT(*) AS toodete_arv,</a:t>
+              <a:rPr sz="1200" b="0" dirty="0">
+                <a:solidFill>
+                  <a:srgbClr val="E2E8F0"/>
+                </a:solidFill>
+                <a:latin typeface="Consolas"/>
+              </a:rPr>
+              <a:t>       COUNT(*) AS </a:t>
+            </a:r>
+            <a:r>
+              <a:rPr sz="1200" b="0" dirty="0" err="1">
+                <a:solidFill>
+                  <a:srgbClr val="E2E8F0"/>
+                </a:solidFill>
+                <a:latin typeface="Consolas"/>
+              </a:rPr>
+              <a:t>toodete_arv</a:t>
+            </a:r>
+            <a:r>
+              <a:rPr sz="1200" b="0" dirty="0">
+                <a:solidFill>
+                  <a:srgbClr val="E2E8F0"/>
+                </a:solidFill>
+                <a:latin typeface="Consolas"/>
+              </a:rPr>
+              <a:t>,</a:t>
             </a:r>
           </a:p>
           <a:p>
@@ -29704,13 +30831,31 @@
               </a:spcAft>
             </a:pPr>
             <a:r>
-              <a:rPr sz="1200" b="0">
-                <a:solidFill>
-                  <a:srgbClr val="E2E8F0"/>
-                </a:solidFill>
-                <a:latin typeface="Consolas"/>
-              </a:rPr>
-              <a:t>       AVG(hind) AS keskmine_hind,</a:t>
+              <a:rPr sz="1200" b="0" dirty="0">
+                <a:solidFill>
+                  <a:srgbClr val="E2E8F0"/>
+                </a:solidFill>
+                <a:latin typeface="Consolas"/>
+              </a:rPr>
+              <a:t>       AVG(hind) AS </a:t>
+            </a:r>
+            <a:r>
+              <a:rPr sz="1200" b="0" dirty="0" err="1">
+                <a:solidFill>
+                  <a:srgbClr val="E2E8F0"/>
+                </a:solidFill>
+                <a:latin typeface="Consolas"/>
+              </a:rPr>
+              <a:t>keskmine_hind</a:t>
+            </a:r>
+            <a:r>
+              <a:rPr sz="1200" b="0" dirty="0">
+                <a:solidFill>
+                  <a:srgbClr val="E2E8F0"/>
+                </a:solidFill>
+                <a:latin typeface="Consolas"/>
+              </a:rPr>
+              <a:t>,</a:t>
             </a:r>
           </a:p>
           <a:p>
@@ -29720,14 +30865,29 @@
               </a:spcAft>
             </a:pPr>
             <a:r>
-              <a:rPr sz="1200" b="0">
-                <a:solidFill>
-                  <a:srgbClr val="E2E8F0"/>
-                </a:solidFill>
-                <a:latin typeface="Consolas"/>
-              </a:rPr>
-              <a:t>       MIN(hind) AS odavaim</a:t>
-            </a:r>
+              <a:rPr sz="1200" b="0" dirty="0">
+                <a:solidFill>
+                  <a:srgbClr val="E2E8F0"/>
+                </a:solidFill>
+                <a:latin typeface="Consolas"/>
+              </a:rPr>
+              <a:t>       MIN(hind) AS </a:t>
+            </a:r>
+            <a:r>
+              <a:rPr sz="1200" b="0" dirty="0" err="1">
+                <a:solidFill>
+                  <a:srgbClr val="E2E8F0"/>
+                </a:solidFill>
+                <a:latin typeface="Consolas"/>
+              </a:rPr>
+              <a:t>odavaim</a:t>
+            </a:r>
+            <a:endParaRPr sz="1200" b="0" dirty="0">
+              <a:solidFill>
+                <a:srgbClr val="E2E8F0"/>
+              </a:solidFill>
+              <a:latin typeface="Consolas"/>
+            </a:endParaRPr>
           </a:p>
           <a:p>
             <a:pPr>
@@ -29736,7 +30896,7 @@
               </a:spcAft>
             </a:pPr>
             <a:r>
-              <a:rPr sz="1200" b="0">
+              <a:rPr sz="1200" b="0" dirty="0">
                 <a:solidFill>
                   <a:srgbClr val="E2E8F0"/>
                 </a:solidFill>
@@ -29752,14 +30912,29 @@
               </a:spcAft>
             </a:pPr>
             <a:r>
-              <a:rPr sz="1200" b="0">
-                <a:solidFill>
-                  <a:srgbClr val="E2E8F0"/>
-                </a:solidFill>
-                <a:latin typeface="Consolas"/>
-              </a:rPr>
-              <a:t>GROUP BY kategooria</a:t>
-            </a:r>
+              <a:rPr sz="1200" b="0" dirty="0">
+                <a:solidFill>
+                  <a:srgbClr val="E2E8F0"/>
+                </a:solidFill>
+                <a:latin typeface="Consolas"/>
+              </a:rPr>
+              <a:t>GROUP BY </a:t>
+            </a:r>
+            <a:r>
+              <a:rPr sz="1200" b="0" dirty="0" err="1">
+                <a:solidFill>
+                  <a:srgbClr val="E2E8F0"/>
+                </a:solidFill>
+                <a:latin typeface="Consolas"/>
+              </a:rPr>
+              <a:t>kategooria</a:t>
+            </a:r>
+            <a:endParaRPr sz="1200" b="0" dirty="0">
+              <a:solidFill>
+                <a:srgbClr val="E2E8F0"/>
+              </a:solidFill>
+              <a:latin typeface="Consolas"/>
+            </a:endParaRPr>
           </a:p>
           <a:p>
             <a:pPr>
@@ -29768,13 +30943,31 @@
               </a:spcAft>
             </a:pPr>
             <a:r>
-              <a:rPr sz="1200" b="0">
-                <a:solidFill>
-                  <a:srgbClr val="E2E8F0"/>
-                </a:solidFill>
-                <a:latin typeface="Consolas"/>
-              </a:rPr>
-              <a:t>ORDER BY toodete_arv DESC;</a:t>
+              <a:rPr sz="1200" b="0" dirty="0">
+                <a:solidFill>
+                  <a:srgbClr val="E2E8F0"/>
+                </a:solidFill>
+                <a:latin typeface="Consolas"/>
+              </a:rPr>
+              <a:t>ORDER BY </a:t>
+            </a:r>
+            <a:r>
+              <a:rPr sz="1200" b="0" dirty="0" err="1">
+                <a:solidFill>
+                  <a:srgbClr val="E2E8F0"/>
+                </a:solidFill>
+                <a:latin typeface="Consolas"/>
+              </a:rPr>
+              <a:t>toodete_arv</a:t>
+            </a:r>
+            <a:r>
+              <a:rPr sz="1200" b="0" dirty="0">
+                <a:solidFill>
+                  <a:srgbClr val="E2E8F0"/>
+                </a:solidFill>
+                <a:latin typeface="Consolas"/>
+              </a:rPr>
+              <a:t> DESC;</a:t>
             </a:r>
           </a:p>
         </p:txBody>
@@ -29924,68 +31117,185 @@
               </a:spcAft>
             </a:pPr>
             <a:r>
-              <a:rPr sz="1200" b="0">
-                <a:solidFill>
-                  <a:srgbClr val="E2E8F0"/>
-                </a:solidFill>
-                <a:latin typeface="Consolas"/>
-              </a:rPr>
-              <a:t>SELECT tarneviis,</a:t>
-            </a:r>
-          </a:p>
-          <a:p>
-            <a:r>
-              <a:rPr sz="1200" b="0">
-                <a:solidFill>
-                  <a:srgbClr val="E2E8F0"/>
-                </a:solidFill>
-                <a:latin typeface="Consolas"/>
-              </a:rPr>
-              <a:t>       COUNT(*) AS tellimuste_arv,</a:t>
-            </a:r>
-          </a:p>
-          <a:p>
-            <a:r>
-              <a:rPr sz="1200" b="0">
-                <a:solidFill>
-                  <a:srgbClr val="E2E8F0"/>
-                </a:solidFill>
-                <a:latin typeface="Consolas"/>
-              </a:rPr>
-              <a:t>       MAX(kuupäev) AS viimane</a:t>
-            </a:r>
-          </a:p>
-          <a:p>
-            <a:r>
-              <a:rPr sz="1200" b="0">
-                <a:solidFill>
-                  <a:srgbClr val="E2E8F0"/>
-                </a:solidFill>
-                <a:latin typeface="Consolas"/>
-              </a:rPr>
-              <a:t>FROM tellimused</a:t>
-            </a:r>
-          </a:p>
-          <a:p>
-            <a:r>
-              <a:rPr sz="1200" b="0">
-                <a:solidFill>
-                  <a:srgbClr val="E2E8F0"/>
-                </a:solidFill>
-                <a:latin typeface="Consolas"/>
-              </a:rPr>
-              <a:t>GROUP BY tarneviis</a:t>
-            </a:r>
-          </a:p>
-          <a:p>
-            <a:r>
-              <a:rPr sz="1200" b="0">
-                <a:solidFill>
-                  <a:srgbClr val="E2E8F0"/>
-                </a:solidFill>
-                <a:latin typeface="Consolas"/>
-              </a:rPr>
-              <a:t>ORDER BY tellimuste_arv DESC;</a:t>
+              <a:rPr sz="1200" b="0" dirty="0">
+                <a:solidFill>
+                  <a:srgbClr val="E2E8F0"/>
+                </a:solidFill>
+                <a:latin typeface="Consolas"/>
+              </a:rPr>
+              <a:t>SELECT </a:t>
+            </a:r>
+            <a:r>
+              <a:rPr sz="1200" b="0" dirty="0" err="1">
+                <a:solidFill>
+                  <a:srgbClr val="E2E8F0"/>
+                </a:solidFill>
+                <a:latin typeface="Consolas"/>
+              </a:rPr>
+              <a:t>tarneviis</a:t>
+            </a:r>
+            <a:r>
+              <a:rPr sz="1200" b="0" dirty="0">
+                <a:solidFill>
+                  <a:srgbClr val="E2E8F0"/>
+                </a:solidFill>
+                <a:latin typeface="Consolas"/>
+              </a:rPr>
+              <a:t>,</a:t>
+            </a:r>
+          </a:p>
+          <a:p>
+            <a:r>
+              <a:rPr sz="1200" b="0" dirty="0">
+                <a:solidFill>
+                  <a:srgbClr val="E2E8F0"/>
+                </a:solidFill>
+                <a:latin typeface="Consolas"/>
+              </a:rPr>
+              <a:t>       COUNT(*) AS </a:t>
+            </a:r>
+            <a:r>
+              <a:rPr sz="1200" b="0" dirty="0" err="1">
+                <a:solidFill>
+                  <a:srgbClr val="E2E8F0"/>
+                </a:solidFill>
+                <a:latin typeface="Consolas"/>
+              </a:rPr>
+              <a:t>tellimuste_arv</a:t>
+            </a:r>
+            <a:r>
+              <a:rPr sz="1200" b="0" dirty="0">
+                <a:solidFill>
+                  <a:srgbClr val="E2E8F0"/>
+                </a:solidFill>
+                <a:latin typeface="Consolas"/>
+              </a:rPr>
+              <a:t>,</a:t>
+            </a:r>
+          </a:p>
+          <a:p>
+            <a:r>
+              <a:rPr sz="1200" b="0" dirty="0">
+                <a:solidFill>
+                  <a:srgbClr val="E2E8F0"/>
+                </a:solidFill>
+                <a:latin typeface="Consolas"/>
+              </a:rPr>
+              <a:t>       MAX(</a:t>
+            </a:r>
+            <a:r>
+              <a:rPr sz="1200" b="0" dirty="0" err="1">
+                <a:solidFill>
+                  <a:srgbClr val="E2E8F0"/>
+                </a:solidFill>
+                <a:latin typeface="Consolas"/>
+              </a:rPr>
+              <a:t>kuupäev</a:t>
+            </a:r>
+            <a:r>
+              <a:rPr sz="1200" b="0" dirty="0">
+                <a:solidFill>
+                  <a:srgbClr val="E2E8F0"/>
+                </a:solidFill>
+                <a:latin typeface="Consolas"/>
+              </a:rPr>
+              <a:t>) AS </a:t>
+            </a:r>
+            <a:r>
+              <a:rPr sz="1200" b="0" dirty="0" err="1">
+                <a:solidFill>
+                  <a:srgbClr val="E2E8F0"/>
+                </a:solidFill>
+                <a:latin typeface="Consolas"/>
+              </a:rPr>
+              <a:t>viimane</a:t>
+            </a:r>
+            <a:endParaRPr sz="1200" b="0" dirty="0">
+              <a:solidFill>
+                <a:srgbClr val="E2E8F0"/>
+              </a:solidFill>
+              <a:latin typeface="Consolas"/>
+            </a:endParaRPr>
+          </a:p>
+          <a:p>
+            <a:r>
+              <a:rPr sz="1200" b="0" dirty="0">
+                <a:solidFill>
+                  <a:srgbClr val="E2E8F0"/>
+                </a:solidFill>
+                <a:latin typeface="Consolas"/>
+              </a:rPr>
+              <a:t>FROM </a:t>
+            </a:r>
+            <a:r>
+              <a:rPr sz="1200" b="0" dirty="0" err="1">
+                <a:solidFill>
+                  <a:srgbClr val="E2E8F0"/>
+                </a:solidFill>
+                <a:latin typeface="Consolas"/>
+              </a:rPr>
+              <a:t>tellimused</a:t>
+            </a:r>
+            <a:endParaRPr sz="1200" b="0" dirty="0">
+              <a:solidFill>
+                <a:srgbClr val="E2E8F0"/>
+              </a:solidFill>
+              <a:latin typeface="Consolas"/>
+            </a:endParaRPr>
+          </a:p>
+          <a:p>
+            <a:r>
+              <a:rPr sz="1200" b="0" dirty="0">
+                <a:solidFill>
+                  <a:srgbClr val="E2E8F0"/>
+                </a:solidFill>
+                <a:latin typeface="Consolas"/>
+              </a:rPr>
+              <a:t>GROUP BY </a:t>
+            </a:r>
+            <a:r>
+              <a:rPr sz="1200" b="0" dirty="0" err="1">
+                <a:solidFill>
+                  <a:srgbClr val="E2E8F0"/>
+                </a:solidFill>
+                <a:latin typeface="Consolas"/>
+              </a:rPr>
+              <a:t>tarneviis</a:t>
+            </a:r>
+            <a:endParaRPr sz="1200" b="0" dirty="0">
+              <a:solidFill>
+                <a:srgbClr val="E2E8F0"/>
+              </a:solidFill>
+              <a:latin typeface="Consolas"/>
+            </a:endParaRPr>
+          </a:p>
+          <a:p>
+            <a:r>
+              <a:rPr sz="1200" b="0" dirty="0">
+                <a:solidFill>
+                  <a:srgbClr val="E2E8F0"/>
+                </a:solidFill>
+                <a:latin typeface="Consolas"/>
+              </a:rPr>
+              <a:t>ORDER BY </a:t>
+            </a:r>
+            <a:r>
+              <a:rPr sz="1200" b="0" dirty="0" err="1">
+                <a:solidFill>
+                  <a:srgbClr val="E2E8F0"/>
+                </a:solidFill>
+                <a:latin typeface="Consolas"/>
+              </a:rPr>
+              <a:t>tellimuste_arv</a:t>
+            </a:r>
+            <a:r>
+              <a:rPr sz="1200" b="0" dirty="0">
+                <a:solidFill>
+                  <a:srgbClr val="E2E8F0"/>
+                </a:solidFill>
+                <a:latin typeface="Consolas"/>
+              </a:rPr>
+              <a:t> DESC;</a:t>
             </a:r>
           </a:p>
         </p:txBody>
@@ -32203,14 +33513,14 @@
       </p:grpSpPr>
       <p:sp>
         <p:nvSpPr>
-          <p:cNvPr id="3" name="Rectangle 2"/>
+          <p:cNvPr id="2" name="Rectangle 1"/>
           <p:cNvSpPr/>
           <p:nvPr/>
         </p:nvSpPr>
         <p:spPr>
           <a:xfrm>
             <a:off x="0" y="0"/>
-            <a:ext cx="12191695" cy="841248"/>
+            <a:ext cx="12191695" cy="6858000"/>
           </a:xfrm>
           <a:prstGeom prst="rect">
             <a:avLst/>
@@ -32248,14 +33558,14 @@
       </p:sp>
       <p:sp>
         <p:nvSpPr>
-          <p:cNvPr id="4" name="Rectangle 3"/>
+          <p:cNvPr id="3" name="Rectangle 2"/>
           <p:cNvSpPr/>
           <p:nvPr/>
         </p:nvSpPr>
         <p:spPr>
           <a:xfrm>
-            <a:off x="0" y="841248"/>
-            <a:ext cx="12191695" cy="73152"/>
+            <a:off x="0" y="0"/>
+            <a:ext cx="164592" cy="6858000"/>
           </a:xfrm>
           <a:prstGeom prst="rect">
             <a:avLst/>
@@ -32293,14 +33603,125 @@
       </p:sp>
       <p:sp>
         <p:nvSpPr>
+          <p:cNvPr id="4" name="TextBox 3"/>
+          <p:cNvSpPr txBox="1"/>
+          <p:nvPr/>
+        </p:nvSpPr>
+        <p:spPr>
+          <a:xfrm>
+            <a:off x="640080" y="1965960"/>
+            <a:ext cx="10972800" cy="365760"/>
+          </a:xfrm>
+          <a:prstGeom prst="rect">
+            <a:avLst/>
+          </a:prstGeom>
+          <a:noFill/>
+        </p:spPr>
+        <p:txBody>
+          <a:bodyPr wrap="square" anchor="t">
+            <a:spAutoFit/>
+          </a:bodyPr>
+          <a:lstStyle/>
+          <a:p>
+            <a:pPr algn="l"/>
+            <a:r>
+              <a:rPr sz="1600" b="1">
+                <a:solidFill>
+                  <a:srgbClr val="C49526"/>
+                </a:solidFill>
+                <a:latin typeface="Calibri"/>
+              </a:rPr>
+              <a:t>1. PÄEV  ·  8 AK T</a:t>
+            </a:r>
+          </a:p>
+        </p:txBody>
+      </p:sp>
+      <p:sp>
+        <p:nvSpPr>
           <p:cNvPr id="5" name="TextBox 4"/>
           <p:cNvSpPr txBox="1"/>
           <p:nvPr/>
         </p:nvSpPr>
         <p:spPr>
           <a:xfrm>
-            <a:off x="365760" y="164592"/>
-            <a:ext cx="11430000" cy="548640"/>
+            <a:off x="640080" y="2377440"/>
+            <a:ext cx="10972800" cy="615553"/>
+          </a:xfrm>
+          <a:prstGeom prst="rect">
+            <a:avLst/>
+          </a:prstGeom>
+          <a:noFill/>
+        </p:spPr>
+        <p:txBody>
+          <a:bodyPr wrap="square" anchor="t">
+            <a:spAutoFit/>
+          </a:bodyPr>
+          <a:lstStyle/>
+          <a:p>
+            <a:pPr algn="l"/>
+            <a:r>
+              <a:rPr lang="en-GB" sz="3400" b="1" dirty="0" err="1">
+                <a:solidFill>
+                  <a:srgbClr val="FFFFFF"/>
+                </a:solidFill>
+                <a:latin typeface="Calibri"/>
+              </a:rPr>
+              <a:t>Arvutused</a:t>
+            </a:r>
+            <a:endParaRPr sz="3400" b="1" dirty="0">
+              <a:solidFill>
+                <a:srgbClr val="FFFFFF"/>
+              </a:solidFill>
+              <a:latin typeface="Calibri"/>
+            </a:endParaRPr>
+          </a:p>
+        </p:txBody>
+      </p:sp>
+      <p:sp>
+        <p:nvSpPr>
+          <p:cNvPr id="6" name="TextBox 5"/>
+          <p:cNvSpPr txBox="1"/>
+          <p:nvPr/>
+        </p:nvSpPr>
+        <p:spPr>
+          <a:xfrm>
+            <a:off x="640080" y="3520440"/>
+            <a:ext cx="10972800" cy="640080"/>
+          </a:xfrm>
+          <a:prstGeom prst="rect">
+            <a:avLst/>
+          </a:prstGeom>
+          <a:noFill/>
+        </p:spPr>
+        <p:txBody>
+          <a:bodyPr wrap="square" anchor="t">
+            <a:spAutoFit/>
+          </a:bodyPr>
+          <a:lstStyle/>
+          <a:p>
+            <a:pPr algn="l"/>
+            <a:r>
+              <a:rPr sz="1800" b="0">
+                <a:solidFill>
+                  <a:srgbClr val="BACCE0"/>
+                </a:solidFill>
+                <a:latin typeface="Calibri"/>
+              </a:rPr>
+              <a:t>Agregaadid → GROUP BY → HAVING → CASE</a:t>
+            </a:r>
+          </a:p>
+        </p:txBody>
+      </p:sp>
+      <p:sp>
+        <p:nvSpPr>
+          <p:cNvPr id="9" name="TextBox 8"/>
+          <p:cNvSpPr txBox="1"/>
+          <p:nvPr/>
+        </p:nvSpPr>
+        <p:spPr>
+          <a:xfrm>
+            <a:off x="9601200" y="6601968"/>
+            <a:ext cx="2194560" cy="256032"/>
           </a:xfrm>
           <a:prstGeom prst="rect">
             <a:avLst/>
@@ -32313,41 +33734,6 @@
           </a:bodyPr>
           <a:lstStyle/>
           <a:p>
-            <a:pPr algn="l"/>
-            <a:r>
-              <a:rPr sz="2400" b="1">
-                <a:solidFill>
-                  <a:srgbClr val="FFFFFF"/>
-                </a:solidFill>
-                <a:latin typeface="Calibri"/>
-              </a:rPr>
-              <a:t>Seosed ja SQL-lause järjekord</a:t>
-            </a:r>
-          </a:p>
-        </p:txBody>
-      </p:sp>
-      <p:sp>
-        <p:nvSpPr>
-          <p:cNvPr id="8" name="TextBox 7"/>
-          <p:cNvSpPr txBox="1"/>
-          <p:nvPr/>
-        </p:nvSpPr>
-        <p:spPr>
-          <a:xfrm>
-            <a:off x="9601200" y="6601968"/>
-            <a:ext cx="2194560" cy="256032"/>
-          </a:xfrm>
-          <a:prstGeom prst="rect">
-            <a:avLst/>
-          </a:prstGeom>
-          <a:noFill/>
-        </p:spPr>
-        <p:txBody>
-          <a:bodyPr wrap="square" anchor="ctr">
-            <a:spAutoFit/>
-          </a:bodyPr>
-          <a:lstStyle/>
-          <a:p>
             <a:pPr algn="r"/>
             <a:r>
               <a:rPr sz="1100" b="0">
@@ -32356,1031 +33742,131 @@
                 </a:solidFill>
                 <a:latin typeface="Calibri"/>
               </a:rPr>
-              <a:t>5</a:t>
-            </a:r>
-          </a:p>
-        </p:txBody>
-      </p:sp>
-      <p:sp>
-        <p:nvSpPr>
-          <p:cNvPr id="9" name="TextBox 8"/>
-          <p:cNvSpPr txBox="1"/>
-          <p:nvPr/>
-        </p:nvSpPr>
-        <p:spPr>
-          <a:xfrm>
-            <a:off x="365760" y="1051560"/>
-            <a:ext cx="10972800" cy="640080"/>
-          </a:xfrm>
-          <a:prstGeom prst="rect">
-            <a:avLst/>
-          </a:prstGeom>
-          <a:noFill/>
-        </p:spPr>
-        <p:txBody>
-          <a:bodyPr wrap="square" anchor="t">
-            <a:spAutoFit/>
-          </a:bodyPr>
-          <a:lstStyle/>
-          <a:p>
-            <a:pPr algn="l"/>
-            <a:r>
-              <a:rPr sz="1500" b="0">
-                <a:solidFill>
-                  <a:srgbClr val="334155"/>
-                </a:solidFill>
-                <a:latin typeface="Calibri"/>
-              </a:rPr>
-              <a:t>kliendid → tellimused → tellimuse_read → tooted → kategooriad
-Täna töötame ühe tabeliga; homme liidame.</a:t>
-            </a:r>
-          </a:p>
-        </p:txBody>
-      </p:sp>
-      <p:sp>
-        <p:nvSpPr>
-          <p:cNvPr id="10" name="Rounded Rectangle 9"/>
-          <p:cNvSpPr/>
-          <p:nvPr/>
-        </p:nvSpPr>
-        <p:spPr>
-          <a:xfrm>
-            <a:off x="365760" y="1965960"/>
-            <a:ext cx="3703320" cy="1874519"/>
-          </a:xfrm>
-          <a:prstGeom prst="roundRect">
-            <a:avLst>
-              <a:gd name="adj" fmla="val 8000"/>
-            </a:avLst>
-          </a:prstGeom>
-          <a:solidFill>
-            <a:srgbClr val="FFFFFF"/>
-          </a:solidFill>
-          <a:ln>
-            <a:noFill/>
-          </a:ln>
-          <a:effectLst/>
-        </p:spPr>
-        <p:style>
-          <a:lnRef idx="1">
-            <a:schemeClr val="accent1"/>
-          </a:lnRef>
-          <a:fillRef idx="3">
-            <a:schemeClr val="accent1"/>
-          </a:fillRef>
-          <a:effectRef idx="2">
-            <a:schemeClr val="accent1"/>
-          </a:effectRef>
-          <a:fontRef idx="minor">
-            <a:schemeClr val="lt1"/>
-          </a:fontRef>
-        </p:style>
-        <p:txBody>
-          <a:bodyPr rtlCol="0" anchor="ctr"/>
-          <a:lstStyle/>
-          <a:p>
-            <a:pPr algn="ctr"/>
-            <a:endParaRPr/>
-          </a:p>
-        </p:txBody>
-      </p:sp>
-      <p:sp>
-        <p:nvSpPr>
-          <p:cNvPr id="11" name="Rounded Rectangle 10"/>
-          <p:cNvSpPr/>
-          <p:nvPr/>
-        </p:nvSpPr>
-        <p:spPr>
-          <a:xfrm>
-            <a:off x="594360" y="2606039"/>
-            <a:ext cx="502920" cy="457200"/>
-          </a:xfrm>
-          <a:prstGeom prst="roundRect">
-            <a:avLst>
-              <a:gd name="adj" fmla="val 8000"/>
-            </a:avLst>
-          </a:prstGeom>
-          <a:solidFill>
-            <a:srgbClr val="007073"/>
-          </a:solidFill>
-          <a:ln>
-            <a:noFill/>
-          </a:ln>
-          <a:effectLst/>
-        </p:spPr>
-        <p:style>
-          <a:lnRef idx="1">
-            <a:schemeClr val="accent1"/>
-          </a:lnRef>
-          <a:fillRef idx="3">
-            <a:schemeClr val="accent1"/>
-          </a:fillRef>
-          <a:effectRef idx="2">
-            <a:schemeClr val="accent1"/>
-          </a:effectRef>
-          <a:fontRef idx="minor">
-            <a:schemeClr val="lt1"/>
-          </a:fontRef>
-        </p:style>
-        <p:txBody>
-          <a:bodyPr rtlCol="0" anchor="ctr"/>
-          <a:lstStyle/>
-          <a:p>
-            <a:pPr algn="ctr"/>
-            <a:endParaRPr/>
-          </a:p>
-        </p:txBody>
-      </p:sp>
-      <p:sp>
-        <p:nvSpPr>
-          <p:cNvPr id="12" name="TextBox 11"/>
-          <p:cNvSpPr txBox="1"/>
-          <p:nvPr/>
-        </p:nvSpPr>
-        <p:spPr>
-          <a:xfrm>
-            <a:off x="594360" y="2606039"/>
-            <a:ext cx="502920" cy="457200"/>
-          </a:xfrm>
-          <a:prstGeom prst="rect">
-            <a:avLst/>
-          </a:prstGeom>
-          <a:noFill/>
-        </p:spPr>
-        <p:txBody>
-          <a:bodyPr wrap="square" anchor="ctr">
-            <a:spAutoFit/>
-          </a:bodyPr>
-          <a:lstStyle/>
-          <a:p>
-            <a:pPr algn="ctr"/>
-            <a:r>
-              <a:rPr sz="1600" b="1">
-                <a:solidFill>
-                  <a:srgbClr val="FFFFFF"/>
-                </a:solidFill>
-                <a:latin typeface="Calibri"/>
-              </a:rPr>
-              <a:t>1</a:t>
-            </a:r>
-          </a:p>
-        </p:txBody>
-      </p:sp>
-      <p:sp>
-        <p:nvSpPr>
-          <p:cNvPr id="13" name="TextBox 12"/>
-          <p:cNvSpPr txBox="1"/>
-          <p:nvPr/>
-        </p:nvSpPr>
-        <p:spPr>
-          <a:xfrm>
-            <a:off x="1280160" y="1965960"/>
-            <a:ext cx="2560320" cy="1874519"/>
-          </a:xfrm>
-          <a:prstGeom prst="rect">
-            <a:avLst/>
-          </a:prstGeom>
-          <a:noFill/>
-        </p:spPr>
-        <p:txBody>
-          <a:bodyPr wrap="square" anchor="ctr">
-            <a:spAutoFit/>
-          </a:bodyPr>
-          <a:lstStyle/>
-          <a:p>
-            <a:pPr algn="l"/>
-            <a:r>
-              <a:rPr sz="1800" b="1" dirty="0">
-                <a:solidFill>
-                  <a:srgbClr val="0F203E"/>
-                </a:solidFill>
-                <a:latin typeface="Calibri"/>
-              </a:rPr>
-              <a:t>SELECT</a:t>
-            </a:r>
-          </a:p>
-        </p:txBody>
-      </p:sp>
-      <p:sp>
-        <p:nvSpPr>
-          <p:cNvPr id="14" name="Rounded Rectangle 13"/>
-          <p:cNvSpPr/>
-          <p:nvPr/>
-        </p:nvSpPr>
-        <p:spPr>
-          <a:xfrm>
-            <a:off x="4251960" y="1965960"/>
-            <a:ext cx="3703320" cy="1874519"/>
-          </a:xfrm>
-          <a:prstGeom prst="roundRect">
-            <a:avLst>
-              <a:gd name="adj" fmla="val 8000"/>
-            </a:avLst>
-          </a:prstGeom>
-          <a:solidFill>
-            <a:srgbClr val="FFFFFF"/>
-          </a:solidFill>
-          <a:ln>
-            <a:noFill/>
-          </a:ln>
-          <a:effectLst/>
-        </p:spPr>
-        <p:style>
-          <a:lnRef idx="1">
-            <a:schemeClr val="accent1"/>
-          </a:lnRef>
-          <a:fillRef idx="3">
-            <a:schemeClr val="accent1"/>
-          </a:fillRef>
-          <a:effectRef idx="2">
-            <a:schemeClr val="accent1"/>
-          </a:effectRef>
-          <a:fontRef idx="minor">
-            <a:schemeClr val="lt1"/>
-          </a:fontRef>
-        </p:style>
-        <p:txBody>
-          <a:bodyPr rtlCol="0" anchor="ctr"/>
-          <a:lstStyle/>
-          <a:p>
-            <a:pPr algn="ctr"/>
-            <a:endParaRPr/>
-          </a:p>
-        </p:txBody>
-      </p:sp>
-      <p:sp>
-        <p:nvSpPr>
-          <p:cNvPr id="15" name="Rounded Rectangle 14"/>
-          <p:cNvSpPr/>
-          <p:nvPr/>
-        </p:nvSpPr>
-        <p:spPr>
-          <a:xfrm>
-            <a:off x="4480560" y="2606039"/>
-            <a:ext cx="502920" cy="457200"/>
-          </a:xfrm>
-          <a:prstGeom prst="roundRect">
-            <a:avLst>
-              <a:gd name="adj" fmla="val 8000"/>
-            </a:avLst>
-          </a:prstGeom>
-          <a:solidFill>
-            <a:srgbClr val="007073"/>
-          </a:solidFill>
-          <a:ln>
-            <a:noFill/>
-          </a:ln>
-          <a:effectLst/>
-        </p:spPr>
-        <p:style>
-          <a:lnRef idx="1">
-            <a:schemeClr val="accent1"/>
-          </a:lnRef>
-          <a:fillRef idx="3">
-            <a:schemeClr val="accent1"/>
-          </a:fillRef>
-          <a:effectRef idx="2">
-            <a:schemeClr val="accent1"/>
-          </a:effectRef>
-          <a:fontRef idx="minor">
-            <a:schemeClr val="lt1"/>
-          </a:fontRef>
-        </p:style>
-        <p:txBody>
-          <a:bodyPr rtlCol="0" anchor="ctr"/>
-          <a:lstStyle/>
-          <a:p>
-            <a:pPr algn="ctr"/>
-            <a:endParaRPr/>
-          </a:p>
-        </p:txBody>
-      </p:sp>
-      <p:sp>
-        <p:nvSpPr>
-          <p:cNvPr id="16" name="TextBox 15"/>
-          <p:cNvSpPr txBox="1"/>
-          <p:nvPr/>
-        </p:nvSpPr>
-        <p:spPr>
-          <a:xfrm>
-            <a:off x="4480560" y="2606039"/>
-            <a:ext cx="502920" cy="457200"/>
-          </a:xfrm>
-          <a:prstGeom prst="rect">
-            <a:avLst/>
-          </a:prstGeom>
-          <a:noFill/>
-        </p:spPr>
-        <p:txBody>
-          <a:bodyPr wrap="square" anchor="ctr">
-            <a:spAutoFit/>
-          </a:bodyPr>
-          <a:lstStyle/>
-          <a:p>
-            <a:pPr algn="ctr"/>
-            <a:r>
-              <a:rPr sz="1600" b="1">
-                <a:solidFill>
-                  <a:srgbClr val="FFFFFF"/>
-                </a:solidFill>
-                <a:latin typeface="Calibri"/>
-              </a:rPr>
-              <a:t>2</a:t>
-            </a:r>
-          </a:p>
-        </p:txBody>
-      </p:sp>
-      <p:sp>
-        <p:nvSpPr>
-          <p:cNvPr id="17" name="TextBox 16"/>
-          <p:cNvSpPr txBox="1"/>
-          <p:nvPr/>
-        </p:nvSpPr>
-        <p:spPr>
-          <a:xfrm>
-            <a:off x="5166360" y="1965960"/>
-            <a:ext cx="2560320" cy="1874519"/>
-          </a:xfrm>
-          <a:prstGeom prst="rect">
-            <a:avLst/>
-          </a:prstGeom>
-          <a:noFill/>
-        </p:spPr>
-        <p:txBody>
-          <a:bodyPr wrap="square" anchor="ctr">
-            <a:spAutoFit/>
-          </a:bodyPr>
-          <a:lstStyle/>
-          <a:p>
-            <a:pPr algn="l"/>
-            <a:r>
-              <a:rPr sz="1800" b="1">
-                <a:solidFill>
-                  <a:srgbClr val="0F203E"/>
-                </a:solidFill>
-                <a:latin typeface="Calibri"/>
-              </a:rPr>
-              <a:t>FROM / JOIN</a:t>
-            </a:r>
-          </a:p>
-        </p:txBody>
-      </p:sp>
-      <p:sp>
-        <p:nvSpPr>
-          <p:cNvPr id="18" name="Rounded Rectangle 17"/>
-          <p:cNvSpPr/>
-          <p:nvPr/>
-        </p:nvSpPr>
-        <p:spPr>
-          <a:xfrm>
-            <a:off x="8138160" y="1965960"/>
-            <a:ext cx="3703320" cy="1874519"/>
-          </a:xfrm>
-          <a:prstGeom prst="roundRect">
-            <a:avLst>
-              <a:gd name="adj" fmla="val 8000"/>
-            </a:avLst>
-          </a:prstGeom>
-          <a:solidFill>
-            <a:srgbClr val="FFFFFF"/>
-          </a:solidFill>
-          <a:ln>
-            <a:noFill/>
-          </a:ln>
-          <a:effectLst/>
-        </p:spPr>
-        <p:style>
-          <a:lnRef idx="1">
-            <a:schemeClr val="accent1"/>
-          </a:lnRef>
-          <a:fillRef idx="3">
-            <a:schemeClr val="accent1"/>
-          </a:fillRef>
-          <a:effectRef idx="2">
-            <a:schemeClr val="accent1"/>
-          </a:effectRef>
-          <a:fontRef idx="minor">
-            <a:schemeClr val="lt1"/>
-          </a:fontRef>
-        </p:style>
-        <p:txBody>
-          <a:bodyPr rtlCol="0" anchor="ctr"/>
-          <a:lstStyle/>
-          <a:p>
-            <a:pPr algn="ctr"/>
-            <a:endParaRPr/>
-          </a:p>
-        </p:txBody>
-      </p:sp>
-      <p:sp>
-        <p:nvSpPr>
-          <p:cNvPr id="19" name="Rounded Rectangle 18"/>
-          <p:cNvSpPr/>
-          <p:nvPr/>
-        </p:nvSpPr>
-        <p:spPr>
-          <a:xfrm>
-            <a:off x="8366760" y="2606039"/>
-            <a:ext cx="502920" cy="457200"/>
-          </a:xfrm>
-          <a:prstGeom prst="roundRect">
-            <a:avLst>
-              <a:gd name="adj" fmla="val 8000"/>
-            </a:avLst>
-          </a:prstGeom>
-          <a:solidFill>
-            <a:srgbClr val="007073"/>
-          </a:solidFill>
-          <a:ln>
-            <a:noFill/>
-          </a:ln>
-          <a:effectLst/>
-        </p:spPr>
-        <p:style>
-          <a:lnRef idx="1">
-            <a:schemeClr val="accent1"/>
-          </a:lnRef>
-          <a:fillRef idx="3">
-            <a:schemeClr val="accent1"/>
-          </a:fillRef>
-          <a:effectRef idx="2">
-            <a:schemeClr val="accent1"/>
-          </a:effectRef>
-          <a:fontRef idx="minor">
-            <a:schemeClr val="lt1"/>
-          </a:fontRef>
-        </p:style>
-        <p:txBody>
-          <a:bodyPr rtlCol="0" anchor="ctr"/>
-          <a:lstStyle/>
-          <a:p>
-            <a:pPr algn="ctr"/>
-            <a:endParaRPr/>
-          </a:p>
-        </p:txBody>
-      </p:sp>
-      <p:sp>
-        <p:nvSpPr>
-          <p:cNvPr id="20" name="TextBox 19"/>
-          <p:cNvSpPr txBox="1"/>
-          <p:nvPr/>
-        </p:nvSpPr>
-        <p:spPr>
-          <a:xfrm>
-            <a:off x="8366760" y="2606039"/>
-            <a:ext cx="502920" cy="457200"/>
-          </a:xfrm>
-          <a:prstGeom prst="rect">
-            <a:avLst/>
-          </a:prstGeom>
-          <a:noFill/>
-        </p:spPr>
-        <p:txBody>
-          <a:bodyPr wrap="square" anchor="ctr">
-            <a:spAutoFit/>
-          </a:bodyPr>
-          <a:lstStyle/>
-          <a:p>
-            <a:pPr algn="ctr"/>
-            <a:r>
-              <a:rPr sz="1600" b="1">
-                <a:solidFill>
-                  <a:srgbClr val="FFFFFF"/>
-                </a:solidFill>
-                <a:latin typeface="Calibri"/>
-              </a:rPr>
-              <a:t>3</a:t>
-            </a:r>
-          </a:p>
-        </p:txBody>
-      </p:sp>
-      <p:sp>
-        <p:nvSpPr>
-          <p:cNvPr id="21" name="TextBox 20"/>
-          <p:cNvSpPr txBox="1"/>
-          <p:nvPr/>
-        </p:nvSpPr>
-        <p:spPr>
-          <a:xfrm>
-            <a:off x="9052560" y="1965960"/>
-            <a:ext cx="2560320" cy="1874519"/>
-          </a:xfrm>
-          <a:prstGeom prst="rect">
-            <a:avLst/>
-          </a:prstGeom>
-          <a:noFill/>
-        </p:spPr>
-        <p:txBody>
-          <a:bodyPr wrap="square" anchor="ctr">
-            <a:spAutoFit/>
-          </a:bodyPr>
-          <a:lstStyle/>
-          <a:p>
-            <a:pPr algn="l"/>
-            <a:r>
-              <a:rPr sz="1800" b="1">
-                <a:solidFill>
-                  <a:srgbClr val="0F203E"/>
-                </a:solidFill>
-                <a:latin typeface="Calibri"/>
-              </a:rPr>
-              <a:t>WHERE</a:t>
-            </a:r>
-          </a:p>
-        </p:txBody>
-      </p:sp>
-      <p:sp>
-        <p:nvSpPr>
-          <p:cNvPr id="22" name="Rounded Rectangle 21"/>
-          <p:cNvSpPr/>
-          <p:nvPr/>
-        </p:nvSpPr>
-        <p:spPr>
-          <a:xfrm>
-            <a:off x="365760" y="4023360"/>
-            <a:ext cx="3703320" cy="1874519"/>
-          </a:xfrm>
-          <a:prstGeom prst="roundRect">
-            <a:avLst>
-              <a:gd name="adj" fmla="val 8000"/>
-            </a:avLst>
-          </a:prstGeom>
-          <a:solidFill>
-            <a:srgbClr val="FFFFFF"/>
-          </a:solidFill>
-          <a:ln>
-            <a:noFill/>
-          </a:ln>
-          <a:effectLst/>
-        </p:spPr>
-        <p:style>
-          <a:lnRef idx="1">
-            <a:schemeClr val="accent1"/>
-          </a:lnRef>
-          <a:fillRef idx="3">
-            <a:schemeClr val="accent1"/>
-          </a:fillRef>
-          <a:effectRef idx="2">
-            <a:schemeClr val="accent1"/>
-          </a:effectRef>
-          <a:fontRef idx="minor">
-            <a:schemeClr val="lt1"/>
-          </a:fontRef>
-        </p:style>
-        <p:txBody>
-          <a:bodyPr rtlCol="0" anchor="ctr"/>
-          <a:lstStyle/>
-          <a:p>
-            <a:pPr algn="ctr"/>
-            <a:endParaRPr/>
-          </a:p>
-        </p:txBody>
-      </p:sp>
-      <p:sp>
-        <p:nvSpPr>
-          <p:cNvPr id="23" name="Rounded Rectangle 22"/>
-          <p:cNvSpPr/>
-          <p:nvPr/>
-        </p:nvSpPr>
-        <p:spPr>
-          <a:xfrm>
-            <a:off x="594360" y="4663440"/>
-            <a:ext cx="502920" cy="457200"/>
-          </a:xfrm>
-          <a:prstGeom prst="roundRect">
-            <a:avLst>
-              <a:gd name="adj" fmla="val 8000"/>
-            </a:avLst>
-          </a:prstGeom>
-          <a:solidFill>
-            <a:srgbClr val="007073"/>
-          </a:solidFill>
-          <a:ln>
-            <a:noFill/>
-          </a:ln>
-          <a:effectLst/>
-        </p:spPr>
-        <p:style>
-          <a:lnRef idx="1">
-            <a:schemeClr val="accent1"/>
-          </a:lnRef>
-          <a:fillRef idx="3">
-            <a:schemeClr val="accent1"/>
-          </a:fillRef>
-          <a:effectRef idx="2">
-            <a:schemeClr val="accent1"/>
-          </a:effectRef>
-          <a:fontRef idx="minor">
-            <a:schemeClr val="lt1"/>
-          </a:fontRef>
-        </p:style>
-        <p:txBody>
-          <a:bodyPr rtlCol="0" anchor="ctr"/>
-          <a:lstStyle/>
-          <a:p>
-            <a:pPr algn="ctr"/>
-            <a:endParaRPr/>
-          </a:p>
-        </p:txBody>
-      </p:sp>
-      <p:sp>
-        <p:nvSpPr>
-          <p:cNvPr id="24" name="TextBox 23"/>
-          <p:cNvSpPr txBox="1"/>
-          <p:nvPr/>
-        </p:nvSpPr>
-        <p:spPr>
-          <a:xfrm>
-            <a:off x="594360" y="4663440"/>
-            <a:ext cx="502920" cy="457200"/>
-          </a:xfrm>
-          <a:prstGeom prst="rect">
-            <a:avLst/>
-          </a:prstGeom>
-          <a:noFill/>
-        </p:spPr>
-        <p:txBody>
-          <a:bodyPr wrap="square" anchor="ctr">
-            <a:spAutoFit/>
-          </a:bodyPr>
-          <a:lstStyle/>
-          <a:p>
-            <a:pPr algn="ctr"/>
-            <a:r>
-              <a:rPr sz="1600" b="1">
-                <a:solidFill>
-                  <a:srgbClr val="FFFFFF"/>
-                </a:solidFill>
-                <a:latin typeface="Calibri"/>
-              </a:rPr>
-              <a:t>4</a:t>
-            </a:r>
-          </a:p>
-        </p:txBody>
-      </p:sp>
-      <p:sp>
-        <p:nvSpPr>
-          <p:cNvPr id="25" name="TextBox 24"/>
-          <p:cNvSpPr txBox="1"/>
-          <p:nvPr/>
-        </p:nvSpPr>
-        <p:spPr>
-          <a:xfrm>
-            <a:off x="1280160" y="4023360"/>
-            <a:ext cx="2560320" cy="1874519"/>
-          </a:xfrm>
-          <a:prstGeom prst="rect">
-            <a:avLst/>
-          </a:prstGeom>
-          <a:noFill/>
-        </p:spPr>
-        <p:txBody>
-          <a:bodyPr wrap="square" anchor="ctr">
-            <a:spAutoFit/>
-          </a:bodyPr>
-          <a:lstStyle/>
-          <a:p>
-            <a:pPr algn="l"/>
-            <a:r>
-              <a:rPr sz="1800" b="1">
-                <a:solidFill>
-                  <a:srgbClr val="0F203E"/>
-                </a:solidFill>
-                <a:latin typeface="Calibri"/>
-              </a:rPr>
-              <a:t>GROUP BY</a:t>
-            </a:r>
-          </a:p>
-        </p:txBody>
-      </p:sp>
-      <p:sp>
-        <p:nvSpPr>
-          <p:cNvPr id="26" name="Rounded Rectangle 25"/>
-          <p:cNvSpPr/>
-          <p:nvPr/>
-        </p:nvSpPr>
-        <p:spPr>
-          <a:xfrm>
-            <a:off x="4251960" y="4023360"/>
-            <a:ext cx="3703320" cy="1874519"/>
-          </a:xfrm>
-          <a:prstGeom prst="roundRect">
-            <a:avLst>
-              <a:gd name="adj" fmla="val 8000"/>
-            </a:avLst>
-          </a:prstGeom>
-          <a:solidFill>
-            <a:srgbClr val="FFFFFF"/>
-          </a:solidFill>
-          <a:ln>
-            <a:noFill/>
-          </a:ln>
-          <a:effectLst/>
-        </p:spPr>
-        <p:style>
-          <a:lnRef idx="1">
-            <a:schemeClr val="accent1"/>
-          </a:lnRef>
-          <a:fillRef idx="3">
-            <a:schemeClr val="accent1"/>
-          </a:fillRef>
-          <a:effectRef idx="2">
-            <a:schemeClr val="accent1"/>
-          </a:effectRef>
-          <a:fontRef idx="minor">
-            <a:schemeClr val="lt1"/>
-          </a:fontRef>
-        </p:style>
-        <p:txBody>
-          <a:bodyPr rtlCol="0" anchor="ctr"/>
-          <a:lstStyle/>
-          <a:p>
-            <a:pPr algn="ctr"/>
-            <a:endParaRPr/>
-          </a:p>
-        </p:txBody>
-      </p:sp>
-      <p:sp>
-        <p:nvSpPr>
-          <p:cNvPr id="27" name="Rounded Rectangle 26"/>
-          <p:cNvSpPr/>
-          <p:nvPr/>
-        </p:nvSpPr>
-        <p:spPr>
-          <a:xfrm>
-            <a:off x="4480560" y="4663440"/>
-            <a:ext cx="502920" cy="457200"/>
-          </a:xfrm>
-          <a:prstGeom prst="roundRect">
-            <a:avLst>
-              <a:gd name="adj" fmla="val 8000"/>
-            </a:avLst>
-          </a:prstGeom>
-          <a:solidFill>
-            <a:srgbClr val="007073"/>
-          </a:solidFill>
-          <a:ln>
-            <a:noFill/>
-          </a:ln>
-          <a:effectLst/>
-        </p:spPr>
-        <p:style>
-          <a:lnRef idx="1">
-            <a:schemeClr val="accent1"/>
-          </a:lnRef>
-          <a:fillRef idx="3">
-            <a:schemeClr val="accent1"/>
-          </a:fillRef>
-          <a:effectRef idx="2">
-            <a:schemeClr val="accent1"/>
-          </a:effectRef>
-          <a:fontRef idx="minor">
-            <a:schemeClr val="lt1"/>
-          </a:fontRef>
-        </p:style>
-        <p:txBody>
-          <a:bodyPr rtlCol="0" anchor="ctr"/>
-          <a:lstStyle/>
-          <a:p>
-            <a:pPr algn="ctr"/>
-            <a:endParaRPr/>
-          </a:p>
-        </p:txBody>
-      </p:sp>
-      <p:sp>
-        <p:nvSpPr>
-          <p:cNvPr id="28" name="TextBox 27"/>
-          <p:cNvSpPr txBox="1"/>
-          <p:nvPr/>
-        </p:nvSpPr>
-        <p:spPr>
-          <a:xfrm>
-            <a:off x="4480560" y="4663440"/>
-            <a:ext cx="502920" cy="457200"/>
-          </a:xfrm>
-          <a:prstGeom prst="rect">
-            <a:avLst/>
-          </a:prstGeom>
-          <a:noFill/>
-        </p:spPr>
-        <p:txBody>
-          <a:bodyPr wrap="square" anchor="ctr">
-            <a:spAutoFit/>
-          </a:bodyPr>
-          <a:lstStyle/>
-          <a:p>
-            <a:pPr algn="ctr"/>
-            <a:r>
-              <a:rPr sz="1600" b="1">
-                <a:solidFill>
-                  <a:srgbClr val="FFFFFF"/>
-                </a:solidFill>
-                <a:latin typeface="Calibri"/>
-              </a:rPr>
-              <a:t>5</a:t>
-            </a:r>
-          </a:p>
-        </p:txBody>
-      </p:sp>
-      <p:sp>
-        <p:nvSpPr>
-          <p:cNvPr id="29" name="TextBox 28"/>
-          <p:cNvSpPr txBox="1"/>
-          <p:nvPr/>
-        </p:nvSpPr>
-        <p:spPr>
-          <a:xfrm>
-            <a:off x="5166360" y="4023360"/>
-            <a:ext cx="2560320" cy="1874519"/>
-          </a:xfrm>
-          <a:prstGeom prst="rect">
-            <a:avLst/>
-          </a:prstGeom>
-          <a:noFill/>
-        </p:spPr>
-        <p:txBody>
-          <a:bodyPr wrap="square" anchor="ctr">
-            <a:spAutoFit/>
-          </a:bodyPr>
-          <a:lstStyle/>
-          <a:p>
-            <a:pPr algn="l"/>
-            <a:r>
-              <a:rPr sz="1800" b="1">
-                <a:solidFill>
-                  <a:srgbClr val="0F203E"/>
-                </a:solidFill>
-                <a:latin typeface="Calibri"/>
-              </a:rPr>
-              <a:t>HAVING</a:t>
-            </a:r>
-          </a:p>
-        </p:txBody>
-      </p:sp>
-      <p:sp>
-        <p:nvSpPr>
-          <p:cNvPr id="30" name="Rounded Rectangle 29"/>
-          <p:cNvSpPr/>
-          <p:nvPr/>
-        </p:nvSpPr>
-        <p:spPr>
-          <a:xfrm>
-            <a:off x="8138160" y="4023360"/>
-            <a:ext cx="3703320" cy="1874519"/>
-          </a:xfrm>
-          <a:prstGeom prst="roundRect">
-            <a:avLst>
-              <a:gd name="adj" fmla="val 8000"/>
-            </a:avLst>
-          </a:prstGeom>
-          <a:solidFill>
-            <a:srgbClr val="FFFFFF"/>
-          </a:solidFill>
-          <a:ln>
-            <a:noFill/>
-          </a:ln>
-          <a:effectLst/>
-        </p:spPr>
-        <p:style>
-          <a:lnRef idx="1">
-            <a:schemeClr val="accent1"/>
-          </a:lnRef>
-          <a:fillRef idx="3">
-            <a:schemeClr val="accent1"/>
-          </a:fillRef>
-          <a:effectRef idx="2">
-            <a:schemeClr val="accent1"/>
-          </a:effectRef>
-          <a:fontRef idx="minor">
-            <a:schemeClr val="lt1"/>
-          </a:fontRef>
-        </p:style>
-        <p:txBody>
-          <a:bodyPr rtlCol="0" anchor="ctr"/>
-          <a:lstStyle/>
-          <a:p>
-            <a:pPr algn="ctr"/>
-            <a:endParaRPr/>
-          </a:p>
-        </p:txBody>
-      </p:sp>
-      <p:sp>
-        <p:nvSpPr>
-          <p:cNvPr id="31" name="Rounded Rectangle 30"/>
-          <p:cNvSpPr/>
-          <p:nvPr/>
-        </p:nvSpPr>
-        <p:spPr>
-          <a:xfrm>
-            <a:off x="8366760" y="4663440"/>
-            <a:ext cx="502920" cy="457200"/>
-          </a:xfrm>
-          <a:prstGeom prst="roundRect">
-            <a:avLst>
-              <a:gd name="adj" fmla="val 8000"/>
-            </a:avLst>
-          </a:prstGeom>
-          <a:solidFill>
-            <a:srgbClr val="007073"/>
-          </a:solidFill>
-          <a:ln>
-            <a:noFill/>
-          </a:ln>
-          <a:effectLst/>
-        </p:spPr>
-        <p:style>
-          <a:lnRef idx="1">
-            <a:schemeClr val="accent1"/>
-          </a:lnRef>
-          <a:fillRef idx="3">
-            <a:schemeClr val="accent1"/>
-          </a:fillRef>
-          <a:effectRef idx="2">
-            <a:schemeClr val="accent1"/>
-          </a:effectRef>
-          <a:fontRef idx="minor">
-            <a:schemeClr val="lt1"/>
-          </a:fontRef>
-        </p:style>
-        <p:txBody>
-          <a:bodyPr rtlCol="0" anchor="ctr"/>
-          <a:lstStyle/>
-          <a:p>
-            <a:pPr algn="ctr"/>
-            <a:endParaRPr/>
-          </a:p>
-        </p:txBody>
-      </p:sp>
-      <p:sp>
-        <p:nvSpPr>
-          <p:cNvPr id="32" name="TextBox 31"/>
-          <p:cNvSpPr txBox="1"/>
-          <p:nvPr/>
-        </p:nvSpPr>
-        <p:spPr>
-          <a:xfrm>
-            <a:off x="8366760" y="4663440"/>
-            <a:ext cx="502920" cy="457200"/>
-          </a:xfrm>
-          <a:prstGeom prst="rect">
-            <a:avLst/>
-          </a:prstGeom>
-          <a:noFill/>
-        </p:spPr>
-        <p:txBody>
-          <a:bodyPr wrap="square" anchor="ctr">
-            <a:spAutoFit/>
-          </a:bodyPr>
-          <a:lstStyle/>
-          <a:p>
-            <a:pPr algn="ctr"/>
-            <a:r>
-              <a:rPr sz="1600" b="1">
-                <a:solidFill>
-                  <a:srgbClr val="FFFFFF"/>
-                </a:solidFill>
-                <a:latin typeface="Calibri"/>
-              </a:rPr>
               <a:t>6</a:t>
             </a:r>
           </a:p>
         </p:txBody>
       </p:sp>
-      <p:sp>
-        <p:nvSpPr>
-          <p:cNvPr id="33" name="TextBox 32"/>
-          <p:cNvSpPr txBox="1"/>
-          <p:nvPr/>
-        </p:nvSpPr>
-        <p:spPr>
-          <a:xfrm>
-            <a:off x="9052560" y="4023360"/>
-            <a:ext cx="2560320" cy="1874519"/>
-          </a:xfrm>
-          <a:prstGeom prst="rect">
-            <a:avLst/>
-          </a:prstGeom>
-          <a:noFill/>
-        </p:spPr>
-        <p:txBody>
-          <a:bodyPr wrap="square" anchor="ctr">
-            <a:spAutoFit/>
-          </a:bodyPr>
-          <a:lstStyle/>
-          <a:p>
-            <a:pPr algn="l"/>
-            <a:r>
-              <a:rPr sz="1800" b="1">
-                <a:solidFill>
-                  <a:srgbClr val="0F203E"/>
-                </a:solidFill>
-                <a:latin typeface="Calibri"/>
-              </a:rPr>
-              <a:t>ORDER BY</a:t>
-            </a:r>
-          </a:p>
-        </p:txBody>
-      </p:sp>
+      <p:pic>
+        <p:nvPicPr>
+          <p:cNvPr id="8" name="Picture 7">
+            <a:extLst>
+              <a:ext uri="{FF2B5EF4-FFF2-40B4-BE49-F238E27FC236}">
+                <a16:creationId xmlns:a16="http://schemas.microsoft.com/office/drawing/2014/main" id="{4C16F9C3-2AF9-BF2B-395D-A4F20C679DFE}"/>
+              </a:ext>
+            </a:extLst>
+          </p:cNvPr>
+          <p:cNvPicPr>
+            <a:picLocks noChangeAspect="1"/>
+          </p:cNvPicPr>
+          <p:nvPr/>
+        </p:nvPicPr>
+        <p:blipFill>
+          <a:blip r:embed="rId2"/>
+          <a:stretch>
+            <a:fillRect/>
+          </a:stretch>
+        </p:blipFill>
+        <p:spPr>
+          <a:xfrm>
+            <a:off x="5304377" y="219026"/>
+            <a:ext cx="3600907" cy="4725423"/>
+          </a:xfrm>
+          <a:prstGeom prst="rect">
+            <a:avLst/>
+          </a:prstGeom>
+        </p:spPr>
+      </p:pic>
+      <p:pic>
+        <p:nvPicPr>
+          <p:cNvPr id="11" name="Picture 10">
+            <a:extLst>
+              <a:ext uri="{FF2B5EF4-FFF2-40B4-BE49-F238E27FC236}">
+                <a16:creationId xmlns:a16="http://schemas.microsoft.com/office/drawing/2014/main" id="{E92683DA-EA6F-C819-E92A-3CBA29C02E70}"/>
+              </a:ext>
+            </a:extLst>
+          </p:cNvPr>
+          <p:cNvPicPr>
+            <a:picLocks noChangeAspect="1"/>
+          </p:cNvPicPr>
+          <p:nvPr/>
+        </p:nvPicPr>
+        <p:blipFill>
+          <a:blip r:embed="rId3"/>
+          <a:stretch>
+            <a:fillRect/>
+          </a:stretch>
+        </p:blipFill>
+        <p:spPr>
+          <a:xfrm>
+            <a:off x="9143028" y="1134286"/>
+            <a:ext cx="2324424" cy="2029108"/>
+          </a:xfrm>
+          <a:prstGeom prst="rect">
+            <a:avLst/>
+          </a:prstGeom>
+        </p:spPr>
+      </p:pic>
+      <p:pic>
+        <p:nvPicPr>
+          <p:cNvPr id="13" name="Picture 12">
+            <a:extLst>
+              <a:ext uri="{FF2B5EF4-FFF2-40B4-BE49-F238E27FC236}">
+                <a16:creationId xmlns:a16="http://schemas.microsoft.com/office/drawing/2014/main" id="{681862BD-C01E-F66A-1BEA-CD072A5C7B3E}"/>
+              </a:ext>
+            </a:extLst>
+          </p:cNvPr>
+          <p:cNvPicPr>
+            <a:picLocks noChangeAspect="1"/>
+          </p:cNvPicPr>
+          <p:nvPr/>
+        </p:nvPicPr>
+        <p:blipFill>
+          <a:blip r:embed="rId4"/>
+          <a:stretch>
+            <a:fillRect/>
+          </a:stretch>
+        </p:blipFill>
+        <p:spPr>
+          <a:xfrm>
+            <a:off x="9143028" y="219026"/>
+            <a:ext cx="1924319" cy="657317"/>
+          </a:xfrm>
+          <a:prstGeom prst="rect">
+            <a:avLst/>
+          </a:prstGeom>
+        </p:spPr>
+      </p:pic>
+      <p:pic>
+        <p:nvPicPr>
+          <p:cNvPr id="10" name="Picture 9">
+            <a:extLst>
+              <a:ext uri="{FF2B5EF4-FFF2-40B4-BE49-F238E27FC236}">
+                <a16:creationId xmlns:a16="http://schemas.microsoft.com/office/drawing/2014/main" id="{58AB5A32-3CFE-F25D-8853-32AA31DE173B}"/>
+              </a:ext>
+            </a:extLst>
+          </p:cNvPr>
+          <p:cNvPicPr>
+            <a:picLocks noChangeAspect="1"/>
+          </p:cNvPicPr>
+          <p:nvPr/>
+        </p:nvPicPr>
+        <p:blipFill>
+          <a:blip r:embed="rId5"/>
+          <a:stretch>
+            <a:fillRect/>
+          </a:stretch>
+        </p:blipFill>
+        <p:spPr>
+          <a:xfrm>
+            <a:off x="9122334" y="3572863"/>
+            <a:ext cx="2429586" cy="2365907"/>
+          </a:xfrm>
+          <a:prstGeom prst="rect">
+            <a:avLst/>
+          </a:prstGeom>
+        </p:spPr>
+      </p:pic>
     </p:spTree>
   </p:cSld>
   <p:clrMapOvr>
@@ -33408,14 +33894,14 @@
       </p:grpSpPr>
       <p:sp>
         <p:nvSpPr>
-          <p:cNvPr id="2" name="Rectangle 1"/>
+          <p:cNvPr id="3" name="Rectangle 2"/>
           <p:cNvSpPr/>
           <p:nvPr/>
         </p:nvSpPr>
         <p:spPr>
           <a:xfrm>
             <a:off x="0" y="0"/>
-            <a:ext cx="12191695" cy="6858000"/>
+            <a:ext cx="12191695" cy="841248"/>
           </a:xfrm>
           <a:prstGeom prst="rect">
             <a:avLst/>
@@ -33453,14 +33939,14 @@
       </p:sp>
       <p:sp>
         <p:nvSpPr>
-          <p:cNvPr id="3" name="Rectangle 2"/>
+          <p:cNvPr id="4" name="Rectangle 3"/>
           <p:cNvSpPr/>
           <p:nvPr/>
         </p:nvSpPr>
         <p:spPr>
           <a:xfrm>
-            <a:off x="0" y="0"/>
-            <a:ext cx="164592" cy="6858000"/>
+            <a:off x="0" y="841248"/>
+            <a:ext cx="12191695" cy="73152"/>
           </a:xfrm>
           <a:prstGeom prst="rect">
             <a:avLst/>
@@ -33498,14 +33984,14 @@
       </p:sp>
       <p:sp>
         <p:nvSpPr>
-          <p:cNvPr id="4" name="TextBox 3"/>
+          <p:cNvPr id="5" name="TextBox 4"/>
           <p:cNvSpPr txBox="1"/>
           <p:nvPr/>
         </p:nvSpPr>
         <p:spPr>
           <a:xfrm>
-            <a:off x="640080" y="1965960"/>
-            <a:ext cx="10972800" cy="365760"/>
+            <a:off x="365760" y="177302"/>
+            <a:ext cx="11430000" cy="523220"/>
           </a:xfrm>
           <a:prstGeom prst="rect">
             <a:avLst/>
@@ -33513,59 +33999,87 @@
           <a:noFill/>
         </p:spPr>
         <p:txBody>
-          <a:bodyPr wrap="square" anchor="t">
+          <a:bodyPr wrap="square" anchor="ctr">
             <a:spAutoFit/>
           </a:bodyPr>
           <a:lstStyle/>
           <a:p>
             <a:pPr algn="l"/>
             <a:r>
-              <a:rPr sz="1600" b="1">
-                <a:solidFill>
-                  <a:srgbClr val="C49526"/>
-                </a:solidFill>
-                <a:latin typeface="Calibri"/>
-              </a:rPr>
-              <a:t>1. PÄEV  ·  8 AK T</a:t>
-            </a:r>
-          </a:p>
-        </p:txBody>
-      </p:sp>
-      <p:sp>
-        <p:nvSpPr>
-          <p:cNvPr id="5" name="TextBox 4"/>
-          <p:cNvSpPr txBox="1"/>
-          <p:nvPr/>
-        </p:nvSpPr>
-        <p:spPr>
-          <a:xfrm>
-            <a:off x="640080" y="2377440"/>
-            <a:ext cx="10972800" cy="615553"/>
-          </a:xfrm>
-          <a:prstGeom prst="rect">
-            <a:avLst/>
-          </a:prstGeom>
-          <a:noFill/>
-        </p:spPr>
-        <p:txBody>
-          <a:bodyPr wrap="square" anchor="t">
-            <a:spAutoFit/>
-          </a:bodyPr>
-          <a:lstStyle/>
-          <a:p>
-            <a:pPr algn="l"/>
-            <a:r>
-              <a:rPr lang="en-GB" sz="3400" b="1" dirty="0" err="1">
+              <a:rPr sz="2400" b="1" dirty="0">
                 <a:solidFill>
                   <a:srgbClr val="FFFFFF"/>
                 </a:solidFill>
                 <a:latin typeface="Calibri"/>
               </a:rPr>
-              <a:t>Arvutused</a:t>
-            </a:r>
-            <a:endParaRPr sz="3400" b="1" dirty="0">
+              <a:t>COUNT — </a:t>
+            </a:r>
+            <a:r>
+              <a:rPr sz="2400" b="1" dirty="0" err="1">
+                <a:solidFill>
+                  <a:srgbClr val="FFFFFF"/>
+                </a:solidFill>
+                <a:latin typeface="Calibri"/>
+              </a:rPr>
+              <a:t>mitu</a:t>
+            </a:r>
+            <a:r>
+              <a:rPr sz="2400" b="1" dirty="0">
+                <a:solidFill>
+                  <a:srgbClr val="FFFFFF"/>
+                </a:solidFill>
+                <a:latin typeface="Calibri"/>
+              </a:rPr>
+              <a:t> </a:t>
+            </a:r>
+            <a:r>
+              <a:rPr sz="2400" b="1" dirty="0" err="1">
+                <a:solidFill>
+                  <a:srgbClr val="FFFFFF"/>
+                </a:solidFill>
+                <a:latin typeface="Calibri"/>
+              </a:rPr>
+              <a:t>rida</a:t>
+            </a:r>
+            <a:r>
+              <a:rPr sz="2400" b="1" dirty="0">
+                <a:solidFill>
+                  <a:srgbClr val="FFFFFF"/>
+                </a:solidFill>
+                <a:latin typeface="Calibri"/>
+              </a:rPr>
+              <a:t>?</a:t>
+            </a:r>
+            <a:r>
+              <a:rPr lang="en-GB" sz="2400" b="1" dirty="0">
+                <a:solidFill>
+                  <a:srgbClr val="FFFFFF"/>
+                </a:solidFill>
+                <a:latin typeface="Calibri"/>
+              </a:rPr>
+              <a:t> </a:t>
+            </a:r>
+            <a:r>
+              <a:rPr lang="en-GB" sz="2800" b="1" dirty="0">
+                <a:solidFill>
+                  <a:srgbClr val="92D050"/>
+                </a:solidFill>
+                <a:latin typeface="Calibri"/>
+              </a:rPr>
+              <a:t>NÄITAN</a:t>
+            </a:r>
+            <a:r>
+              <a:rPr sz="2800" b="1" dirty="0">
+                <a:solidFill>
+                  <a:srgbClr val="92D050"/>
+                </a:solidFill>
+                <a:latin typeface="Calibri"/>
+              </a:rPr>
+              <a:t> </a:t>
+            </a:r>
+            <a:endParaRPr sz="2400" b="1" dirty="0">
               <a:solidFill>
-                <a:srgbClr val="FFFFFF"/>
+                <a:srgbClr val="92D050"/>
               </a:solidFill>
               <a:latin typeface="Calibri"/>
             </a:endParaRPr>
@@ -33574,42 +34088,7 @@
       </p:sp>
       <p:sp>
         <p:nvSpPr>
-          <p:cNvPr id="6" name="TextBox 5"/>
-          <p:cNvSpPr txBox="1"/>
-          <p:nvPr/>
-        </p:nvSpPr>
-        <p:spPr>
-          <a:xfrm>
-            <a:off x="640080" y="3520440"/>
-            <a:ext cx="10972800" cy="640080"/>
-          </a:xfrm>
-          <a:prstGeom prst="rect">
-            <a:avLst/>
-          </a:prstGeom>
-          <a:noFill/>
-        </p:spPr>
-        <p:txBody>
-          <a:bodyPr wrap="square" anchor="t">
-            <a:spAutoFit/>
-          </a:bodyPr>
-          <a:lstStyle/>
-          <a:p>
-            <a:pPr algn="l"/>
-            <a:r>
-              <a:rPr sz="1800" b="0">
-                <a:solidFill>
-                  <a:srgbClr val="BACCE0"/>
-                </a:solidFill>
-                <a:latin typeface="Calibri"/>
-              </a:rPr>
-              <a:t>Agregaadid → GROUP BY → HAVING → CASE</a:t>
-            </a:r>
-          </a:p>
-        </p:txBody>
-      </p:sp>
-      <p:sp>
-        <p:nvSpPr>
-          <p:cNvPr id="9" name="TextBox 8"/>
+          <p:cNvPr id="8" name="TextBox 7"/>
           <p:cNvSpPr txBox="1"/>
           <p:nvPr/>
         </p:nvSpPr>
@@ -33637,101 +34116,514 @@
                 </a:solidFill>
                 <a:latin typeface="Calibri"/>
               </a:rPr>
-              <a:t>6</a:t>
-            </a:r>
-          </a:p>
-        </p:txBody>
-      </p:sp>
-      <p:pic>
-        <p:nvPicPr>
-          <p:cNvPr id="8" name="Picture 7">
-            <a:extLst>
-              <a:ext uri="{FF2B5EF4-FFF2-40B4-BE49-F238E27FC236}">
-                <a16:creationId xmlns:a16="http://schemas.microsoft.com/office/drawing/2014/main" id="{4C16F9C3-2AF9-BF2B-395D-A4F20C679DFE}"/>
-              </a:ext>
-            </a:extLst>
-          </p:cNvPr>
-          <p:cNvPicPr>
-            <a:picLocks noChangeAspect="1"/>
-          </p:cNvPicPr>
-          <p:nvPr/>
-        </p:nvPicPr>
-        <p:blipFill>
-          <a:blip r:embed="rId2"/>
-          <a:stretch>
-            <a:fillRect/>
-          </a:stretch>
-        </p:blipFill>
-        <p:spPr>
-          <a:xfrm>
-            <a:off x="4996589" y="157472"/>
-            <a:ext cx="3600907" cy="4725423"/>
-          </a:xfrm>
-          <a:prstGeom prst="rect">
-            <a:avLst/>
-          </a:prstGeom>
-        </p:spPr>
-      </p:pic>
-      <p:pic>
-        <p:nvPicPr>
-          <p:cNvPr id="11" name="Picture 10">
-            <a:extLst>
-              <a:ext uri="{FF2B5EF4-FFF2-40B4-BE49-F238E27FC236}">
-                <a16:creationId xmlns:a16="http://schemas.microsoft.com/office/drawing/2014/main" id="{E92683DA-EA6F-C819-E92A-3CBA29C02E70}"/>
-              </a:ext>
-            </a:extLst>
-          </p:cNvPr>
-          <p:cNvPicPr>
-            <a:picLocks noChangeAspect="1"/>
-          </p:cNvPicPr>
-          <p:nvPr/>
-        </p:nvPicPr>
-        <p:blipFill>
-          <a:blip r:embed="rId3"/>
-          <a:stretch>
-            <a:fillRect/>
-          </a:stretch>
-        </p:blipFill>
-        <p:spPr>
-          <a:xfrm>
-            <a:off x="9143028" y="1134286"/>
-            <a:ext cx="2324424" cy="2029108"/>
-          </a:xfrm>
-          <a:prstGeom prst="rect">
-            <a:avLst/>
-          </a:prstGeom>
-        </p:spPr>
-      </p:pic>
-      <p:pic>
-        <p:nvPicPr>
-          <p:cNvPr id="13" name="Picture 12">
-            <a:extLst>
-              <a:ext uri="{FF2B5EF4-FFF2-40B4-BE49-F238E27FC236}">
-                <a16:creationId xmlns:a16="http://schemas.microsoft.com/office/drawing/2014/main" id="{681862BD-C01E-F66A-1BEA-CD072A5C7B3E}"/>
-              </a:ext>
-            </a:extLst>
-          </p:cNvPr>
-          <p:cNvPicPr>
-            <a:picLocks noChangeAspect="1"/>
-          </p:cNvPicPr>
-          <p:nvPr/>
-        </p:nvPicPr>
-        <p:blipFill>
-          <a:blip r:embed="rId4"/>
-          <a:stretch>
-            <a:fillRect/>
-          </a:stretch>
-        </p:blipFill>
-        <p:spPr>
-          <a:xfrm>
-            <a:off x="9143028" y="219026"/>
-            <a:ext cx="1924319" cy="657317"/>
-          </a:xfrm>
-          <a:prstGeom prst="rect">
-            <a:avLst/>
-          </a:prstGeom>
-        </p:spPr>
-      </p:pic>
+              <a:t>8</a:t>
+            </a:r>
+          </a:p>
+        </p:txBody>
+      </p:sp>
+      <p:sp>
+        <p:nvSpPr>
+          <p:cNvPr id="9" name="Rounded Rectangle 8"/>
+          <p:cNvSpPr/>
+          <p:nvPr/>
+        </p:nvSpPr>
+        <p:spPr>
+          <a:xfrm>
+            <a:off x="365760" y="1097280"/>
+            <a:ext cx="11430000" cy="1783080"/>
+          </a:xfrm>
+          <a:prstGeom prst="roundRect">
+            <a:avLst>
+              <a:gd name="adj" fmla="val 8000"/>
+            </a:avLst>
+          </a:prstGeom>
+          <a:solidFill>
+            <a:srgbClr val="0F172A"/>
+          </a:solidFill>
+          <a:ln>
+            <a:noFill/>
+          </a:ln>
+          <a:effectLst/>
+        </p:spPr>
+        <p:style>
+          <a:lnRef idx="1">
+            <a:schemeClr val="accent1"/>
+          </a:lnRef>
+          <a:fillRef idx="3">
+            <a:schemeClr val="accent1"/>
+          </a:fillRef>
+          <a:effectRef idx="2">
+            <a:schemeClr val="accent1"/>
+          </a:effectRef>
+          <a:fontRef idx="minor">
+            <a:schemeClr val="lt1"/>
+          </a:fontRef>
+        </p:style>
+        <p:txBody>
+          <a:bodyPr rtlCol="0" anchor="ctr"/>
+          <a:lstStyle/>
+          <a:p>
+            <a:pPr algn="ctr"/>
+            <a:endParaRPr/>
+          </a:p>
+        </p:txBody>
+      </p:sp>
+      <p:sp>
+        <p:nvSpPr>
+          <p:cNvPr id="10" name="TextBox 9"/>
+          <p:cNvSpPr txBox="1"/>
+          <p:nvPr/>
+        </p:nvSpPr>
+        <p:spPr>
+          <a:xfrm>
+            <a:off x="530352" y="1207007"/>
+            <a:ext cx="11100816" cy="1631216"/>
+          </a:xfrm>
+          <a:prstGeom prst="rect">
+            <a:avLst/>
+          </a:prstGeom>
+          <a:noFill/>
+        </p:spPr>
+        <p:txBody>
+          <a:bodyPr wrap="square">
+            <a:spAutoFit/>
+          </a:bodyPr>
+          <a:lstStyle/>
+          <a:p>
+            <a:pPr>
+              <a:spcAft>
+                <a:spcPts val="300"/>
+              </a:spcAft>
+            </a:pPr>
+            <a:r>
+              <a:rPr lang="en-GB" sz="1800" b="0" dirty="0">
+                <a:solidFill>
+                  <a:srgbClr val="E2E8F0"/>
+                </a:solidFill>
+                <a:latin typeface="Consolas"/>
+              </a:rPr>
+              <a:t>SELECT * FROM tooted;</a:t>
+            </a:r>
+          </a:p>
+          <a:p>
+            <a:pPr>
+              <a:spcAft>
+                <a:spcPts val="300"/>
+              </a:spcAft>
+            </a:pPr>
+            <a:endParaRPr lang="en-GB" sz="1800" b="0" dirty="0">
+              <a:solidFill>
+                <a:srgbClr val="E2E8F0"/>
+              </a:solidFill>
+              <a:latin typeface="Consolas"/>
+            </a:endParaRPr>
+          </a:p>
+          <a:p>
+            <a:pPr>
+              <a:spcAft>
+                <a:spcPts val="300"/>
+              </a:spcAft>
+            </a:pPr>
+            <a:r>
+              <a:rPr lang="en-GB" sz="1800" b="0" dirty="0">
+                <a:solidFill>
+                  <a:srgbClr val="E2E8F0"/>
+                </a:solidFill>
+                <a:latin typeface="Consolas"/>
+              </a:rPr>
+              <a:t>--Kui </a:t>
+            </a:r>
+            <a:r>
+              <a:rPr lang="en-GB" sz="1800" b="0" dirty="0" err="1">
+                <a:solidFill>
+                  <a:srgbClr val="E2E8F0"/>
+                </a:solidFill>
+                <a:latin typeface="Consolas"/>
+              </a:rPr>
+              <a:t>palju</a:t>
+            </a:r>
+            <a:r>
+              <a:rPr lang="en-GB" sz="1800" b="0" dirty="0">
+                <a:solidFill>
+                  <a:srgbClr val="E2E8F0"/>
+                </a:solidFill>
+                <a:latin typeface="Consolas"/>
+              </a:rPr>
+              <a:t> on </a:t>
+            </a:r>
+            <a:r>
+              <a:rPr lang="en-GB" sz="1800" b="0" dirty="0" err="1">
+                <a:solidFill>
+                  <a:srgbClr val="E2E8F0"/>
+                </a:solidFill>
+                <a:latin typeface="Consolas"/>
+              </a:rPr>
+              <a:t>tooteid</a:t>
+            </a:r>
+            <a:r>
+              <a:rPr lang="en-GB" sz="1800" b="0" dirty="0">
+                <a:solidFill>
+                  <a:srgbClr val="E2E8F0"/>
+                </a:solidFill>
+                <a:latin typeface="Consolas"/>
+              </a:rPr>
+              <a:t> </a:t>
+            </a:r>
+            <a:r>
+              <a:rPr lang="en-GB" sz="1800" b="0" dirty="0" err="1">
+                <a:solidFill>
+                  <a:srgbClr val="E2E8F0"/>
+                </a:solidFill>
+                <a:latin typeface="Consolas"/>
+              </a:rPr>
+              <a:t>kokku</a:t>
+            </a:r>
+            <a:r>
+              <a:rPr lang="en-GB" sz="1800" b="0" dirty="0">
+                <a:solidFill>
+                  <a:srgbClr val="E2E8F0"/>
+                </a:solidFill>
+                <a:latin typeface="Consolas"/>
+              </a:rPr>
+              <a:t>?</a:t>
+            </a:r>
+          </a:p>
+          <a:p>
+            <a:pPr>
+              <a:spcAft>
+                <a:spcPts val="300"/>
+              </a:spcAft>
+            </a:pPr>
+            <a:r>
+              <a:rPr sz="1800" b="0" dirty="0">
+                <a:solidFill>
+                  <a:srgbClr val="E2E8F0"/>
+                </a:solidFill>
+                <a:latin typeface="Consolas"/>
+              </a:rPr>
+              <a:t>SELECT COUNT(*) AS </a:t>
+            </a:r>
+            <a:r>
+              <a:rPr sz="1800" b="0" dirty="0" err="1">
+                <a:solidFill>
+                  <a:srgbClr val="E2E8F0"/>
+                </a:solidFill>
+                <a:latin typeface="Consolas"/>
+              </a:rPr>
+              <a:t>toodete_koguarv</a:t>
+            </a:r>
+            <a:endParaRPr sz="1800" b="0" dirty="0">
+              <a:solidFill>
+                <a:srgbClr val="E2E8F0"/>
+              </a:solidFill>
+              <a:latin typeface="Consolas"/>
+            </a:endParaRPr>
+          </a:p>
+          <a:p>
+            <a:pPr>
+              <a:spcAft>
+                <a:spcPts val="300"/>
+              </a:spcAft>
+            </a:pPr>
+            <a:r>
+              <a:rPr sz="1800" b="0" dirty="0">
+                <a:solidFill>
+                  <a:srgbClr val="E2E8F0"/>
+                </a:solidFill>
+                <a:latin typeface="Consolas"/>
+              </a:rPr>
+              <a:t>FROM tooted;</a:t>
+            </a:r>
+          </a:p>
+        </p:txBody>
+      </p:sp>
+      <p:sp>
+        <p:nvSpPr>
+          <p:cNvPr id="11" name="TextBox 10"/>
+          <p:cNvSpPr txBox="1"/>
+          <p:nvPr/>
+        </p:nvSpPr>
+        <p:spPr>
+          <a:xfrm>
+            <a:off x="457200" y="2880360"/>
+            <a:ext cx="11247120" cy="1107996"/>
+          </a:xfrm>
+          <a:prstGeom prst="rect">
+            <a:avLst/>
+          </a:prstGeom>
+          <a:noFill/>
+        </p:spPr>
+        <p:txBody>
+          <a:bodyPr wrap="square">
+            <a:spAutoFit/>
+          </a:bodyPr>
+          <a:lstStyle/>
+          <a:p>
+            <a:pPr>
+              <a:spcAft>
+                <a:spcPts val="900"/>
+              </a:spcAft>
+            </a:pPr>
+            <a:r>
+              <a:rPr sz="1700" b="0" dirty="0">
+                <a:solidFill>
+                  <a:srgbClr val="334155"/>
+                </a:solidFill>
+                <a:latin typeface="Calibri"/>
+              </a:rPr>
+              <a:t>•  COUNT(*) </a:t>
+            </a:r>
+            <a:r>
+              <a:rPr sz="1700" b="0" dirty="0" err="1">
+                <a:solidFill>
+                  <a:srgbClr val="334155"/>
+                </a:solidFill>
+                <a:latin typeface="Calibri"/>
+              </a:rPr>
+              <a:t>loendab</a:t>
+            </a:r>
+            <a:r>
+              <a:rPr sz="1700" b="0" dirty="0">
+                <a:solidFill>
+                  <a:srgbClr val="334155"/>
+                </a:solidFill>
+                <a:latin typeface="Calibri"/>
+              </a:rPr>
+              <a:t> read. </a:t>
+            </a:r>
+            <a:r>
+              <a:rPr sz="1700" b="0" dirty="0" err="1">
+                <a:solidFill>
+                  <a:srgbClr val="334155"/>
+                </a:solidFill>
+                <a:latin typeface="Calibri"/>
+              </a:rPr>
+              <a:t>Kataloogis</a:t>
+            </a:r>
+            <a:r>
+              <a:rPr sz="1700" b="0" dirty="0">
+                <a:solidFill>
+                  <a:srgbClr val="334155"/>
+                </a:solidFill>
+                <a:latin typeface="Calibri"/>
+              </a:rPr>
+              <a:t> on 15 </a:t>
+            </a:r>
+            <a:r>
+              <a:rPr sz="1700" b="0" dirty="0" err="1">
+                <a:solidFill>
+                  <a:srgbClr val="334155"/>
+                </a:solidFill>
+                <a:latin typeface="Calibri"/>
+              </a:rPr>
+              <a:t>toodet</a:t>
+            </a:r>
+            <a:r>
+              <a:rPr sz="1700" b="0" dirty="0">
+                <a:solidFill>
+                  <a:srgbClr val="334155"/>
+                </a:solidFill>
+                <a:latin typeface="Calibri"/>
+              </a:rPr>
+              <a:t> → </a:t>
+            </a:r>
+            <a:r>
+              <a:rPr sz="1700" b="0" dirty="0" err="1">
+                <a:solidFill>
+                  <a:srgbClr val="334155"/>
+                </a:solidFill>
+                <a:latin typeface="Calibri"/>
+              </a:rPr>
+              <a:t>tulemus</a:t>
+            </a:r>
+            <a:r>
+              <a:rPr sz="1700" b="0" dirty="0">
+                <a:solidFill>
+                  <a:srgbClr val="334155"/>
+                </a:solidFill>
+                <a:latin typeface="Calibri"/>
+              </a:rPr>
+              <a:t> 15.</a:t>
+            </a:r>
+          </a:p>
+          <a:p>
+            <a:pPr>
+              <a:spcAft>
+                <a:spcPts val="900"/>
+              </a:spcAft>
+            </a:pPr>
+            <a:r>
+              <a:rPr sz="1700" b="0" dirty="0">
+                <a:solidFill>
+                  <a:srgbClr val="334155"/>
+                </a:solidFill>
+                <a:latin typeface="Calibri"/>
+              </a:rPr>
+              <a:t>•  AS </a:t>
+            </a:r>
+            <a:r>
+              <a:rPr sz="1700" b="0" dirty="0" err="1">
+                <a:solidFill>
+                  <a:srgbClr val="334155"/>
+                </a:solidFill>
+                <a:latin typeface="Calibri"/>
+              </a:rPr>
+              <a:t>paneb</a:t>
+            </a:r>
+            <a:r>
+              <a:rPr sz="1700" b="0" dirty="0">
+                <a:solidFill>
+                  <a:srgbClr val="334155"/>
+                </a:solidFill>
+                <a:latin typeface="Calibri"/>
+              </a:rPr>
+              <a:t> </a:t>
+            </a:r>
+            <a:r>
+              <a:rPr sz="1700" b="0" dirty="0" err="1">
+                <a:solidFill>
+                  <a:srgbClr val="334155"/>
+                </a:solidFill>
+                <a:latin typeface="Calibri"/>
+              </a:rPr>
+              <a:t>veerule</a:t>
+            </a:r>
+            <a:r>
+              <a:rPr sz="1700" b="0" dirty="0">
+                <a:solidFill>
+                  <a:srgbClr val="334155"/>
+                </a:solidFill>
+                <a:latin typeface="Calibri"/>
+              </a:rPr>
+              <a:t> </a:t>
+            </a:r>
+            <a:r>
+              <a:rPr sz="1700" b="0" dirty="0" err="1">
+                <a:solidFill>
+                  <a:srgbClr val="334155"/>
+                </a:solidFill>
+                <a:latin typeface="Calibri"/>
+              </a:rPr>
+              <a:t>loetava</a:t>
+            </a:r>
+            <a:r>
+              <a:rPr sz="1700" b="0" dirty="0">
+                <a:solidFill>
+                  <a:srgbClr val="334155"/>
+                </a:solidFill>
+                <a:latin typeface="Calibri"/>
+              </a:rPr>
+              <a:t> </a:t>
+            </a:r>
+            <a:r>
+              <a:rPr sz="1700" b="0" dirty="0" err="1">
+                <a:solidFill>
+                  <a:srgbClr val="334155"/>
+                </a:solidFill>
+                <a:latin typeface="Calibri"/>
+              </a:rPr>
+              <a:t>nime</a:t>
+            </a:r>
+            <a:r>
+              <a:rPr sz="1700" b="0" dirty="0">
+                <a:solidFill>
+                  <a:srgbClr val="334155"/>
+                </a:solidFill>
+                <a:latin typeface="Calibri"/>
+              </a:rPr>
+              <a:t>.</a:t>
+            </a:r>
+          </a:p>
+          <a:p>
+            <a:pPr>
+              <a:spcAft>
+                <a:spcPts val="900"/>
+              </a:spcAft>
+            </a:pPr>
+            <a:r>
+              <a:rPr sz="1700" b="0" dirty="0">
+                <a:solidFill>
+                  <a:srgbClr val="334155"/>
+                </a:solidFill>
+                <a:latin typeface="Calibri"/>
+              </a:rPr>
+              <a:t>•  COUNT(hind) </a:t>
+            </a:r>
+            <a:r>
+              <a:rPr sz="1700" b="0" dirty="0" err="1">
+                <a:solidFill>
+                  <a:srgbClr val="334155"/>
+                </a:solidFill>
+                <a:latin typeface="Calibri"/>
+              </a:rPr>
+              <a:t>jätab</a:t>
+            </a:r>
+            <a:r>
+              <a:rPr sz="1700" b="0" dirty="0">
+                <a:solidFill>
+                  <a:srgbClr val="334155"/>
+                </a:solidFill>
+                <a:latin typeface="Calibri"/>
+              </a:rPr>
+              <a:t> </a:t>
+            </a:r>
+            <a:r>
+              <a:rPr sz="1700" b="0" dirty="0" err="1">
+                <a:solidFill>
+                  <a:srgbClr val="334155"/>
+                </a:solidFill>
+                <a:latin typeface="Calibri"/>
+              </a:rPr>
+              <a:t>vahele</a:t>
+            </a:r>
+            <a:r>
+              <a:rPr sz="1700" b="0" dirty="0">
+                <a:solidFill>
+                  <a:srgbClr val="334155"/>
+                </a:solidFill>
+                <a:latin typeface="Calibri"/>
+              </a:rPr>
+              <a:t> NULL-id; COUNT(*) </a:t>
+            </a:r>
+            <a:r>
+              <a:rPr sz="1700" b="0" dirty="0" err="1">
+                <a:solidFill>
+                  <a:srgbClr val="334155"/>
+                </a:solidFill>
+                <a:latin typeface="Calibri"/>
+              </a:rPr>
+              <a:t>loendab</a:t>
+            </a:r>
+            <a:r>
+              <a:rPr sz="1700" b="0" dirty="0">
+                <a:solidFill>
+                  <a:srgbClr val="334155"/>
+                </a:solidFill>
+                <a:latin typeface="Calibri"/>
+              </a:rPr>
+              <a:t> ka </a:t>
+            </a:r>
+            <a:r>
+              <a:rPr sz="1700" b="0" dirty="0" err="1">
+                <a:solidFill>
+                  <a:srgbClr val="334155"/>
+                </a:solidFill>
+                <a:latin typeface="Calibri"/>
+              </a:rPr>
+              <a:t>tühjad</a:t>
+            </a:r>
+            <a:r>
+              <a:rPr sz="1700" b="0" dirty="0">
+                <a:solidFill>
+                  <a:srgbClr val="334155"/>
+                </a:solidFill>
+                <a:latin typeface="Calibri"/>
+              </a:rPr>
+              <a:t>.</a:t>
+            </a:r>
+          </a:p>
+        </p:txBody>
+      </p:sp>
     </p:spTree>
   </p:cSld>
   <p:clrMapOvr>
@@ -33855,8 +34747,8 @@
         </p:nvSpPr>
         <p:spPr>
           <a:xfrm>
-            <a:off x="365760" y="177302"/>
-            <a:ext cx="11430000" cy="523220"/>
+            <a:off x="365760" y="208079"/>
+            <a:ext cx="11430000" cy="461665"/>
           </a:xfrm>
           <a:prstGeom prst="rect">
             <a:avLst/>
@@ -33869,7 +34761,6 @@
           </a:bodyPr>
           <a:lstStyle/>
           <a:p>
-            <a:pPr algn="l"/>
             <a:r>
               <a:rPr sz="2400" b="1" dirty="0">
                 <a:solidFill>
@@ -33877,74 +34768,19 @@
                 </a:solidFill>
                 <a:latin typeface="Calibri"/>
               </a:rPr>
-              <a:t>COUNT — </a:t>
-            </a:r>
-            <a:r>
-              <a:rPr sz="2400" b="1" dirty="0" err="1">
-                <a:solidFill>
-                  <a:srgbClr val="FFFFFF"/>
-                </a:solidFill>
-                <a:latin typeface="Calibri"/>
-              </a:rPr>
-              <a:t>mitu</a:t>
-            </a:r>
-            <a:r>
-              <a:rPr sz="2400" b="1" dirty="0">
-                <a:solidFill>
-                  <a:srgbClr val="FFFFFF"/>
-                </a:solidFill>
-                <a:latin typeface="Calibri"/>
-              </a:rPr>
-              <a:t> </a:t>
-            </a:r>
-            <a:r>
-              <a:rPr sz="2400" b="1" dirty="0" err="1">
-                <a:solidFill>
-                  <a:srgbClr val="FFFFFF"/>
-                </a:solidFill>
-                <a:latin typeface="Calibri"/>
-              </a:rPr>
-              <a:t>rida</a:t>
-            </a:r>
-            <a:r>
-              <a:rPr sz="2400" b="1" dirty="0">
-                <a:solidFill>
-                  <a:srgbClr val="FFFFFF"/>
-                </a:solidFill>
-                <a:latin typeface="Calibri"/>
-              </a:rPr>
-              <a:t>?</a:t>
+              <a:t>COUNT + WHERE </a:t>
             </a:r>
             <a:r>
               <a:rPr lang="en-GB" sz="2400" b="1" dirty="0">
                 <a:solidFill>
-                  <a:srgbClr val="FFFFFF"/>
-                </a:solidFill>
-                <a:latin typeface="Calibri"/>
-              </a:rPr>
-              <a:t> </a:t>
-            </a:r>
-            <a:r>
-              <a:rPr lang="en-GB" sz="2800" b="1" dirty="0">
-                <a:solidFill>
                   <a:srgbClr val="92D050"/>
                 </a:solidFill>
-                <a:latin typeface="Calibri"/>
-              </a:rPr>
-              <a:t>NÄITAN</a:t>
-            </a:r>
-            <a:r>
-              <a:rPr sz="2800" b="1" dirty="0">
-                <a:solidFill>
-                  <a:srgbClr val="92D050"/>
-                </a:solidFill>
-                <a:latin typeface="Calibri"/>
-              </a:rPr>
-              <a:t> </a:t>
+              </a:rPr>
+              <a:t>NÄITAN </a:t>
             </a:r>
             <a:endParaRPr sz="2400" b="1" dirty="0">
               <a:solidFill>
-                <a:srgbClr val="92D050"/>
+                <a:srgbClr val="FFFFFF"/>
               </a:solidFill>
               <a:latin typeface="Calibri"/>
             </a:endParaRPr>
@@ -33981,7 +34817,7 @@
                 </a:solidFill>
                 <a:latin typeface="Calibri"/>
               </a:rPr>
-              <a:t>8</a:t>
+              <a:t>9</a:t>
             </a:r>
           </a:p>
         </p:txBody>
@@ -33995,7 +34831,7 @@
         <p:spPr>
           <a:xfrm>
             <a:off x="365760" y="1097280"/>
-            <a:ext cx="11430000" cy="1783080"/>
+            <a:ext cx="11430000" cy="2103120"/>
           </a:xfrm>
           <a:prstGeom prst="roundRect">
             <a:avLst>
@@ -34042,7 +34878,7 @@
         <p:spPr>
           <a:xfrm>
             <a:off x="530352" y="1207007"/>
-            <a:ext cx="11100816" cy="1631216"/>
+            <a:ext cx="11100816" cy="1854354"/>
           </a:xfrm>
           <a:prstGeom prst="rect">
             <a:avLst/>
@@ -34061,13 +34897,49 @@
               </a:spcAft>
             </a:pPr>
             <a:r>
-              <a:rPr lang="en-GB" sz="1800" b="0" dirty="0">
-                <a:solidFill>
-                  <a:srgbClr val="E2E8F0"/>
-                </a:solidFill>
-                <a:latin typeface="Consolas"/>
-              </a:rPr>
-              <a:t>SELECT * FROM tooted;</a:t>
+              <a:rPr lang="en-GB" sz="1700" b="0" dirty="0">
+                <a:solidFill>
+                  <a:srgbClr val="E2E8F0"/>
+                </a:solidFill>
+                <a:latin typeface="Consolas"/>
+              </a:rPr>
+              <a:t>--Mitu </a:t>
+            </a:r>
+            <a:r>
+              <a:rPr lang="en-GB" sz="1700" b="0" dirty="0" err="1">
+                <a:solidFill>
+                  <a:srgbClr val="E2E8F0"/>
+                </a:solidFill>
+                <a:latin typeface="Consolas"/>
+              </a:rPr>
+              <a:t>tellimust</a:t>
+            </a:r>
+            <a:r>
+              <a:rPr lang="en-GB" sz="1700" b="0" dirty="0">
+                <a:solidFill>
+                  <a:srgbClr val="E2E8F0"/>
+                </a:solidFill>
+                <a:latin typeface="Consolas"/>
+              </a:rPr>
+              <a:t> on </a:t>
+            </a:r>
+            <a:r>
+              <a:rPr lang="en-GB" sz="1700" b="0" dirty="0" err="1">
+                <a:solidFill>
+                  <a:srgbClr val="E2E8F0"/>
+                </a:solidFill>
+                <a:latin typeface="Consolas"/>
+              </a:rPr>
+              <a:t>ootel</a:t>
+            </a:r>
+            <a:r>
+              <a:rPr lang="en-GB" sz="1700" b="0" dirty="0">
+                <a:solidFill>
+                  <a:srgbClr val="E2E8F0"/>
+                </a:solidFill>
+                <a:latin typeface="Consolas"/>
+              </a:rPr>
+              <a:t>?</a:t>
             </a:r>
           </a:p>
           <a:p>
@@ -34076,7 +34948,7 @@
                 <a:spcPts val="300"/>
               </a:spcAft>
             </a:pPr>
-            <a:endParaRPr lang="en-GB" sz="1800" b="0" dirty="0">
+            <a:endParaRPr lang="en-GB" sz="1700" b="0" dirty="0">
               <a:solidFill>
                 <a:srgbClr val="E2E8F0"/>
               </a:solidFill>
@@ -34090,68 +34962,20 @@
               </a:spcAft>
             </a:pPr>
             <a:r>
-              <a:rPr lang="en-GB" sz="1800" b="0" dirty="0">
-                <a:solidFill>
-                  <a:srgbClr val="E2E8F0"/>
-                </a:solidFill>
-                <a:latin typeface="Consolas"/>
-              </a:rPr>
-              <a:t>--Kui </a:t>
-            </a:r>
-            <a:r>
-              <a:rPr lang="en-GB" sz="1800" b="0" dirty="0" err="1">
-                <a:solidFill>
-                  <a:srgbClr val="E2E8F0"/>
-                </a:solidFill>
-                <a:latin typeface="Consolas"/>
-              </a:rPr>
-              <a:t>palju</a:t>
-            </a:r>
-            <a:r>
-              <a:rPr lang="en-GB" sz="1800" b="0" dirty="0">
-                <a:solidFill>
-                  <a:srgbClr val="E2E8F0"/>
-                </a:solidFill>
-                <a:latin typeface="Consolas"/>
-              </a:rPr>
-              <a:t> on </a:t>
-            </a:r>
-            <a:r>
-              <a:rPr lang="en-GB" sz="1800" b="0" dirty="0" err="1">
-                <a:solidFill>
-                  <a:srgbClr val="E2E8F0"/>
-                </a:solidFill>
-                <a:latin typeface="Consolas"/>
-              </a:rPr>
-              <a:t>tooteid</a:t>
-            </a:r>
-            <a:r>
-              <a:rPr lang="en-GB" sz="1800" b="0" dirty="0">
-                <a:solidFill>
-                  <a:srgbClr val="E2E8F0"/>
-                </a:solidFill>
-                <a:latin typeface="Consolas"/>
-              </a:rPr>
-              <a:t> </a:t>
-            </a:r>
-            <a:r>
-              <a:rPr lang="en-GB" sz="1800" b="0" dirty="0" err="1">
-                <a:solidFill>
-                  <a:srgbClr val="E2E8F0"/>
-                </a:solidFill>
-                <a:latin typeface="Consolas"/>
-              </a:rPr>
-              <a:t>kokku</a:t>
-            </a:r>
-            <a:r>
-              <a:rPr lang="en-GB" sz="1800" b="0" dirty="0">
-                <a:solidFill>
-                  <a:srgbClr val="E2E8F0"/>
-                </a:solidFill>
-                <a:latin typeface="Consolas"/>
-              </a:rPr>
-              <a:t>?</a:t>
-            </a:r>
+              <a:rPr sz="1700" b="0" dirty="0">
+                <a:solidFill>
+                  <a:srgbClr val="E2E8F0"/>
+                </a:solidFill>
+                <a:latin typeface="Consolas"/>
+              </a:rPr>
+              <a:t>SELECT </a:t>
+            </a:r>
+            <a:endParaRPr lang="en-GB" sz="1700" b="0" dirty="0">
+              <a:solidFill>
+                <a:srgbClr val="E2E8F0"/>
+              </a:solidFill>
+              <a:latin typeface="Consolas"/>
+            </a:endParaRPr>
           </a:p>
           <a:p>
             <a:pPr>
@@ -34160,24 +34984,33 @@
               </a:spcAft>
             </a:pPr>
             <a:r>
-              <a:rPr sz="1800" b="0" dirty="0">
-                <a:solidFill>
-                  <a:srgbClr val="E2E8F0"/>
-                </a:solidFill>
-                <a:latin typeface="Consolas"/>
-              </a:rPr>
-              <a:t>SELECT COUNT(*) AS </a:t>
-            </a:r>
-            <a:r>
-              <a:rPr sz="1800" b="0" dirty="0" err="1">
-                <a:solidFill>
-                  <a:srgbClr val="E2E8F0"/>
-                </a:solidFill>
-                <a:latin typeface="Consolas"/>
-              </a:rPr>
-              <a:t>toodete_koguarv</a:t>
-            </a:r>
-            <a:endParaRPr sz="1800" b="0" dirty="0">
+              <a:rPr lang="en-GB" sz="1700" dirty="0">
+                <a:solidFill>
+                  <a:srgbClr val="E2E8F0"/>
+                </a:solidFill>
+                <a:latin typeface="Consolas"/>
+              </a:rPr>
+              <a:t>	</a:t>
+            </a:r>
+            <a:r>
+              <a:rPr sz="1700" b="0" dirty="0">
+                <a:solidFill>
+                  <a:srgbClr val="E2E8F0"/>
+                </a:solidFill>
+                <a:latin typeface="Consolas"/>
+              </a:rPr>
+              <a:t>COUNT(*) AS </a:t>
+            </a:r>
+            <a:r>
+              <a:rPr sz="1700" b="0" dirty="0" err="1">
+                <a:solidFill>
+                  <a:srgbClr val="E2E8F0"/>
+                </a:solidFill>
+                <a:latin typeface="Consolas"/>
+              </a:rPr>
+              <a:t>ootel_arv</a:t>
+            </a:r>
+            <a:endParaRPr sz="1700" b="0" dirty="0">
               <a:solidFill>
                 <a:srgbClr val="E2E8F0"/>
               </a:solidFill>
@@ -34191,13 +35024,80 @@
               </a:spcAft>
             </a:pPr>
             <a:r>
-              <a:rPr sz="1800" b="0" dirty="0">
-                <a:solidFill>
-                  <a:srgbClr val="E2E8F0"/>
-                </a:solidFill>
-                <a:latin typeface="Consolas"/>
-              </a:rPr>
-              <a:t>FROM tooted;</a:t>
+              <a:rPr sz="1700" b="0" dirty="0">
+                <a:solidFill>
+                  <a:srgbClr val="E2E8F0"/>
+                </a:solidFill>
+                <a:latin typeface="Consolas"/>
+              </a:rPr>
+              <a:t>FROM </a:t>
+            </a:r>
+            <a:r>
+              <a:rPr sz="1700" b="0" dirty="0" err="1">
+                <a:solidFill>
+                  <a:srgbClr val="E2E8F0"/>
+                </a:solidFill>
+                <a:latin typeface="Consolas"/>
+              </a:rPr>
+              <a:t>tellimused</a:t>
+            </a:r>
+            <a:endParaRPr sz="1700" b="0" dirty="0">
+              <a:solidFill>
+                <a:srgbClr val="E2E8F0"/>
+              </a:solidFill>
+              <a:latin typeface="Consolas"/>
+            </a:endParaRPr>
+          </a:p>
+          <a:p>
+            <a:pPr>
+              <a:spcAft>
+                <a:spcPts val="300"/>
+              </a:spcAft>
+            </a:pPr>
+            <a:r>
+              <a:rPr sz="1700" b="0" dirty="0">
+                <a:solidFill>
+                  <a:srgbClr val="E2E8F0"/>
+                </a:solidFill>
+                <a:latin typeface="Consolas"/>
+              </a:rPr>
+              <a:t>WHERE </a:t>
+            </a:r>
+            <a:r>
+              <a:rPr sz="1700" b="0" dirty="0" err="1">
+                <a:solidFill>
+                  <a:srgbClr val="E2E8F0"/>
+                </a:solidFill>
+                <a:latin typeface="Consolas"/>
+              </a:rPr>
+              <a:t>staatus</a:t>
+            </a:r>
+            <a:r>
+              <a:rPr sz="1700" b="0" dirty="0">
+                <a:solidFill>
+                  <a:srgbClr val="E2E8F0"/>
+                </a:solidFill>
+                <a:latin typeface="Consolas"/>
+              </a:rPr>
+              <a:t> = '</a:t>
+            </a:r>
+            <a:r>
+              <a:rPr sz="1700" b="0" dirty="0" err="1">
+                <a:solidFill>
+                  <a:srgbClr val="E2E8F0"/>
+                </a:solidFill>
+                <a:latin typeface="Consolas"/>
+              </a:rPr>
+              <a:t>Ootel</a:t>
+            </a:r>
+            <a:r>
+              <a:rPr sz="1700" b="0" dirty="0">
+                <a:solidFill>
+                  <a:srgbClr val="E2E8F0"/>
+                </a:solidFill>
+                <a:latin typeface="Consolas"/>
+              </a:rPr>
+              <a:t>';</a:t>
             </a:r>
           </a:p>
         </p:txBody>
@@ -34210,8 +35110,131 @@
         </p:nvSpPr>
         <p:spPr>
           <a:xfrm>
-            <a:off x="457200" y="2880360"/>
-            <a:ext cx="11247120" cy="1107996"/>
+            <a:off x="457200" y="3429000"/>
+            <a:ext cx="11247120" cy="615553"/>
+          </a:xfrm>
+          <a:prstGeom prst="rect">
+            <a:avLst/>
+          </a:prstGeom>
+          <a:noFill/>
+        </p:spPr>
+        <p:txBody>
+          <a:bodyPr wrap="square" anchor="t">
+            <a:spAutoFit/>
+          </a:bodyPr>
+          <a:lstStyle/>
+          <a:p>
+            <a:pPr algn="l"/>
+            <a:r>
+              <a:rPr sz="1700" b="0" dirty="0" err="1">
+                <a:solidFill>
+                  <a:srgbClr val="334155"/>
+                </a:solidFill>
+                <a:latin typeface="Calibri"/>
+              </a:rPr>
+              <a:t>Kõigepealt</a:t>
+            </a:r>
+            <a:r>
+              <a:rPr sz="1700" b="0" dirty="0">
+                <a:solidFill>
+                  <a:srgbClr val="334155"/>
+                </a:solidFill>
+                <a:latin typeface="Calibri"/>
+              </a:rPr>
+              <a:t> WHERE </a:t>
+            </a:r>
+            <a:r>
+              <a:rPr sz="1700" b="0" dirty="0" err="1">
+                <a:solidFill>
+                  <a:srgbClr val="334155"/>
+                </a:solidFill>
+                <a:latin typeface="Calibri"/>
+              </a:rPr>
+              <a:t>jätab</a:t>
+            </a:r>
+            <a:r>
+              <a:rPr sz="1700" b="0" dirty="0">
+                <a:solidFill>
+                  <a:srgbClr val="334155"/>
+                </a:solidFill>
+                <a:latin typeface="Calibri"/>
+              </a:rPr>
+              <a:t> read, </a:t>
+            </a:r>
+            <a:r>
+              <a:rPr sz="1700" b="0" dirty="0" err="1">
+                <a:solidFill>
+                  <a:srgbClr val="334155"/>
+                </a:solidFill>
+                <a:latin typeface="Calibri"/>
+              </a:rPr>
+              <a:t>siis</a:t>
+            </a:r>
+            <a:r>
+              <a:rPr sz="1700" b="0" dirty="0">
+                <a:solidFill>
+                  <a:srgbClr val="334155"/>
+                </a:solidFill>
+                <a:latin typeface="Calibri"/>
+              </a:rPr>
+              <a:t> COUNT </a:t>
+            </a:r>
+            <a:r>
+              <a:rPr sz="1700" b="0" dirty="0" err="1">
+                <a:solidFill>
+                  <a:srgbClr val="334155"/>
+                </a:solidFill>
+                <a:latin typeface="Calibri"/>
+              </a:rPr>
+              <a:t>loendab</a:t>
+            </a:r>
+            <a:r>
+              <a:rPr sz="1700" b="0" dirty="0">
+                <a:solidFill>
+                  <a:srgbClr val="334155"/>
+                </a:solidFill>
+                <a:latin typeface="Calibri"/>
+              </a:rPr>
+              <a:t> </a:t>
+            </a:r>
+            <a:r>
+              <a:rPr sz="1700" b="0" dirty="0" err="1">
+                <a:solidFill>
+                  <a:srgbClr val="334155"/>
+                </a:solidFill>
+                <a:latin typeface="Calibri"/>
+              </a:rPr>
+              <a:t>allesjäänud</a:t>
+            </a:r>
+            <a:r>
+              <a:rPr sz="1700" b="0" dirty="0">
+                <a:solidFill>
+                  <a:srgbClr val="334155"/>
+                </a:solidFill>
+                <a:latin typeface="Calibri"/>
+              </a:rPr>
+              <a:t>.
+</a:t>
+            </a:r>
+          </a:p>
+        </p:txBody>
+      </p:sp>
+      <p:sp>
+        <p:nvSpPr>
+          <p:cNvPr id="6" name="TextBox 5">
+            <a:extLst>
+              <a:ext uri="{FF2B5EF4-FFF2-40B4-BE49-F238E27FC236}">
+                <a16:creationId xmlns:a16="http://schemas.microsoft.com/office/drawing/2014/main" id="{60F7C9AE-4A3A-AB53-29CD-A61845F65937}"/>
+              </a:ext>
+            </a:extLst>
+          </p:cNvPr>
+          <p:cNvSpPr txBox="1"/>
+          <p:nvPr/>
+        </p:nvSpPr>
+        <p:spPr>
+          <a:xfrm>
+            <a:off x="530352" y="4314403"/>
+            <a:ext cx="6094476" cy="1254189"/>
           </a:xfrm>
           <a:prstGeom prst="rect">
             <a:avLst/>
@@ -34226,265 +35249,194 @@
           <a:p>
             <a:pPr>
               <a:spcAft>
-                <a:spcPts val="900"/>
+                <a:spcPts val="300"/>
               </a:spcAft>
             </a:pPr>
             <a:r>
-              <a:rPr sz="1700" b="0" dirty="0">
-                <a:solidFill>
-                  <a:srgbClr val="334155"/>
-                </a:solidFill>
-                <a:latin typeface="Calibri"/>
-              </a:rPr>
-              <a:t>•  COUNT(*) </a:t>
-            </a:r>
-            <a:r>
-              <a:rPr sz="1700" b="0" dirty="0" err="1">
-                <a:solidFill>
-                  <a:srgbClr val="334155"/>
-                </a:solidFill>
-                <a:latin typeface="Calibri"/>
-              </a:rPr>
-              <a:t>loendab</a:t>
-            </a:r>
-            <a:r>
-              <a:rPr sz="1700" b="0" dirty="0">
-                <a:solidFill>
-                  <a:srgbClr val="334155"/>
-                </a:solidFill>
-                <a:latin typeface="Calibri"/>
-              </a:rPr>
-              <a:t> read. </a:t>
-            </a:r>
-            <a:r>
-              <a:rPr sz="1700" b="0" dirty="0" err="1">
-                <a:solidFill>
-                  <a:srgbClr val="334155"/>
-                </a:solidFill>
-                <a:latin typeface="Calibri"/>
-              </a:rPr>
-              <a:t>Kataloogis</a:t>
-            </a:r>
-            <a:r>
-              <a:rPr sz="1700" b="0" dirty="0">
-                <a:solidFill>
-                  <a:srgbClr val="334155"/>
-                </a:solidFill>
-                <a:latin typeface="Calibri"/>
-              </a:rPr>
-              <a:t> on 15 </a:t>
-            </a:r>
-            <a:r>
-              <a:rPr sz="1700" b="0" dirty="0" err="1">
-                <a:solidFill>
-                  <a:srgbClr val="334155"/>
-                </a:solidFill>
-                <a:latin typeface="Calibri"/>
-              </a:rPr>
-              <a:t>toodet</a:t>
-            </a:r>
-            <a:r>
-              <a:rPr sz="1700" b="0" dirty="0">
-                <a:solidFill>
-                  <a:srgbClr val="334155"/>
-                </a:solidFill>
-                <a:latin typeface="Calibri"/>
-              </a:rPr>
-              <a:t> → </a:t>
-            </a:r>
-            <a:r>
-              <a:rPr sz="1700" b="0" dirty="0" err="1">
-                <a:solidFill>
-                  <a:srgbClr val="334155"/>
-                </a:solidFill>
-                <a:latin typeface="Calibri"/>
-              </a:rPr>
-              <a:t>tulemus</a:t>
-            </a:r>
-            <a:r>
-              <a:rPr sz="1700" b="0" dirty="0">
-                <a:solidFill>
-                  <a:srgbClr val="334155"/>
-                </a:solidFill>
-                <a:latin typeface="Calibri"/>
-              </a:rPr>
-              <a:t> 15.</a:t>
+              <a:rPr lang="fi-FI" sz="1700" dirty="0">
+                <a:solidFill>
+                  <a:srgbClr val="334155"/>
+                </a:solidFill>
+              </a:rPr>
+              <a:t>Mitu klienti on Tallinnas? </a:t>
             </a:r>
           </a:p>
           <a:p>
             <a:pPr>
               <a:spcAft>
-                <a:spcPts val="900"/>
+                <a:spcPts val="300"/>
               </a:spcAft>
             </a:pPr>
             <a:r>
-              <a:rPr sz="1700" b="0" dirty="0">
-                <a:solidFill>
-                  <a:srgbClr val="334155"/>
-                </a:solidFill>
-                <a:latin typeface="Calibri"/>
-              </a:rPr>
-              <a:t>•  AS </a:t>
-            </a:r>
-            <a:r>
-              <a:rPr sz="1700" b="0" dirty="0" err="1">
-                <a:solidFill>
-                  <a:srgbClr val="334155"/>
-                </a:solidFill>
-                <a:latin typeface="Calibri"/>
-              </a:rPr>
-              <a:t>paneb</a:t>
-            </a:r>
-            <a:r>
-              <a:rPr sz="1700" b="0" dirty="0">
-                <a:solidFill>
-                  <a:srgbClr val="334155"/>
-                </a:solidFill>
-                <a:latin typeface="Calibri"/>
-              </a:rPr>
-              <a:t> </a:t>
-            </a:r>
-            <a:r>
-              <a:rPr sz="1700" b="0" dirty="0" err="1">
-                <a:solidFill>
-                  <a:srgbClr val="334155"/>
-                </a:solidFill>
-                <a:latin typeface="Calibri"/>
-              </a:rPr>
-              <a:t>veerule</a:t>
-            </a:r>
-            <a:r>
-              <a:rPr sz="1700" b="0" dirty="0">
-                <a:solidFill>
-                  <a:srgbClr val="334155"/>
-                </a:solidFill>
-                <a:latin typeface="Calibri"/>
-              </a:rPr>
-              <a:t> </a:t>
-            </a:r>
-            <a:r>
-              <a:rPr sz="1700" b="0" dirty="0" err="1">
-                <a:solidFill>
-                  <a:srgbClr val="334155"/>
-                </a:solidFill>
-                <a:latin typeface="Calibri"/>
-              </a:rPr>
-              <a:t>loetava</a:t>
-            </a:r>
-            <a:r>
-              <a:rPr sz="1700" b="0" dirty="0">
-                <a:solidFill>
-                  <a:srgbClr val="334155"/>
-                </a:solidFill>
-                <a:latin typeface="Calibri"/>
-              </a:rPr>
-              <a:t> </a:t>
-            </a:r>
-            <a:r>
-              <a:rPr sz="1700" b="0" dirty="0" err="1">
-                <a:solidFill>
-                  <a:srgbClr val="334155"/>
-                </a:solidFill>
-                <a:latin typeface="Calibri"/>
-              </a:rPr>
-              <a:t>nime</a:t>
-            </a:r>
-            <a:r>
-              <a:rPr sz="1700" b="0" dirty="0">
-                <a:solidFill>
-                  <a:srgbClr val="334155"/>
-                </a:solidFill>
-                <a:latin typeface="Calibri"/>
-              </a:rPr>
-              <a:t>.</a:t>
-            </a:r>
+              <a:rPr lang="en-GB" sz="1700" b="0" dirty="0">
+                <a:latin typeface="Consolas"/>
+              </a:rPr>
+              <a:t>SELECT COUNT(*) AS </a:t>
+            </a:r>
+            <a:r>
+              <a:rPr lang="en-GB" sz="1700" b="0" dirty="0" err="1">
+                <a:latin typeface="Consolas"/>
+              </a:rPr>
+              <a:t>klientide_arv</a:t>
+            </a:r>
+            <a:endParaRPr lang="en-GB" sz="1700" b="0" dirty="0">
+              <a:latin typeface="Consolas"/>
+            </a:endParaRPr>
           </a:p>
           <a:p>
             <a:pPr>
               <a:spcAft>
-                <a:spcPts val="900"/>
+                <a:spcPts val="300"/>
               </a:spcAft>
             </a:pPr>
             <a:r>
-              <a:rPr sz="1700" b="0" dirty="0">
-                <a:solidFill>
-                  <a:srgbClr val="334155"/>
-                </a:solidFill>
-                <a:latin typeface="Calibri"/>
-              </a:rPr>
-              <a:t>•  COUNT(hind) </a:t>
-            </a:r>
-            <a:r>
-              <a:rPr sz="1700" b="0" dirty="0" err="1">
-                <a:solidFill>
-                  <a:srgbClr val="334155"/>
-                </a:solidFill>
-                <a:latin typeface="Calibri"/>
-              </a:rPr>
-              <a:t>jätab</a:t>
-            </a:r>
-            <a:r>
-              <a:rPr sz="1700" b="0" dirty="0">
-                <a:solidFill>
-                  <a:srgbClr val="334155"/>
-                </a:solidFill>
-                <a:latin typeface="Calibri"/>
-              </a:rPr>
-              <a:t> </a:t>
-            </a:r>
-            <a:r>
-              <a:rPr sz="1700" b="0" dirty="0" err="1">
-                <a:solidFill>
-                  <a:srgbClr val="334155"/>
-                </a:solidFill>
-                <a:latin typeface="Calibri"/>
-              </a:rPr>
-              <a:t>vahele</a:t>
-            </a:r>
-            <a:r>
-              <a:rPr sz="1700" b="0" dirty="0">
-                <a:solidFill>
-                  <a:srgbClr val="334155"/>
-                </a:solidFill>
-                <a:latin typeface="Calibri"/>
-              </a:rPr>
-              <a:t> NULL-id; COUNT(*) </a:t>
-            </a:r>
-            <a:r>
-              <a:rPr sz="1700" b="0" dirty="0" err="1">
-                <a:solidFill>
-                  <a:srgbClr val="334155"/>
-                </a:solidFill>
-                <a:latin typeface="Calibri"/>
-              </a:rPr>
-              <a:t>loendab</a:t>
-            </a:r>
-            <a:r>
-              <a:rPr sz="1700" b="0" dirty="0">
-                <a:solidFill>
-                  <a:srgbClr val="334155"/>
-                </a:solidFill>
-                <a:latin typeface="Calibri"/>
-              </a:rPr>
-              <a:t> ka </a:t>
-            </a:r>
-            <a:r>
-              <a:rPr sz="1700" b="0" dirty="0" err="1">
-                <a:solidFill>
-                  <a:srgbClr val="334155"/>
-                </a:solidFill>
-                <a:latin typeface="Calibri"/>
-              </a:rPr>
-              <a:t>tühjad</a:t>
-            </a:r>
-            <a:r>
-              <a:rPr sz="1700" b="0" dirty="0">
-                <a:solidFill>
-                  <a:srgbClr val="334155"/>
-                </a:solidFill>
-                <a:latin typeface="Calibri"/>
-              </a:rPr>
-              <a:t>.</a:t>
+              <a:rPr lang="en-GB" sz="1700" b="0" dirty="0">
+                <a:latin typeface="Consolas"/>
+              </a:rPr>
+              <a:t>FROM </a:t>
+            </a:r>
+            <a:r>
+              <a:rPr lang="en-GB" sz="1700" b="0" dirty="0" err="1">
+                <a:latin typeface="Consolas"/>
+              </a:rPr>
+              <a:t>kliendid</a:t>
+            </a:r>
+            <a:endParaRPr lang="en-GB" sz="1700" b="0" dirty="0">
+              <a:latin typeface="Consolas"/>
+            </a:endParaRPr>
+          </a:p>
+          <a:p>
+            <a:pPr>
+              <a:spcAft>
+                <a:spcPts val="300"/>
+              </a:spcAft>
+            </a:pPr>
+            <a:r>
+              <a:rPr lang="en-GB" sz="1700" b="0" dirty="0">
+                <a:latin typeface="Consolas"/>
+              </a:rPr>
+              <a:t>WHERE linn = ‘Tallinn’</a:t>
+            </a:r>
+          </a:p>
+        </p:txBody>
+      </p:sp>
+      <p:sp>
+        <p:nvSpPr>
+          <p:cNvPr id="12" name="TextBox 11">
+            <a:extLst>
+              <a:ext uri="{FF2B5EF4-FFF2-40B4-BE49-F238E27FC236}">
+                <a16:creationId xmlns:a16="http://schemas.microsoft.com/office/drawing/2014/main" id="{48123DC3-330F-070C-16F0-00A64C63B076}"/>
+              </a:ext>
+            </a:extLst>
+          </p:cNvPr>
+          <p:cNvSpPr txBox="1"/>
+          <p:nvPr/>
+        </p:nvSpPr>
+        <p:spPr>
+          <a:xfrm>
+            <a:off x="5839968" y="4318934"/>
+            <a:ext cx="6094476" cy="1254189"/>
+          </a:xfrm>
+          <a:prstGeom prst="rect">
+            <a:avLst/>
+          </a:prstGeom>
+          <a:noFill/>
+        </p:spPr>
+        <p:txBody>
+          <a:bodyPr wrap="square">
+            <a:spAutoFit/>
+          </a:bodyPr>
+          <a:lstStyle/>
+          <a:p>
+            <a:pPr>
+              <a:spcAft>
+                <a:spcPts val="300"/>
+              </a:spcAft>
+            </a:pPr>
+            <a:r>
+              <a:rPr lang="fi-FI" sz="1700" dirty="0">
+                <a:solidFill>
+                  <a:srgbClr val="334155"/>
+                </a:solidFill>
+              </a:rPr>
+              <a:t>Koos: mitu toodet kategoorias 'Lisaseadmed'?</a:t>
+            </a:r>
+            <a:endParaRPr lang="en-GB" sz="1700" b="0" dirty="0">
+              <a:latin typeface="Consolas"/>
+            </a:endParaRPr>
+          </a:p>
+          <a:p>
+            <a:pPr>
+              <a:spcAft>
+                <a:spcPts val="300"/>
+              </a:spcAft>
+            </a:pPr>
+            <a:r>
+              <a:rPr lang="en-GB" sz="1700" b="0" dirty="0">
+                <a:latin typeface="Consolas"/>
+              </a:rPr>
+              <a:t>SELECT COUNT(*) AS </a:t>
+            </a:r>
+            <a:r>
+              <a:rPr lang="en-GB" sz="1700" b="0" dirty="0" err="1">
+                <a:latin typeface="Consolas"/>
+              </a:rPr>
+              <a:t>lisaseadmete_arv</a:t>
+            </a:r>
+            <a:endParaRPr lang="en-GB" sz="1700" b="0" dirty="0">
+              <a:latin typeface="Consolas"/>
+            </a:endParaRPr>
+          </a:p>
+          <a:p>
+            <a:pPr>
+              <a:spcAft>
+                <a:spcPts val="300"/>
+              </a:spcAft>
+            </a:pPr>
+            <a:r>
+              <a:rPr lang="en-GB" sz="1700" b="0" dirty="0">
+                <a:latin typeface="Consolas"/>
+              </a:rPr>
+              <a:t>FROM tooted</a:t>
+            </a:r>
+          </a:p>
+          <a:p>
+            <a:pPr>
+              <a:spcAft>
+                <a:spcPts val="300"/>
+              </a:spcAft>
+            </a:pPr>
+            <a:r>
+              <a:rPr lang="en-GB" sz="1700" b="0" dirty="0">
+                <a:latin typeface="Consolas"/>
+              </a:rPr>
+              <a:t>WHERE </a:t>
+            </a:r>
+            <a:r>
+              <a:rPr lang="en-GB" sz="1700" b="0" dirty="0" err="1">
+                <a:latin typeface="Consolas"/>
+              </a:rPr>
+              <a:t>kategooria</a:t>
+            </a:r>
+            <a:r>
+              <a:rPr lang="en-GB" sz="1700" b="0" dirty="0">
+                <a:latin typeface="Consolas"/>
+              </a:rPr>
+              <a:t> = ‘</a:t>
+            </a:r>
+            <a:r>
+              <a:rPr lang="fi-FI" sz="1700" dirty="0">
+                <a:solidFill>
+                  <a:srgbClr val="334155"/>
+                </a:solidFill>
+              </a:rPr>
+              <a:t>Lisaseadmed</a:t>
+            </a:r>
+            <a:r>
+              <a:rPr lang="en-GB" sz="1700" b="0" dirty="0">
+                <a:latin typeface="Consolas"/>
+              </a:rPr>
+              <a:t>’</a:t>
             </a:r>
           </a:p>
         </p:txBody>
@@ -34612,8 +35564,8 @@
         </p:nvSpPr>
         <p:spPr>
           <a:xfrm>
-            <a:off x="365760" y="208079"/>
-            <a:ext cx="11430000" cy="461665"/>
+            <a:off x="365760" y="164592"/>
+            <a:ext cx="11430000" cy="548640"/>
           </a:xfrm>
           <a:prstGeom prst="rect">
             <a:avLst/>
@@ -34626,29 +35578,16 @@
           </a:bodyPr>
           <a:lstStyle/>
           <a:p>
-            <a:r>
-              <a:rPr sz="2400" b="1" dirty="0">
+            <a:pPr algn="l"/>
+            <a:r>
+              <a:rPr sz="2400" b="1">
                 <a:solidFill>
                   <a:srgbClr val="FFFFFF"/>
                 </a:solidFill>
                 <a:latin typeface="Calibri"/>
               </a:rPr>
-              <a:t>COUNT + WHERE </a:t>
-            </a:r>
-            <a:r>
-              <a:rPr lang="en-GB" sz="2400" b="1" dirty="0">
-                <a:solidFill>
-                  <a:srgbClr val="92D050"/>
-                </a:solidFill>
-              </a:rPr>
-              <a:t>NÄITAN </a:t>
-            </a:r>
-            <a:endParaRPr sz="2400" b="1" dirty="0">
-              <a:solidFill>
-                <a:srgbClr val="FFFFFF"/>
-              </a:solidFill>
-              <a:latin typeface="Calibri"/>
-            </a:endParaRPr>
+              <a:t>MIN, MAX, SUM, AVG  (~15 min)</a:t>
+            </a:r>
           </a:p>
         </p:txBody>
       </p:sp>
@@ -34682,7 +35621,7 @@
                 </a:solidFill>
                 <a:latin typeface="Calibri"/>
               </a:rPr>
-              <a:t>9</a:t>
+              <a:t>10</a:t>
             </a:r>
           </a:p>
         </p:txBody>
@@ -34696,7 +35635,7 @@
         <p:spPr>
           <a:xfrm>
             <a:off x="365760" y="1097280"/>
-            <a:ext cx="11430000" cy="2103120"/>
+            <a:ext cx="11430000" cy="1143000"/>
           </a:xfrm>
           <a:prstGeom prst="roundRect">
             <a:avLst>
@@ -34704,7 +35643,7 @@
             </a:avLst>
           </a:prstGeom>
           <a:solidFill>
-            <a:srgbClr val="0F172A"/>
+            <a:srgbClr val="FFFFFF"/>
           </a:solidFill>
           <a:ln>
             <a:noFill/>
@@ -34742,8 +35681,8 @@
         </p:nvSpPr>
         <p:spPr>
           <a:xfrm>
-            <a:off x="530352" y="1207007"/>
-            <a:ext cx="11100816" cy="1854354"/>
+            <a:off x="640080" y="1097280"/>
+            <a:ext cx="3200400" cy="1143000"/>
           </a:xfrm>
           <a:prstGeom prst="rect">
             <a:avLst/>
@@ -34751,218 +35690,20 @@
           <a:noFill/>
         </p:spPr>
         <p:txBody>
-          <a:bodyPr wrap="square">
+          <a:bodyPr wrap="square" anchor="ctr">
             <a:spAutoFit/>
           </a:bodyPr>
           <a:lstStyle/>
           <a:p>
-            <a:pPr>
-              <a:spcAft>
-                <a:spcPts val="300"/>
-              </a:spcAft>
-            </a:pPr>
-            <a:r>
-              <a:rPr lang="en-GB" sz="1700" b="0" dirty="0">
-                <a:solidFill>
-                  <a:srgbClr val="E2E8F0"/>
-                </a:solidFill>
-                <a:latin typeface="Consolas"/>
-              </a:rPr>
-              <a:t>--Mitu </a:t>
-            </a:r>
-            <a:r>
-              <a:rPr lang="en-GB" sz="1700" b="0" dirty="0" err="1">
-                <a:solidFill>
-                  <a:srgbClr val="E2E8F0"/>
-                </a:solidFill>
-                <a:latin typeface="Consolas"/>
-              </a:rPr>
-              <a:t>tellimust</a:t>
-            </a:r>
-            <a:r>
-              <a:rPr lang="en-GB" sz="1700" b="0" dirty="0">
-                <a:solidFill>
-                  <a:srgbClr val="E2E8F0"/>
-                </a:solidFill>
-                <a:latin typeface="Consolas"/>
-              </a:rPr>
-              <a:t> on </a:t>
-            </a:r>
-            <a:r>
-              <a:rPr lang="en-GB" sz="1700" b="0" dirty="0" err="1">
-                <a:solidFill>
-                  <a:srgbClr val="E2E8F0"/>
-                </a:solidFill>
-                <a:latin typeface="Consolas"/>
-              </a:rPr>
-              <a:t>ootel</a:t>
-            </a:r>
-            <a:r>
-              <a:rPr lang="en-GB" sz="1700" b="0" dirty="0">
-                <a:solidFill>
-                  <a:srgbClr val="E2E8F0"/>
-                </a:solidFill>
-                <a:latin typeface="Consolas"/>
-              </a:rPr>
-              <a:t>?</a:t>
-            </a:r>
-          </a:p>
-          <a:p>
-            <a:pPr>
-              <a:spcAft>
-                <a:spcPts val="300"/>
-              </a:spcAft>
-            </a:pPr>
-            <a:endParaRPr lang="en-GB" sz="1700" b="0" dirty="0">
-              <a:solidFill>
-                <a:srgbClr val="E2E8F0"/>
-              </a:solidFill>
-              <a:latin typeface="Consolas"/>
-            </a:endParaRPr>
-          </a:p>
-          <a:p>
-            <a:pPr>
-              <a:spcAft>
-                <a:spcPts val="300"/>
-              </a:spcAft>
-            </a:pPr>
-            <a:r>
-              <a:rPr sz="1700" b="0" dirty="0">
-                <a:solidFill>
-                  <a:srgbClr val="E2E8F0"/>
-                </a:solidFill>
-                <a:latin typeface="Consolas"/>
-              </a:rPr>
-              <a:t>SELECT </a:t>
-            </a:r>
-            <a:endParaRPr lang="en-GB" sz="1700" b="0" dirty="0">
-              <a:solidFill>
-                <a:srgbClr val="E2E8F0"/>
-              </a:solidFill>
-              <a:latin typeface="Consolas"/>
-            </a:endParaRPr>
-          </a:p>
-          <a:p>
-            <a:pPr>
-              <a:spcAft>
-                <a:spcPts val="300"/>
-              </a:spcAft>
-            </a:pPr>
-            <a:r>
-              <a:rPr lang="en-GB" sz="1700" dirty="0">
-                <a:solidFill>
-                  <a:srgbClr val="E2E8F0"/>
-                </a:solidFill>
-                <a:latin typeface="Consolas"/>
-              </a:rPr>
-              <a:t>	</a:t>
-            </a:r>
-            <a:r>
-              <a:rPr sz="1700" b="0" dirty="0">
-                <a:solidFill>
-                  <a:srgbClr val="E2E8F0"/>
-                </a:solidFill>
-                <a:latin typeface="Consolas"/>
-              </a:rPr>
-              <a:t>COUNT(*) AS </a:t>
-            </a:r>
-            <a:r>
-              <a:rPr sz="1700" b="0" dirty="0" err="1">
-                <a:solidFill>
-                  <a:srgbClr val="E2E8F0"/>
-                </a:solidFill>
-                <a:latin typeface="Consolas"/>
-              </a:rPr>
-              <a:t>ootel_arv</a:t>
-            </a:r>
-            <a:endParaRPr sz="1700" b="0" dirty="0">
-              <a:solidFill>
-                <a:srgbClr val="E2E8F0"/>
-              </a:solidFill>
-              <a:latin typeface="Consolas"/>
-            </a:endParaRPr>
-          </a:p>
-          <a:p>
-            <a:pPr>
-              <a:spcAft>
-                <a:spcPts val="300"/>
-              </a:spcAft>
-            </a:pPr>
-            <a:r>
-              <a:rPr sz="1700" b="0" dirty="0">
-                <a:solidFill>
-                  <a:srgbClr val="E2E8F0"/>
-                </a:solidFill>
-                <a:latin typeface="Consolas"/>
-              </a:rPr>
-              <a:t>FROM </a:t>
-            </a:r>
-            <a:r>
-              <a:rPr sz="1700" b="0" dirty="0" err="1">
-                <a:solidFill>
-                  <a:srgbClr val="E2E8F0"/>
-                </a:solidFill>
-                <a:latin typeface="Consolas"/>
-              </a:rPr>
-              <a:t>tellimused</a:t>
-            </a:r>
-            <a:endParaRPr sz="1700" b="0" dirty="0">
-              <a:solidFill>
-                <a:srgbClr val="E2E8F0"/>
-              </a:solidFill>
-              <a:latin typeface="Consolas"/>
-            </a:endParaRPr>
-          </a:p>
-          <a:p>
-            <a:pPr>
-              <a:spcAft>
-                <a:spcPts val="300"/>
-              </a:spcAft>
-            </a:pPr>
-            <a:r>
-              <a:rPr sz="1700" b="0" dirty="0">
-                <a:solidFill>
-                  <a:srgbClr val="E2E8F0"/>
-                </a:solidFill>
-                <a:latin typeface="Consolas"/>
-              </a:rPr>
-              <a:t>WHERE </a:t>
-            </a:r>
-            <a:r>
-              <a:rPr sz="1700" b="0" dirty="0" err="1">
-                <a:solidFill>
-                  <a:srgbClr val="E2E8F0"/>
-                </a:solidFill>
-                <a:latin typeface="Consolas"/>
-              </a:rPr>
-              <a:t>staatus</a:t>
-            </a:r>
-            <a:r>
-              <a:rPr sz="1700" b="0" dirty="0">
-                <a:solidFill>
-                  <a:srgbClr val="E2E8F0"/>
-                </a:solidFill>
-                <a:latin typeface="Consolas"/>
-              </a:rPr>
-              <a:t> = '</a:t>
-            </a:r>
-            <a:r>
-              <a:rPr sz="1700" b="0" dirty="0" err="1">
-                <a:solidFill>
-                  <a:srgbClr val="E2E8F0"/>
-                </a:solidFill>
-                <a:latin typeface="Consolas"/>
-              </a:rPr>
-              <a:t>Ootel</a:t>
-            </a:r>
-            <a:r>
-              <a:rPr sz="1700" b="0" dirty="0">
-                <a:solidFill>
-                  <a:srgbClr val="E2E8F0"/>
-                </a:solidFill>
-                <a:latin typeface="Consolas"/>
-              </a:rPr>
-              <a:t>';</a:t>
+            <a:pPr algn="l"/>
+            <a:r>
+              <a:rPr sz="2000" b="1">
+                <a:solidFill>
+                  <a:srgbClr val="0F203E"/>
+                </a:solidFill>
+                <a:latin typeface="Calibri"/>
+              </a:rPr>
+              <a:t>MIN(hind)</a:t>
             </a:r>
           </a:p>
         </p:txBody>
@@ -34975,8 +35716,8 @@
         </p:nvSpPr>
         <p:spPr>
           <a:xfrm>
-            <a:off x="457200" y="3429000"/>
-            <a:ext cx="11247120" cy="615553"/>
+            <a:off x="3931920" y="1097280"/>
+            <a:ext cx="2286000" cy="1143000"/>
           </a:xfrm>
           <a:prstGeom prst="rect">
             <a:avLst/>
@@ -34984,122 +35725,34 @@
           <a:noFill/>
         </p:spPr>
         <p:txBody>
-          <a:bodyPr wrap="square" anchor="t">
+          <a:bodyPr wrap="square" anchor="ctr">
             <a:spAutoFit/>
           </a:bodyPr>
           <a:lstStyle/>
           <a:p>
             <a:pPr algn="l"/>
             <a:r>
-              <a:rPr sz="1700" b="0" dirty="0" err="1">
-                <a:solidFill>
-                  <a:srgbClr val="334155"/>
-                </a:solidFill>
-                <a:latin typeface="Calibri"/>
-              </a:rPr>
-              <a:t>Kõigepealt</a:t>
-            </a:r>
-            <a:r>
-              <a:rPr sz="1700" b="0" dirty="0">
-                <a:solidFill>
-                  <a:srgbClr val="334155"/>
-                </a:solidFill>
-                <a:latin typeface="Calibri"/>
-              </a:rPr>
-              <a:t> WHERE </a:t>
-            </a:r>
-            <a:r>
-              <a:rPr sz="1700" b="0" dirty="0" err="1">
-                <a:solidFill>
-                  <a:srgbClr val="334155"/>
-                </a:solidFill>
-                <a:latin typeface="Calibri"/>
-              </a:rPr>
-              <a:t>jätab</a:t>
-            </a:r>
-            <a:r>
-              <a:rPr sz="1700" b="0" dirty="0">
-                <a:solidFill>
-                  <a:srgbClr val="334155"/>
-                </a:solidFill>
-                <a:latin typeface="Calibri"/>
-              </a:rPr>
-              <a:t> read, </a:t>
-            </a:r>
-            <a:r>
-              <a:rPr sz="1700" b="0" dirty="0" err="1">
-                <a:solidFill>
-                  <a:srgbClr val="334155"/>
-                </a:solidFill>
-                <a:latin typeface="Calibri"/>
-              </a:rPr>
-              <a:t>siis</a:t>
-            </a:r>
-            <a:r>
-              <a:rPr sz="1700" b="0" dirty="0">
-                <a:solidFill>
-                  <a:srgbClr val="334155"/>
-                </a:solidFill>
-                <a:latin typeface="Calibri"/>
-              </a:rPr>
-              <a:t> COUNT </a:t>
-            </a:r>
-            <a:r>
-              <a:rPr sz="1700" b="0" dirty="0" err="1">
-                <a:solidFill>
-                  <a:srgbClr val="334155"/>
-                </a:solidFill>
-                <a:latin typeface="Calibri"/>
-              </a:rPr>
-              <a:t>loendab</a:t>
-            </a:r>
-            <a:r>
-              <a:rPr sz="1700" b="0" dirty="0">
-                <a:solidFill>
-                  <a:srgbClr val="334155"/>
-                </a:solidFill>
-                <a:latin typeface="Calibri"/>
-              </a:rPr>
-              <a:t> </a:t>
-            </a:r>
-            <a:r>
-              <a:rPr sz="1700" b="0" dirty="0" err="1">
-                <a:solidFill>
-                  <a:srgbClr val="334155"/>
-                </a:solidFill>
-                <a:latin typeface="Calibri"/>
-              </a:rPr>
-              <a:t>allesjäänud</a:t>
-            </a:r>
-            <a:r>
-              <a:rPr sz="1700" b="0" dirty="0">
-                <a:solidFill>
-                  <a:srgbClr val="334155"/>
-                </a:solidFill>
-                <a:latin typeface="Calibri"/>
-              </a:rPr>
-              <a:t>.
-</a:t>
-            </a:r>
-          </a:p>
-        </p:txBody>
-      </p:sp>
-      <p:sp>
-        <p:nvSpPr>
-          <p:cNvPr id="6" name="TextBox 5">
-            <a:extLst>
-              <a:ext uri="{FF2B5EF4-FFF2-40B4-BE49-F238E27FC236}">
-                <a16:creationId xmlns:a16="http://schemas.microsoft.com/office/drawing/2014/main" id="{60F7C9AE-4A3A-AB53-29CD-A61845F65937}"/>
-              </a:ext>
-            </a:extLst>
-          </p:cNvPr>
+              <a:rPr sz="1600" b="1">
+                <a:solidFill>
+                  <a:srgbClr val="007073"/>
+                </a:solidFill>
+                <a:latin typeface="Calibri"/>
+              </a:rPr>
+              <a:t>väikseim</a:t>
+            </a:r>
+          </a:p>
+        </p:txBody>
+      </p:sp>
+      <p:sp>
+        <p:nvSpPr>
+          <p:cNvPr id="12" name="TextBox 11"/>
           <p:cNvSpPr txBox="1"/>
           <p:nvPr/>
         </p:nvSpPr>
         <p:spPr>
           <a:xfrm>
-            <a:off x="530352" y="4314403"/>
-            <a:ext cx="6094476" cy="1254189"/>
+            <a:off x="6309360" y="1097280"/>
+            <a:ext cx="5212080" cy="1143000"/>
           </a:xfrm>
           <a:prstGeom prst="rect">
             <a:avLst/>
@@ -35107,100 +35760,81 @@
           <a:noFill/>
         </p:spPr>
         <p:txBody>
-          <a:bodyPr wrap="square">
+          <a:bodyPr wrap="square" anchor="ctr">
             <a:spAutoFit/>
           </a:bodyPr>
           <a:lstStyle/>
           <a:p>
-            <a:pPr>
-              <a:spcAft>
-                <a:spcPts val="300"/>
-              </a:spcAft>
-            </a:pPr>
-            <a:r>
-              <a:rPr lang="fi-FI" sz="1700" dirty="0">
-                <a:solidFill>
-                  <a:srgbClr val="334155"/>
-                </a:solidFill>
-              </a:rPr>
-              <a:t>Mitu klienti on Tallinnas? </a:t>
-            </a:r>
-          </a:p>
-          <a:p>
-            <a:pPr>
-              <a:spcAft>
-                <a:spcPts val="300"/>
-              </a:spcAft>
-            </a:pPr>
-            <a:r>
-              <a:rPr lang="en-GB" sz="1700" b="0" dirty="0">
-                <a:latin typeface="Consolas"/>
-              </a:rPr>
-              <a:t>SELECT COUNT(*) AS </a:t>
-            </a:r>
-            <a:r>
-              <a:rPr lang="en-GB" sz="1700" b="0" dirty="0" err="1">
-                <a:latin typeface="Consolas"/>
-              </a:rPr>
-              <a:t>klientide_arv</a:t>
-            </a:r>
-            <a:endParaRPr lang="en-GB" sz="1700" b="0" dirty="0">
-              <a:latin typeface="Consolas"/>
-            </a:endParaRPr>
-          </a:p>
-          <a:p>
-            <a:pPr>
-              <a:spcAft>
-                <a:spcPts val="300"/>
-              </a:spcAft>
-            </a:pPr>
-            <a:r>
-              <a:rPr lang="en-GB" sz="1700" b="0" dirty="0">
-                <a:latin typeface="Consolas"/>
-              </a:rPr>
-              <a:t>FROM </a:t>
-            </a:r>
-            <a:r>
-              <a:rPr lang="en-GB" sz="1700" b="0" dirty="0" err="1">
-                <a:latin typeface="Consolas"/>
-              </a:rPr>
-              <a:t>kliendid</a:t>
-            </a:r>
-            <a:endParaRPr lang="en-GB" sz="1700" b="0" dirty="0">
-              <a:latin typeface="Consolas"/>
-            </a:endParaRPr>
-          </a:p>
-          <a:p>
-            <a:pPr>
-              <a:spcAft>
-                <a:spcPts val="300"/>
-              </a:spcAft>
-            </a:pPr>
-            <a:r>
-              <a:rPr lang="en-GB" sz="1700" b="0" dirty="0">
-                <a:latin typeface="Consolas"/>
-              </a:rPr>
-              <a:t>WHERE linn = ‘Tallinn’</a:t>
-            </a:r>
-          </a:p>
-        </p:txBody>
-      </p:sp>
-      <p:sp>
-        <p:nvSpPr>
-          <p:cNvPr id="12" name="TextBox 11">
-            <a:extLst>
-              <a:ext uri="{FF2B5EF4-FFF2-40B4-BE49-F238E27FC236}">
-                <a16:creationId xmlns:a16="http://schemas.microsoft.com/office/drawing/2014/main" id="{48123DC3-330F-070C-16F0-00A64C63B076}"/>
-              </a:ext>
-            </a:extLst>
-          </p:cNvPr>
+            <a:pPr algn="l"/>
+            <a:r>
+              <a:rPr sz="1600" b="0">
+                <a:solidFill>
+                  <a:srgbClr val="334155"/>
+                </a:solidFill>
+                <a:latin typeface="Calibri"/>
+              </a:rPr>
+              <a:t>Odavaim toode?</a:t>
+            </a:r>
+          </a:p>
+        </p:txBody>
+      </p:sp>
+      <p:sp>
+        <p:nvSpPr>
+          <p:cNvPr id="13" name="Rounded Rectangle 12"/>
+          <p:cNvSpPr/>
+          <p:nvPr/>
+        </p:nvSpPr>
+        <p:spPr>
+          <a:xfrm>
+            <a:off x="365760" y="2377439"/>
+            <a:ext cx="11430000" cy="1143000"/>
+          </a:xfrm>
+          <a:prstGeom prst="roundRect">
+            <a:avLst>
+              <a:gd name="adj" fmla="val 8000"/>
+            </a:avLst>
+          </a:prstGeom>
+          <a:solidFill>
+            <a:srgbClr val="FFFFFF"/>
+          </a:solidFill>
+          <a:ln>
+            <a:noFill/>
+          </a:ln>
+          <a:effectLst/>
+        </p:spPr>
+        <p:style>
+          <a:lnRef idx="1">
+            <a:schemeClr val="accent1"/>
+          </a:lnRef>
+          <a:fillRef idx="3">
+            <a:schemeClr val="accent1"/>
+          </a:fillRef>
+          <a:effectRef idx="2">
+            <a:schemeClr val="accent1"/>
+          </a:effectRef>
+          <a:fontRef idx="minor">
+            <a:schemeClr val="lt1"/>
+          </a:fontRef>
+        </p:style>
+        <p:txBody>
+          <a:bodyPr rtlCol="0" anchor="ctr"/>
+          <a:lstStyle/>
+          <a:p>
+            <a:pPr algn="ctr"/>
+            <a:endParaRPr/>
+          </a:p>
+        </p:txBody>
+      </p:sp>
+      <p:sp>
+        <p:nvSpPr>
+          <p:cNvPr id="14" name="TextBox 13"/>
           <p:cNvSpPr txBox="1"/>
           <p:nvPr/>
         </p:nvSpPr>
         <p:spPr>
           <a:xfrm>
-            <a:off x="5839968" y="4318934"/>
-            <a:ext cx="6094476" cy="1254189"/>
+            <a:off x="640080" y="2377439"/>
+            <a:ext cx="3200400" cy="1143000"/>
           </a:xfrm>
           <a:prstGeom prst="rect">
             <a:avLst/>
@@ -35208,100 +35842,394 @@
           <a:noFill/>
         </p:spPr>
         <p:txBody>
-          <a:bodyPr wrap="square">
+          <a:bodyPr wrap="square" anchor="ctr">
             <a:spAutoFit/>
           </a:bodyPr>
           <a:lstStyle/>
           <a:p>
-            <a:pPr>
-              <a:spcAft>
-                <a:spcPts val="300"/>
-              </a:spcAft>
-            </a:pPr>
-            <a:r>
-              <a:rPr lang="fi-FI" sz="1700" dirty="0">
-                <a:solidFill>
-                  <a:srgbClr val="334155"/>
-                </a:solidFill>
-              </a:rPr>
-              <a:t>Koos: mitu toodet kategoorias 'Lisaseadmed'?</a:t>
-            </a:r>
-            <a:endParaRPr lang="en-GB" sz="1700" b="0" dirty="0">
-              <a:latin typeface="Consolas"/>
-            </a:endParaRPr>
-          </a:p>
-          <a:p>
-            <a:pPr>
-              <a:spcAft>
-                <a:spcPts val="300"/>
-              </a:spcAft>
-            </a:pPr>
-            <a:r>
-              <a:rPr lang="en-GB" sz="1700" b="0" dirty="0">
-                <a:latin typeface="Consolas"/>
-              </a:rPr>
-              <a:t>SELECT COUNT(*) AS </a:t>
-            </a:r>
-            <a:r>
-              <a:rPr lang="en-GB" sz="1700" b="0" dirty="0" err="1">
-                <a:latin typeface="Consolas"/>
-              </a:rPr>
-              <a:t>lisaseadmete_arv</a:t>
-            </a:r>
-            <a:endParaRPr lang="en-GB" sz="1700" b="0" dirty="0">
-              <a:latin typeface="Consolas"/>
-            </a:endParaRPr>
-          </a:p>
-          <a:p>
-            <a:pPr>
-              <a:spcAft>
-                <a:spcPts val="300"/>
-              </a:spcAft>
-            </a:pPr>
-            <a:r>
-              <a:rPr lang="en-GB" sz="1700" b="0" dirty="0">
-                <a:latin typeface="Consolas"/>
-              </a:rPr>
-              <a:t>FROM tooted</a:t>
-            </a:r>
-          </a:p>
-          <a:p>
-            <a:pPr>
-              <a:spcAft>
-                <a:spcPts val="300"/>
-              </a:spcAft>
-            </a:pPr>
-            <a:r>
-              <a:rPr lang="en-GB" sz="1700" b="0" dirty="0">
-                <a:latin typeface="Consolas"/>
-              </a:rPr>
-              <a:t>WHERE </a:t>
-            </a:r>
-            <a:r>
-              <a:rPr lang="en-GB" sz="1700" b="0" dirty="0" err="1">
-                <a:latin typeface="Consolas"/>
-              </a:rPr>
-              <a:t>kategooria</a:t>
-            </a:r>
-            <a:r>
-              <a:rPr lang="en-GB" sz="1700" b="0" dirty="0">
-                <a:latin typeface="Consolas"/>
-              </a:rPr>
-              <a:t> = ‘</a:t>
-            </a:r>
-            <a:r>
-              <a:rPr lang="fi-FI" sz="1700" dirty="0">
-                <a:solidFill>
-                  <a:srgbClr val="334155"/>
-                </a:solidFill>
-              </a:rPr>
-              <a:t>Lisaseadmed</a:t>
-            </a:r>
-            <a:r>
-              <a:rPr lang="en-GB" sz="1700" b="0" dirty="0">
-                <a:latin typeface="Consolas"/>
-              </a:rPr>
-              <a:t>’</a:t>
+            <a:pPr algn="l"/>
+            <a:r>
+              <a:rPr sz="2000" b="1">
+                <a:solidFill>
+                  <a:srgbClr val="0F203E"/>
+                </a:solidFill>
+                <a:latin typeface="Calibri"/>
+              </a:rPr>
+              <a:t>MAX(hind)</a:t>
+            </a:r>
+          </a:p>
+        </p:txBody>
+      </p:sp>
+      <p:sp>
+        <p:nvSpPr>
+          <p:cNvPr id="15" name="TextBox 14"/>
+          <p:cNvSpPr txBox="1"/>
+          <p:nvPr/>
+        </p:nvSpPr>
+        <p:spPr>
+          <a:xfrm>
+            <a:off x="3931920" y="2377439"/>
+            <a:ext cx="2286000" cy="1143000"/>
+          </a:xfrm>
+          <a:prstGeom prst="rect">
+            <a:avLst/>
+          </a:prstGeom>
+          <a:noFill/>
+        </p:spPr>
+        <p:txBody>
+          <a:bodyPr wrap="square" anchor="ctr">
+            <a:spAutoFit/>
+          </a:bodyPr>
+          <a:lstStyle/>
+          <a:p>
+            <a:pPr algn="l"/>
+            <a:r>
+              <a:rPr sz="1600" b="1">
+                <a:solidFill>
+                  <a:srgbClr val="007073"/>
+                </a:solidFill>
+                <a:latin typeface="Calibri"/>
+              </a:rPr>
+              <a:t>suurim</a:t>
+            </a:r>
+          </a:p>
+        </p:txBody>
+      </p:sp>
+      <p:sp>
+        <p:nvSpPr>
+          <p:cNvPr id="16" name="TextBox 15"/>
+          <p:cNvSpPr txBox="1"/>
+          <p:nvPr/>
+        </p:nvSpPr>
+        <p:spPr>
+          <a:xfrm>
+            <a:off x="6309360" y="2377439"/>
+            <a:ext cx="5212080" cy="1143000"/>
+          </a:xfrm>
+          <a:prstGeom prst="rect">
+            <a:avLst/>
+          </a:prstGeom>
+          <a:noFill/>
+        </p:spPr>
+        <p:txBody>
+          <a:bodyPr wrap="square" anchor="ctr">
+            <a:spAutoFit/>
+          </a:bodyPr>
+          <a:lstStyle/>
+          <a:p>
+            <a:pPr algn="l"/>
+            <a:r>
+              <a:rPr sz="1600" b="0">
+                <a:solidFill>
+                  <a:srgbClr val="334155"/>
+                </a:solidFill>
+                <a:latin typeface="Calibri"/>
+              </a:rPr>
+              <a:t>Kalleim toode?</a:t>
+            </a:r>
+          </a:p>
+        </p:txBody>
+      </p:sp>
+      <p:sp>
+        <p:nvSpPr>
+          <p:cNvPr id="17" name="Rounded Rectangle 16"/>
+          <p:cNvSpPr/>
+          <p:nvPr/>
+        </p:nvSpPr>
+        <p:spPr>
+          <a:xfrm>
+            <a:off x="365760" y="3657600"/>
+            <a:ext cx="11430000" cy="1143000"/>
+          </a:xfrm>
+          <a:prstGeom prst="roundRect">
+            <a:avLst>
+              <a:gd name="adj" fmla="val 8000"/>
+            </a:avLst>
+          </a:prstGeom>
+          <a:solidFill>
+            <a:srgbClr val="FFFFFF"/>
+          </a:solidFill>
+          <a:ln>
+            <a:noFill/>
+          </a:ln>
+          <a:effectLst/>
+        </p:spPr>
+        <p:style>
+          <a:lnRef idx="1">
+            <a:schemeClr val="accent1"/>
+          </a:lnRef>
+          <a:fillRef idx="3">
+            <a:schemeClr val="accent1"/>
+          </a:fillRef>
+          <a:effectRef idx="2">
+            <a:schemeClr val="accent1"/>
+          </a:effectRef>
+          <a:fontRef idx="minor">
+            <a:schemeClr val="lt1"/>
+          </a:fontRef>
+        </p:style>
+        <p:txBody>
+          <a:bodyPr rtlCol="0" anchor="ctr"/>
+          <a:lstStyle/>
+          <a:p>
+            <a:pPr algn="ctr"/>
+            <a:endParaRPr/>
+          </a:p>
+        </p:txBody>
+      </p:sp>
+      <p:sp>
+        <p:nvSpPr>
+          <p:cNvPr id="18" name="TextBox 17"/>
+          <p:cNvSpPr txBox="1"/>
+          <p:nvPr/>
+        </p:nvSpPr>
+        <p:spPr>
+          <a:xfrm>
+            <a:off x="640080" y="3657600"/>
+            <a:ext cx="3200400" cy="1143000"/>
+          </a:xfrm>
+          <a:prstGeom prst="rect">
+            <a:avLst/>
+          </a:prstGeom>
+          <a:noFill/>
+        </p:spPr>
+        <p:txBody>
+          <a:bodyPr wrap="square" anchor="ctr">
+            <a:spAutoFit/>
+          </a:bodyPr>
+          <a:lstStyle/>
+          <a:p>
+            <a:pPr algn="l"/>
+            <a:r>
+              <a:rPr sz="2000" b="1">
+                <a:solidFill>
+                  <a:srgbClr val="0F203E"/>
+                </a:solidFill>
+                <a:latin typeface="Calibri"/>
+              </a:rPr>
+              <a:t>SUM(hind)</a:t>
+            </a:r>
+          </a:p>
+        </p:txBody>
+      </p:sp>
+      <p:sp>
+        <p:nvSpPr>
+          <p:cNvPr id="19" name="TextBox 18"/>
+          <p:cNvSpPr txBox="1"/>
+          <p:nvPr/>
+        </p:nvSpPr>
+        <p:spPr>
+          <a:xfrm>
+            <a:off x="3931920" y="3657600"/>
+            <a:ext cx="2286000" cy="1143000"/>
+          </a:xfrm>
+          <a:prstGeom prst="rect">
+            <a:avLst/>
+          </a:prstGeom>
+          <a:noFill/>
+        </p:spPr>
+        <p:txBody>
+          <a:bodyPr wrap="square" anchor="ctr">
+            <a:spAutoFit/>
+          </a:bodyPr>
+          <a:lstStyle/>
+          <a:p>
+            <a:pPr algn="l"/>
+            <a:r>
+              <a:rPr sz="1600" b="1">
+                <a:solidFill>
+                  <a:srgbClr val="007073"/>
+                </a:solidFill>
+                <a:latin typeface="Calibri"/>
+              </a:rPr>
+              <a:t>summa</a:t>
+            </a:r>
+          </a:p>
+        </p:txBody>
+      </p:sp>
+      <p:sp>
+        <p:nvSpPr>
+          <p:cNvPr id="20" name="TextBox 19"/>
+          <p:cNvSpPr txBox="1"/>
+          <p:nvPr/>
+        </p:nvSpPr>
+        <p:spPr>
+          <a:xfrm>
+            <a:off x="6309360" y="3657600"/>
+            <a:ext cx="5212080" cy="1143000"/>
+          </a:xfrm>
+          <a:prstGeom prst="rect">
+            <a:avLst/>
+          </a:prstGeom>
+          <a:noFill/>
+        </p:spPr>
+        <p:txBody>
+          <a:bodyPr wrap="square" anchor="ctr">
+            <a:spAutoFit/>
+          </a:bodyPr>
+          <a:lstStyle/>
+          <a:p>
+            <a:pPr algn="l"/>
+            <a:r>
+              <a:rPr sz="1600" b="0">
+                <a:solidFill>
+                  <a:srgbClr val="334155"/>
+                </a:solidFill>
+                <a:latin typeface="Calibri"/>
+              </a:rPr>
+              <a:t>Hindade kogusumma?</a:t>
+            </a:r>
+          </a:p>
+        </p:txBody>
+      </p:sp>
+      <p:sp>
+        <p:nvSpPr>
+          <p:cNvPr id="21" name="Rounded Rectangle 20"/>
+          <p:cNvSpPr/>
+          <p:nvPr/>
+        </p:nvSpPr>
+        <p:spPr>
+          <a:xfrm>
+            <a:off x="365760" y="4937759"/>
+            <a:ext cx="11430000" cy="1143000"/>
+          </a:xfrm>
+          <a:prstGeom prst="roundRect">
+            <a:avLst>
+              <a:gd name="adj" fmla="val 8000"/>
+            </a:avLst>
+          </a:prstGeom>
+          <a:solidFill>
+            <a:srgbClr val="FFFFFF"/>
+          </a:solidFill>
+          <a:ln>
+            <a:noFill/>
+          </a:ln>
+          <a:effectLst/>
+        </p:spPr>
+        <p:style>
+          <a:lnRef idx="1">
+            <a:schemeClr val="accent1"/>
+          </a:lnRef>
+          <a:fillRef idx="3">
+            <a:schemeClr val="accent1"/>
+          </a:fillRef>
+          <a:effectRef idx="2">
+            <a:schemeClr val="accent1"/>
+          </a:effectRef>
+          <a:fontRef idx="minor">
+            <a:schemeClr val="lt1"/>
+          </a:fontRef>
+        </p:style>
+        <p:txBody>
+          <a:bodyPr rtlCol="0" anchor="ctr"/>
+          <a:lstStyle/>
+          <a:p>
+            <a:pPr algn="ctr"/>
+            <a:endParaRPr/>
+          </a:p>
+        </p:txBody>
+      </p:sp>
+      <p:sp>
+        <p:nvSpPr>
+          <p:cNvPr id="22" name="TextBox 21"/>
+          <p:cNvSpPr txBox="1"/>
+          <p:nvPr/>
+        </p:nvSpPr>
+        <p:spPr>
+          <a:xfrm>
+            <a:off x="640080" y="4937759"/>
+            <a:ext cx="3200400" cy="1143000"/>
+          </a:xfrm>
+          <a:prstGeom prst="rect">
+            <a:avLst/>
+          </a:prstGeom>
+          <a:noFill/>
+        </p:spPr>
+        <p:txBody>
+          <a:bodyPr wrap="square" anchor="ctr">
+            <a:spAutoFit/>
+          </a:bodyPr>
+          <a:lstStyle/>
+          <a:p>
+            <a:pPr algn="l"/>
+            <a:r>
+              <a:rPr sz="2000" b="1">
+                <a:solidFill>
+                  <a:srgbClr val="0F203E"/>
+                </a:solidFill>
+                <a:latin typeface="Calibri"/>
+              </a:rPr>
+              <a:t>AVG(hind)</a:t>
+            </a:r>
+          </a:p>
+        </p:txBody>
+      </p:sp>
+      <p:sp>
+        <p:nvSpPr>
+          <p:cNvPr id="23" name="TextBox 22"/>
+          <p:cNvSpPr txBox="1"/>
+          <p:nvPr/>
+        </p:nvSpPr>
+        <p:spPr>
+          <a:xfrm>
+            <a:off x="3931920" y="4937759"/>
+            <a:ext cx="2286000" cy="1143000"/>
+          </a:xfrm>
+          <a:prstGeom prst="rect">
+            <a:avLst/>
+          </a:prstGeom>
+          <a:noFill/>
+        </p:spPr>
+        <p:txBody>
+          <a:bodyPr wrap="square" anchor="ctr">
+            <a:spAutoFit/>
+          </a:bodyPr>
+          <a:lstStyle/>
+          <a:p>
+            <a:pPr algn="l"/>
+            <a:r>
+              <a:rPr sz="1600" b="1">
+                <a:solidFill>
+                  <a:srgbClr val="007073"/>
+                </a:solidFill>
+                <a:latin typeface="Calibri"/>
+              </a:rPr>
+              <a:t>keskmine</a:t>
+            </a:r>
+          </a:p>
+        </p:txBody>
+      </p:sp>
+      <p:sp>
+        <p:nvSpPr>
+          <p:cNvPr id="24" name="TextBox 23"/>
+          <p:cNvSpPr txBox="1"/>
+          <p:nvPr/>
+        </p:nvSpPr>
+        <p:spPr>
+          <a:xfrm>
+            <a:off x="6309360" y="4937759"/>
+            <a:ext cx="5212080" cy="1143000"/>
+          </a:xfrm>
+          <a:prstGeom prst="rect">
+            <a:avLst/>
+          </a:prstGeom>
+          <a:noFill/>
+        </p:spPr>
+        <p:txBody>
+          <a:bodyPr wrap="square" anchor="ctr">
+            <a:spAutoFit/>
+          </a:bodyPr>
+          <a:lstStyle/>
+          <a:p>
+            <a:pPr algn="l"/>
+            <a:r>
+              <a:rPr sz="1600" b="0">
+                <a:solidFill>
+                  <a:srgbClr val="334155"/>
+                </a:solidFill>
+                <a:latin typeface="Calibri"/>
+              </a:rPr>
+              <a:t>Keskmine tootehind?</a:t>
             </a:r>
           </a:p>
         </p:txBody>
@@ -35429,8 +36357,8 @@
         </p:nvSpPr>
         <p:spPr>
           <a:xfrm>
-            <a:off x="365760" y="164592"/>
-            <a:ext cx="11430000" cy="548640"/>
+            <a:off x="365760" y="208079"/>
+            <a:ext cx="11430000" cy="461665"/>
           </a:xfrm>
           <a:prstGeom prst="rect">
             <a:avLst/>
@@ -35443,16 +36371,65 @@
           </a:bodyPr>
           <a:lstStyle/>
           <a:p>
-            <a:pPr algn="l"/>
-            <a:r>
-              <a:rPr sz="2400" b="1">
+            <a:r>
+              <a:rPr sz="2400" b="1" dirty="0">
                 <a:solidFill>
                   <a:srgbClr val="FFFFFF"/>
                 </a:solidFill>
                 <a:latin typeface="Calibri"/>
               </a:rPr>
-              <a:t>MIN, MAX, SUM, AVG  (~15 min)</a:t>
-            </a:r>
+              <a:t>MIN ja MAX </a:t>
+            </a:r>
+            <a:r>
+              <a:rPr sz="2400" b="1" dirty="0" err="1">
+                <a:solidFill>
+                  <a:srgbClr val="FFFFFF"/>
+                </a:solidFill>
+                <a:latin typeface="Calibri"/>
+              </a:rPr>
+              <a:t>ühes</a:t>
+            </a:r>
+            <a:r>
+              <a:rPr sz="2400" b="1" dirty="0">
+                <a:solidFill>
+                  <a:srgbClr val="FFFFFF"/>
+                </a:solidFill>
+                <a:latin typeface="Calibri"/>
+              </a:rPr>
+              <a:t> </a:t>
+            </a:r>
+            <a:r>
+              <a:rPr sz="2400" b="1" dirty="0" err="1">
+                <a:solidFill>
+                  <a:srgbClr val="FFFFFF"/>
+                </a:solidFill>
+                <a:latin typeface="Calibri"/>
+              </a:rPr>
+              <a:t>päringus</a:t>
+            </a:r>
+            <a:r>
+              <a:rPr lang="en-GB" sz="2400" b="1" dirty="0">
+                <a:solidFill>
+                  <a:srgbClr val="FFFFFF"/>
+                </a:solidFill>
+                <a:latin typeface="Calibri"/>
+              </a:rPr>
+              <a:t> </a:t>
+            </a:r>
+            <a:r>
+              <a:rPr lang="en-GB" sz="2400" b="1" dirty="0">
+                <a:solidFill>
+                  <a:srgbClr val="92D050"/>
+                </a:solidFill>
+              </a:rPr>
+              <a:t>NÄITAN </a:t>
+            </a:r>
+            <a:endParaRPr sz="2400" b="1" dirty="0">
+              <a:solidFill>
+                <a:srgbClr val="FFFFFF"/>
+              </a:solidFill>
+              <a:latin typeface="Calibri"/>
+            </a:endParaRPr>
           </a:p>
         </p:txBody>
       </p:sp>
@@ -35486,7 +36463,7 @@
                 </a:solidFill>
                 <a:latin typeface="Calibri"/>
               </a:rPr>
-              <a:t>10</a:t>
+              <a:t>11</a:t>
             </a:r>
           </a:p>
         </p:txBody>
@@ -35500,7 +36477,7 @@
         <p:spPr>
           <a:xfrm>
             <a:off x="365760" y="1097280"/>
-            <a:ext cx="11430000" cy="1143000"/>
+            <a:ext cx="11430000" cy="1554480"/>
           </a:xfrm>
           <a:prstGeom prst="roundRect">
             <a:avLst>
@@ -35508,7 +36485,7 @@
             </a:avLst>
           </a:prstGeom>
           <a:solidFill>
-            <a:srgbClr val="FFFFFF"/>
+            <a:srgbClr val="0F172A"/>
           </a:solidFill>
           <a:ln>
             <a:noFill/>
@@ -35546,8 +36523,8 @@
         </p:nvSpPr>
         <p:spPr>
           <a:xfrm>
-            <a:off x="640080" y="1097280"/>
-            <a:ext cx="3200400" cy="1143000"/>
+            <a:off x="530352" y="1207007"/>
+            <a:ext cx="11100816" cy="1254189"/>
           </a:xfrm>
           <a:prstGeom prst="rect">
             <a:avLst/>
@@ -35555,104 +36532,275 @@
           <a:noFill/>
         </p:spPr>
         <p:txBody>
-          <a:bodyPr wrap="square" anchor="ctr">
+          <a:bodyPr wrap="square">
             <a:spAutoFit/>
           </a:bodyPr>
           <a:lstStyle/>
           <a:p>
-            <a:pPr algn="l"/>
-            <a:r>
-              <a:rPr sz="2000" b="1">
-                <a:solidFill>
-                  <a:srgbClr val="0F203E"/>
-                </a:solidFill>
-                <a:latin typeface="Calibri"/>
-              </a:rPr>
-              <a:t>MIN(hind)</a:t>
-            </a:r>
-          </a:p>
-        </p:txBody>
-      </p:sp>
-      <p:sp>
-        <p:nvSpPr>
-          <p:cNvPr id="11" name="TextBox 10"/>
-          <p:cNvSpPr txBox="1"/>
-          <p:nvPr/>
-        </p:nvSpPr>
-        <p:spPr>
-          <a:xfrm>
-            <a:off x="3931920" y="1097280"/>
-            <a:ext cx="2286000" cy="1143000"/>
-          </a:xfrm>
-          <a:prstGeom prst="rect">
-            <a:avLst/>
-          </a:prstGeom>
-          <a:noFill/>
-        </p:spPr>
-        <p:txBody>
-          <a:bodyPr wrap="square" anchor="ctr">
-            <a:spAutoFit/>
-          </a:bodyPr>
-          <a:lstStyle/>
-          <a:p>
-            <a:pPr algn="l"/>
-            <a:r>
-              <a:rPr sz="1600" b="1">
-                <a:solidFill>
-                  <a:srgbClr val="007073"/>
-                </a:solidFill>
-                <a:latin typeface="Calibri"/>
-              </a:rPr>
-              <a:t>väikseim</a:t>
-            </a:r>
-          </a:p>
-        </p:txBody>
-      </p:sp>
-      <p:sp>
-        <p:nvSpPr>
-          <p:cNvPr id="12" name="TextBox 11"/>
-          <p:cNvSpPr txBox="1"/>
-          <p:nvPr/>
-        </p:nvSpPr>
-        <p:spPr>
-          <a:xfrm>
-            <a:off x="6309360" y="1097280"/>
-            <a:ext cx="5212080" cy="1143000"/>
-          </a:xfrm>
-          <a:prstGeom prst="rect">
-            <a:avLst/>
-          </a:prstGeom>
-          <a:noFill/>
-        </p:spPr>
-        <p:txBody>
-          <a:bodyPr wrap="square" anchor="ctr">
-            <a:spAutoFit/>
-          </a:bodyPr>
-          <a:lstStyle/>
-          <a:p>
-            <a:pPr algn="l"/>
-            <a:r>
-              <a:rPr sz="1600" b="0">
-                <a:solidFill>
-                  <a:srgbClr val="334155"/>
-                </a:solidFill>
-                <a:latin typeface="Calibri"/>
-              </a:rPr>
-              <a:t>Odavaim toode?</a:t>
-            </a:r>
-          </a:p>
-        </p:txBody>
-      </p:sp>
-      <p:sp>
-        <p:nvSpPr>
-          <p:cNvPr id="13" name="Rounded Rectangle 12"/>
+            <a:pPr>
+              <a:spcAft>
+                <a:spcPts val="300"/>
+              </a:spcAft>
+            </a:pPr>
+            <a:r>
+              <a:rPr sz="1700" b="0" dirty="0">
+                <a:solidFill>
+                  <a:srgbClr val="E2E8F0"/>
+                </a:solidFill>
+                <a:latin typeface="Consolas"/>
+              </a:rPr>
+              <a:t>SELECT </a:t>
+            </a:r>
+            <a:endParaRPr lang="en-GB" sz="1700" b="0" dirty="0">
+              <a:solidFill>
+                <a:srgbClr val="E2E8F0"/>
+              </a:solidFill>
+              <a:latin typeface="Consolas"/>
+            </a:endParaRPr>
+          </a:p>
+          <a:p>
+            <a:pPr>
+              <a:spcAft>
+                <a:spcPts val="300"/>
+              </a:spcAft>
+            </a:pPr>
+            <a:r>
+              <a:rPr lang="en-GB" sz="1700" b="0" dirty="0">
+                <a:solidFill>
+                  <a:srgbClr val="E2E8F0"/>
+                </a:solidFill>
+                <a:latin typeface="Consolas"/>
+              </a:rPr>
+              <a:t>	</a:t>
+            </a:r>
+            <a:r>
+              <a:rPr sz="1700" b="0" dirty="0">
+                <a:solidFill>
+                  <a:srgbClr val="E2E8F0"/>
+                </a:solidFill>
+                <a:latin typeface="Consolas"/>
+              </a:rPr>
+              <a:t>MIN(hind) AS </a:t>
+            </a:r>
+            <a:r>
+              <a:rPr sz="1700" b="0" dirty="0" err="1">
+                <a:solidFill>
+                  <a:srgbClr val="E2E8F0"/>
+                </a:solidFill>
+                <a:latin typeface="Consolas"/>
+              </a:rPr>
+              <a:t>odavaim</a:t>
+            </a:r>
+            <a:r>
+              <a:rPr sz="1700" b="0" dirty="0">
+                <a:solidFill>
+                  <a:srgbClr val="E2E8F0"/>
+                </a:solidFill>
+                <a:latin typeface="Consolas"/>
+              </a:rPr>
+              <a:t>,</a:t>
+            </a:r>
+            <a:r>
+              <a:rPr lang="en-GB" sz="1700" b="0" dirty="0">
+                <a:solidFill>
+                  <a:srgbClr val="E2E8F0"/>
+                </a:solidFill>
+                <a:latin typeface="Consolas"/>
+              </a:rPr>
+              <a:t> ----</a:t>
+            </a:r>
+            <a:r>
+              <a:rPr lang="en-GB" sz="1700" b="0" dirty="0" err="1">
+                <a:solidFill>
+                  <a:srgbClr val="E2E8F0"/>
+                </a:solidFill>
+                <a:latin typeface="Consolas"/>
+              </a:rPr>
+              <a:t>kõige</a:t>
+            </a:r>
+            <a:r>
+              <a:rPr lang="en-GB" sz="1700" b="0" dirty="0">
+                <a:solidFill>
+                  <a:srgbClr val="E2E8F0"/>
+                </a:solidFill>
+                <a:latin typeface="Consolas"/>
+              </a:rPr>
+              <a:t> </a:t>
+            </a:r>
+            <a:r>
+              <a:rPr lang="en-GB" sz="1700" b="0" dirty="0" err="1">
+                <a:solidFill>
+                  <a:srgbClr val="E2E8F0"/>
+                </a:solidFill>
+                <a:latin typeface="Consolas"/>
+              </a:rPr>
+              <a:t>odavam</a:t>
+            </a:r>
+            <a:r>
+              <a:rPr lang="en-GB" sz="1700" b="0" dirty="0">
+                <a:solidFill>
+                  <a:srgbClr val="E2E8F0"/>
+                </a:solidFill>
+                <a:latin typeface="Consolas"/>
+              </a:rPr>
+              <a:t> </a:t>
+            </a:r>
+            <a:r>
+              <a:rPr sz="1700" b="0" dirty="0">
+                <a:solidFill>
+                  <a:srgbClr val="E2E8F0"/>
+                </a:solidFill>
+                <a:latin typeface="Consolas"/>
+              </a:rPr>
+              <a:t> </a:t>
+            </a:r>
+            <a:endParaRPr lang="en-GB" sz="1700" b="0" dirty="0">
+              <a:solidFill>
+                <a:srgbClr val="E2E8F0"/>
+              </a:solidFill>
+              <a:latin typeface="Consolas"/>
+            </a:endParaRPr>
+          </a:p>
+          <a:p>
+            <a:pPr>
+              <a:spcAft>
+                <a:spcPts val="300"/>
+              </a:spcAft>
+            </a:pPr>
+            <a:r>
+              <a:rPr lang="en-GB" sz="1700" b="0" dirty="0">
+                <a:solidFill>
+                  <a:srgbClr val="E2E8F0"/>
+                </a:solidFill>
+                <a:latin typeface="Consolas"/>
+              </a:rPr>
+              <a:t>	</a:t>
+            </a:r>
+            <a:r>
+              <a:rPr sz="1700" b="0" dirty="0">
+                <a:solidFill>
+                  <a:srgbClr val="E2E8F0"/>
+                </a:solidFill>
+                <a:latin typeface="Consolas"/>
+              </a:rPr>
+              <a:t>MAX(hind) AS </a:t>
+            </a:r>
+            <a:r>
+              <a:rPr sz="1700" b="0" dirty="0" err="1">
+                <a:solidFill>
+                  <a:srgbClr val="E2E8F0"/>
+                </a:solidFill>
+                <a:latin typeface="Consolas"/>
+              </a:rPr>
+              <a:t>kalleim</a:t>
+            </a:r>
+            <a:r>
+              <a:rPr lang="en-GB" sz="1700" b="0" dirty="0">
+                <a:solidFill>
+                  <a:srgbClr val="E2E8F0"/>
+                </a:solidFill>
+                <a:latin typeface="Consolas"/>
+              </a:rPr>
+              <a:t> ---</a:t>
+            </a:r>
+            <a:r>
+              <a:rPr lang="en-GB" sz="1700" b="0" dirty="0" err="1">
+                <a:solidFill>
+                  <a:srgbClr val="E2E8F0"/>
+                </a:solidFill>
+                <a:latin typeface="Consolas"/>
+              </a:rPr>
+              <a:t>ja</a:t>
+            </a:r>
+            <a:r>
+              <a:rPr lang="en-GB" sz="1700" b="0" dirty="0">
+                <a:solidFill>
+                  <a:srgbClr val="E2E8F0"/>
+                </a:solidFill>
+                <a:latin typeface="Consolas"/>
+              </a:rPr>
+              <a:t> </a:t>
+            </a:r>
+            <a:r>
+              <a:rPr lang="en-GB" sz="1700" b="0" dirty="0" err="1">
+                <a:solidFill>
+                  <a:srgbClr val="E2E8F0"/>
+                </a:solidFill>
+                <a:latin typeface="Consolas"/>
+              </a:rPr>
+              <a:t>kõige</a:t>
+            </a:r>
+            <a:r>
+              <a:rPr lang="en-GB" sz="1700" b="0" dirty="0">
+                <a:solidFill>
+                  <a:srgbClr val="E2E8F0"/>
+                </a:solidFill>
+                <a:latin typeface="Consolas"/>
+              </a:rPr>
+              <a:t> </a:t>
+            </a:r>
+            <a:r>
+              <a:rPr lang="en-GB" sz="1700" b="0" dirty="0" err="1">
+                <a:solidFill>
+                  <a:srgbClr val="E2E8F0"/>
+                </a:solidFill>
+                <a:latin typeface="Consolas"/>
+              </a:rPr>
+              <a:t>kallim</a:t>
+            </a:r>
+            <a:r>
+              <a:rPr lang="en-GB" sz="1700" b="0" dirty="0">
+                <a:solidFill>
+                  <a:srgbClr val="E2E8F0"/>
+                </a:solidFill>
+                <a:latin typeface="Consolas"/>
+              </a:rPr>
+              <a:t> </a:t>
+            </a:r>
+            <a:r>
+              <a:rPr lang="en-GB" sz="1700" b="0" dirty="0" err="1">
+                <a:solidFill>
+                  <a:srgbClr val="E2E8F0"/>
+                </a:solidFill>
+                <a:latin typeface="Consolas"/>
+              </a:rPr>
+              <a:t>tootehind</a:t>
+            </a:r>
+            <a:endParaRPr sz="1700" b="0" dirty="0">
+              <a:solidFill>
+                <a:srgbClr val="E2E8F0"/>
+              </a:solidFill>
+              <a:latin typeface="Consolas"/>
+            </a:endParaRPr>
+          </a:p>
+          <a:p>
+            <a:pPr>
+              <a:spcAft>
+                <a:spcPts val="300"/>
+              </a:spcAft>
+            </a:pPr>
+            <a:r>
+              <a:rPr sz="1700" b="0" dirty="0">
+                <a:solidFill>
+                  <a:srgbClr val="E2E8F0"/>
+                </a:solidFill>
+                <a:latin typeface="Consolas"/>
+              </a:rPr>
+              <a:t>FROM tooted;</a:t>
+            </a:r>
+          </a:p>
+        </p:txBody>
+      </p:sp>
+      <p:sp>
+        <p:nvSpPr>
+          <p:cNvPr id="11" name="Rounded Rectangle 10"/>
           <p:cNvSpPr/>
           <p:nvPr/>
         </p:nvSpPr>
         <p:spPr>
           <a:xfrm>
-            <a:off x="365760" y="2377439"/>
-            <a:ext cx="11430000" cy="1143000"/>
+            <a:off x="365760" y="2880360"/>
+            <a:ext cx="11430000" cy="1417320"/>
           </a:xfrm>
           <a:prstGeom prst="roundRect">
             <a:avLst>
@@ -35660,7 +36808,7 @@
             </a:avLst>
           </a:prstGeom>
           <a:solidFill>
-            <a:srgbClr val="FFFFFF"/>
+            <a:srgbClr val="0F172A"/>
           </a:solidFill>
           <a:ln>
             <a:noFill/>
@@ -35692,14 +36840,14 @@
       </p:sp>
       <p:sp>
         <p:nvSpPr>
-          <p:cNvPr id="14" name="TextBox 13"/>
+          <p:cNvPr id="12" name="TextBox 11"/>
           <p:cNvSpPr txBox="1"/>
           <p:nvPr/>
         </p:nvSpPr>
         <p:spPr>
           <a:xfrm>
-            <a:off x="640080" y="2377439"/>
-            <a:ext cx="3200400" cy="1143000"/>
+            <a:off x="530352" y="2990088"/>
+            <a:ext cx="11100816" cy="954107"/>
           </a:xfrm>
           <a:prstGeom prst="rect">
             <a:avLst/>
@@ -35707,34 +36855,100 @@
           <a:noFill/>
         </p:spPr>
         <p:txBody>
-          <a:bodyPr wrap="square" anchor="ctr">
+          <a:bodyPr wrap="square">
             <a:spAutoFit/>
           </a:bodyPr>
           <a:lstStyle/>
           <a:p>
-            <a:pPr algn="l"/>
-            <a:r>
-              <a:rPr sz="2000" b="1">
-                <a:solidFill>
-                  <a:srgbClr val="0F203E"/>
-                </a:solidFill>
-                <a:latin typeface="Calibri"/>
-              </a:rPr>
-              <a:t>MAX(hind)</a:t>
-            </a:r>
-          </a:p>
-        </p:txBody>
-      </p:sp>
-      <p:sp>
-        <p:nvSpPr>
-          <p:cNvPr id="15" name="TextBox 14"/>
+            <a:pPr>
+              <a:spcAft>
+                <a:spcPts val="300"/>
+              </a:spcAft>
+            </a:pPr>
+            <a:r>
+              <a:rPr sz="1700" b="0" dirty="0">
+                <a:solidFill>
+                  <a:srgbClr val="E2E8F0"/>
+                </a:solidFill>
+                <a:latin typeface="Consolas"/>
+              </a:rPr>
+              <a:t>SELECT </a:t>
+            </a:r>
+            <a:endParaRPr lang="en-GB" sz="1700" b="0" dirty="0">
+              <a:solidFill>
+                <a:srgbClr val="E2E8F0"/>
+              </a:solidFill>
+              <a:latin typeface="Consolas"/>
+            </a:endParaRPr>
+          </a:p>
+          <a:p>
+            <a:pPr>
+              <a:spcAft>
+                <a:spcPts val="300"/>
+              </a:spcAft>
+            </a:pPr>
+            <a:r>
+              <a:rPr lang="en-GB" sz="1700" b="0" dirty="0">
+                <a:solidFill>
+                  <a:srgbClr val="E2E8F0"/>
+                </a:solidFill>
+                <a:latin typeface="Consolas"/>
+              </a:rPr>
+              <a:t>	</a:t>
+            </a:r>
+            <a:r>
+              <a:rPr sz="1700" b="0" dirty="0">
+                <a:solidFill>
+                  <a:srgbClr val="E2E8F0"/>
+                </a:solidFill>
+                <a:latin typeface="Consolas"/>
+              </a:rPr>
+              <a:t>ROUND(AVG(hind), 2) AS </a:t>
+            </a:r>
+            <a:r>
+              <a:rPr sz="1700" b="0" dirty="0" err="1">
+                <a:solidFill>
+                  <a:srgbClr val="E2E8F0"/>
+                </a:solidFill>
+                <a:latin typeface="Consolas"/>
+              </a:rPr>
+              <a:t>keskmine_hind</a:t>
+            </a:r>
+            <a:endParaRPr sz="1700" b="0" dirty="0">
+              <a:solidFill>
+                <a:srgbClr val="E2E8F0"/>
+              </a:solidFill>
+              <a:latin typeface="Consolas"/>
+            </a:endParaRPr>
+          </a:p>
+          <a:p>
+            <a:pPr>
+              <a:spcAft>
+                <a:spcPts val="300"/>
+              </a:spcAft>
+            </a:pPr>
+            <a:r>
+              <a:rPr sz="1700" b="0" dirty="0">
+                <a:solidFill>
+                  <a:srgbClr val="E2E8F0"/>
+                </a:solidFill>
+                <a:latin typeface="Consolas"/>
+              </a:rPr>
+              <a:t>FROM tooted;</a:t>
+            </a:r>
+          </a:p>
+        </p:txBody>
+      </p:sp>
+      <p:sp>
+        <p:nvSpPr>
+          <p:cNvPr id="13" name="TextBox 12"/>
           <p:cNvSpPr txBox="1"/>
           <p:nvPr/>
         </p:nvSpPr>
         <p:spPr>
           <a:xfrm>
-            <a:off x="3931920" y="2377439"/>
-            <a:ext cx="2286000" cy="1143000"/>
+            <a:off x="457200" y="4526280"/>
+            <a:ext cx="11247120" cy="1645920"/>
           </a:xfrm>
           <a:prstGeom prst="rect">
             <a:avLst/>
@@ -35742,359 +36956,20 @@
           <a:noFill/>
         </p:spPr>
         <p:txBody>
-          <a:bodyPr wrap="square" anchor="ctr">
+          <a:bodyPr wrap="square" anchor="t">
             <a:spAutoFit/>
           </a:bodyPr>
           <a:lstStyle/>
           <a:p>
             <a:pPr algn="l"/>
             <a:r>
-              <a:rPr sz="1600" b="1">
-                <a:solidFill>
-                  <a:srgbClr val="007073"/>
-                </a:solidFill>
-                <a:latin typeface="Calibri"/>
-              </a:rPr>
-              <a:t>suurim</a:t>
-            </a:r>
-          </a:p>
-        </p:txBody>
-      </p:sp>
-      <p:sp>
-        <p:nvSpPr>
-          <p:cNvPr id="16" name="TextBox 15"/>
-          <p:cNvSpPr txBox="1"/>
-          <p:nvPr/>
-        </p:nvSpPr>
-        <p:spPr>
-          <a:xfrm>
-            <a:off x="6309360" y="2377439"/>
-            <a:ext cx="5212080" cy="1143000"/>
-          </a:xfrm>
-          <a:prstGeom prst="rect">
-            <a:avLst/>
-          </a:prstGeom>
-          <a:noFill/>
-        </p:spPr>
-        <p:txBody>
-          <a:bodyPr wrap="square" anchor="ctr">
-            <a:spAutoFit/>
-          </a:bodyPr>
-          <a:lstStyle/>
-          <a:p>
-            <a:pPr algn="l"/>
-            <a:r>
               <a:rPr sz="1600" b="0">
                 <a:solidFill>
                   <a:srgbClr val="334155"/>
                 </a:solidFill>
                 <a:latin typeface="Calibri"/>
               </a:rPr>
-              <a:t>Kalleim toode?</a:t>
-            </a:r>
-          </a:p>
-        </p:txBody>
-      </p:sp>
-      <p:sp>
-        <p:nvSpPr>
-          <p:cNvPr id="17" name="Rounded Rectangle 16"/>
-          <p:cNvSpPr/>
-          <p:nvPr/>
-        </p:nvSpPr>
-        <p:spPr>
-          <a:xfrm>
-            <a:off x="365760" y="3657600"/>
-            <a:ext cx="11430000" cy="1143000"/>
-          </a:xfrm>
-          <a:prstGeom prst="roundRect">
-            <a:avLst>
-              <a:gd name="adj" fmla="val 8000"/>
-            </a:avLst>
-          </a:prstGeom>
-          <a:solidFill>
-            <a:srgbClr val="FFFFFF"/>
-          </a:solidFill>
-          <a:ln>
-            <a:noFill/>
-          </a:ln>
-          <a:effectLst/>
-        </p:spPr>
-        <p:style>
-          <a:lnRef idx="1">
-            <a:schemeClr val="accent1"/>
-          </a:lnRef>
-          <a:fillRef idx="3">
-            <a:schemeClr val="accent1"/>
-          </a:fillRef>
-          <a:effectRef idx="2">
-            <a:schemeClr val="accent1"/>
-          </a:effectRef>
-          <a:fontRef idx="minor">
-            <a:schemeClr val="lt1"/>
-          </a:fontRef>
-        </p:style>
-        <p:txBody>
-          <a:bodyPr rtlCol="0" anchor="ctr"/>
-          <a:lstStyle/>
-          <a:p>
-            <a:pPr algn="ctr"/>
-            <a:endParaRPr/>
-          </a:p>
-        </p:txBody>
-      </p:sp>
-      <p:sp>
-        <p:nvSpPr>
-          <p:cNvPr id="18" name="TextBox 17"/>
-          <p:cNvSpPr txBox="1"/>
-          <p:nvPr/>
-        </p:nvSpPr>
-        <p:spPr>
-          <a:xfrm>
-            <a:off x="640080" y="3657600"/>
-            <a:ext cx="3200400" cy="1143000"/>
-          </a:xfrm>
-          <a:prstGeom prst="rect">
-            <a:avLst/>
-          </a:prstGeom>
-          <a:noFill/>
-        </p:spPr>
-        <p:txBody>
-          <a:bodyPr wrap="square" anchor="ctr">
-            <a:spAutoFit/>
-          </a:bodyPr>
-          <a:lstStyle/>
-          <a:p>
-            <a:pPr algn="l"/>
-            <a:r>
-              <a:rPr sz="2000" b="1">
-                <a:solidFill>
-                  <a:srgbClr val="0F203E"/>
-                </a:solidFill>
-                <a:latin typeface="Calibri"/>
-              </a:rPr>
-              <a:t>SUM(hind)</a:t>
-            </a:r>
-          </a:p>
-        </p:txBody>
-      </p:sp>
-      <p:sp>
-        <p:nvSpPr>
-          <p:cNvPr id="19" name="TextBox 18"/>
-          <p:cNvSpPr txBox="1"/>
-          <p:nvPr/>
-        </p:nvSpPr>
-        <p:spPr>
-          <a:xfrm>
-            <a:off x="3931920" y="3657600"/>
-            <a:ext cx="2286000" cy="1143000"/>
-          </a:xfrm>
-          <a:prstGeom prst="rect">
-            <a:avLst/>
-          </a:prstGeom>
-          <a:noFill/>
-        </p:spPr>
-        <p:txBody>
-          <a:bodyPr wrap="square" anchor="ctr">
-            <a:spAutoFit/>
-          </a:bodyPr>
-          <a:lstStyle/>
-          <a:p>
-            <a:pPr algn="l"/>
-            <a:r>
-              <a:rPr sz="1600" b="1">
-                <a:solidFill>
-                  <a:srgbClr val="007073"/>
-                </a:solidFill>
-                <a:latin typeface="Calibri"/>
-              </a:rPr>
-              <a:t>summa</a:t>
-            </a:r>
-          </a:p>
-        </p:txBody>
-      </p:sp>
-      <p:sp>
-        <p:nvSpPr>
-          <p:cNvPr id="20" name="TextBox 19"/>
-          <p:cNvSpPr txBox="1"/>
-          <p:nvPr/>
-        </p:nvSpPr>
-        <p:spPr>
-          <a:xfrm>
-            <a:off x="6309360" y="3657600"/>
-            <a:ext cx="5212080" cy="1143000"/>
-          </a:xfrm>
-          <a:prstGeom prst="rect">
-            <a:avLst/>
-          </a:prstGeom>
-          <a:noFill/>
-        </p:spPr>
-        <p:txBody>
-          <a:bodyPr wrap="square" anchor="ctr">
-            <a:spAutoFit/>
-          </a:bodyPr>
-          <a:lstStyle/>
-          <a:p>
-            <a:pPr algn="l"/>
-            <a:r>
-              <a:rPr sz="1600" b="0">
-                <a:solidFill>
-                  <a:srgbClr val="334155"/>
-                </a:solidFill>
-                <a:latin typeface="Calibri"/>
-              </a:rPr>
-              <a:t>Hindade kogusumma?</a:t>
-            </a:r>
-          </a:p>
-        </p:txBody>
-      </p:sp>
-      <p:sp>
-        <p:nvSpPr>
-          <p:cNvPr id="21" name="Rounded Rectangle 20"/>
-          <p:cNvSpPr/>
-          <p:nvPr/>
-        </p:nvSpPr>
-        <p:spPr>
-          <a:xfrm>
-            <a:off x="365760" y="4937759"/>
-            <a:ext cx="11430000" cy="1143000"/>
-          </a:xfrm>
-          <a:prstGeom prst="roundRect">
-            <a:avLst>
-              <a:gd name="adj" fmla="val 8000"/>
-            </a:avLst>
-          </a:prstGeom>
-          <a:solidFill>
-            <a:srgbClr val="FFFFFF"/>
-          </a:solidFill>
-          <a:ln>
-            <a:noFill/>
-          </a:ln>
-          <a:effectLst/>
-        </p:spPr>
-        <p:style>
-          <a:lnRef idx="1">
-            <a:schemeClr val="accent1"/>
-          </a:lnRef>
-          <a:fillRef idx="3">
-            <a:schemeClr val="accent1"/>
-          </a:fillRef>
-          <a:effectRef idx="2">
-            <a:schemeClr val="accent1"/>
-          </a:effectRef>
-          <a:fontRef idx="minor">
-            <a:schemeClr val="lt1"/>
-          </a:fontRef>
-        </p:style>
-        <p:txBody>
-          <a:bodyPr rtlCol="0" anchor="ctr"/>
-          <a:lstStyle/>
-          <a:p>
-            <a:pPr algn="ctr"/>
-            <a:endParaRPr/>
-          </a:p>
-        </p:txBody>
-      </p:sp>
-      <p:sp>
-        <p:nvSpPr>
-          <p:cNvPr id="22" name="TextBox 21"/>
-          <p:cNvSpPr txBox="1"/>
-          <p:nvPr/>
-        </p:nvSpPr>
-        <p:spPr>
-          <a:xfrm>
-            <a:off x="640080" y="4937759"/>
-            <a:ext cx="3200400" cy="1143000"/>
-          </a:xfrm>
-          <a:prstGeom prst="rect">
-            <a:avLst/>
-          </a:prstGeom>
-          <a:noFill/>
-        </p:spPr>
-        <p:txBody>
-          <a:bodyPr wrap="square" anchor="ctr">
-            <a:spAutoFit/>
-          </a:bodyPr>
-          <a:lstStyle/>
-          <a:p>
-            <a:pPr algn="l"/>
-            <a:r>
-              <a:rPr sz="2000" b="1">
-                <a:solidFill>
-                  <a:srgbClr val="0F203E"/>
-                </a:solidFill>
-                <a:latin typeface="Calibri"/>
-              </a:rPr>
-              <a:t>AVG(hind)</a:t>
-            </a:r>
-          </a:p>
-        </p:txBody>
-      </p:sp>
-      <p:sp>
-        <p:nvSpPr>
-          <p:cNvPr id="23" name="TextBox 22"/>
-          <p:cNvSpPr txBox="1"/>
-          <p:nvPr/>
-        </p:nvSpPr>
-        <p:spPr>
-          <a:xfrm>
-            <a:off x="3931920" y="4937759"/>
-            <a:ext cx="2286000" cy="1143000"/>
-          </a:xfrm>
-          <a:prstGeom prst="rect">
-            <a:avLst/>
-          </a:prstGeom>
-          <a:noFill/>
-        </p:spPr>
-        <p:txBody>
-          <a:bodyPr wrap="square" anchor="ctr">
-            <a:spAutoFit/>
-          </a:bodyPr>
-          <a:lstStyle/>
-          <a:p>
-            <a:pPr algn="l"/>
-            <a:r>
-              <a:rPr sz="1600" b="1">
-                <a:solidFill>
-                  <a:srgbClr val="007073"/>
-                </a:solidFill>
-                <a:latin typeface="Calibri"/>
-              </a:rPr>
-              <a:t>keskmine</a:t>
-            </a:r>
-          </a:p>
-        </p:txBody>
-      </p:sp>
-      <p:sp>
-        <p:nvSpPr>
-          <p:cNvPr id="24" name="TextBox 23"/>
-          <p:cNvSpPr txBox="1"/>
-          <p:nvPr/>
-        </p:nvSpPr>
-        <p:spPr>
-          <a:xfrm>
-            <a:off x="6309360" y="4937759"/>
-            <a:ext cx="5212080" cy="1143000"/>
-          </a:xfrm>
-          <a:prstGeom prst="rect">
-            <a:avLst/>
-          </a:prstGeom>
-          <a:noFill/>
-        </p:spPr>
-        <p:txBody>
-          <a:bodyPr wrap="square" anchor="ctr">
-            <a:spAutoFit/>
-          </a:bodyPr>
-          <a:lstStyle/>
-          <a:p>
-            <a:pPr algn="l"/>
-            <a:r>
-              <a:rPr sz="1600" b="0">
-                <a:solidFill>
-                  <a:srgbClr val="334155"/>
-                </a:solidFill>
-                <a:latin typeface="Calibri"/>
-              </a:rPr>
-              <a:t>Keskmine tootehind?</a:t>
+              <a:t>Oodatav: odavaim ~20 €, kalleim 1200 €. MIN/MAX tagastab arvu, mitte nime.</a:t>
             </a:r>
           </a:p>
         </p:txBody>
@@ -36126,720 +37001,220 @@
       </p:grpSpPr>
       <p:sp>
         <p:nvSpPr>
-          <p:cNvPr id="3" name="Rectangle 2"/>
-          <p:cNvSpPr/>
-          <p:nvPr/>
-        </p:nvSpPr>
-        <p:spPr>
-          <a:xfrm>
-            <a:off x="0" y="0"/>
-            <a:ext cx="12191695" cy="841248"/>
-          </a:xfrm>
-          <a:prstGeom prst="rect">
-            <a:avLst/>
-          </a:prstGeom>
-          <a:solidFill>
-            <a:srgbClr val="0F203E"/>
-          </a:solidFill>
-          <a:ln>
-            <a:noFill/>
-          </a:ln>
-          <a:effectLst/>
-        </p:spPr>
-        <p:style>
-          <a:lnRef idx="1">
-            <a:schemeClr val="accent1"/>
-          </a:lnRef>
-          <a:fillRef idx="3">
-            <a:schemeClr val="accent1"/>
-          </a:fillRef>
-          <a:effectRef idx="2">
-            <a:schemeClr val="accent1"/>
-          </a:effectRef>
-          <a:fontRef idx="minor">
-            <a:schemeClr val="lt1"/>
-          </a:fontRef>
-        </p:style>
-        <p:txBody>
-          <a:bodyPr rtlCol="0" anchor="ctr"/>
-          <a:lstStyle/>
-          <a:p>
-            <a:pPr algn="ctr"/>
-            <a:endParaRPr/>
-          </a:p>
-        </p:txBody>
-      </p:sp>
-      <p:sp>
-        <p:nvSpPr>
-          <p:cNvPr id="4" name="Rectangle 3"/>
-          <p:cNvSpPr/>
-          <p:nvPr/>
-        </p:nvSpPr>
-        <p:spPr>
-          <a:xfrm>
-            <a:off x="0" y="841248"/>
-            <a:ext cx="12191695" cy="73152"/>
-          </a:xfrm>
-          <a:prstGeom prst="rect">
-            <a:avLst/>
-          </a:prstGeom>
-          <a:solidFill>
-            <a:srgbClr val="007073"/>
-          </a:solidFill>
-          <a:ln>
-            <a:noFill/>
-          </a:ln>
-          <a:effectLst/>
-        </p:spPr>
-        <p:style>
-          <a:lnRef idx="1">
-            <a:schemeClr val="accent1"/>
-          </a:lnRef>
-          <a:fillRef idx="3">
-            <a:schemeClr val="accent1"/>
-          </a:fillRef>
-          <a:effectRef idx="2">
-            <a:schemeClr val="accent1"/>
-          </a:effectRef>
-          <a:fontRef idx="minor">
-            <a:schemeClr val="lt1"/>
-          </a:fontRef>
-        </p:style>
-        <p:txBody>
-          <a:bodyPr rtlCol="0" anchor="ctr"/>
-          <a:lstStyle/>
-          <a:p>
-            <a:pPr algn="ctr"/>
-            <a:endParaRPr/>
-          </a:p>
-        </p:txBody>
-      </p:sp>
-      <p:sp>
-        <p:nvSpPr>
-          <p:cNvPr id="5" name="TextBox 4"/>
-          <p:cNvSpPr txBox="1"/>
-          <p:nvPr/>
-        </p:nvSpPr>
-        <p:spPr>
-          <a:xfrm>
-            <a:off x="365760" y="208079"/>
-            <a:ext cx="11430000" cy="461665"/>
-          </a:xfrm>
-          <a:prstGeom prst="rect">
-            <a:avLst/>
-          </a:prstGeom>
-          <a:noFill/>
-        </p:spPr>
-        <p:txBody>
-          <a:bodyPr wrap="square" anchor="ctr">
-            <a:spAutoFit/>
-          </a:bodyPr>
-          <a:lstStyle/>
-          <a:p>
-            <a:r>
-              <a:rPr sz="2400" b="1" dirty="0">
-                <a:solidFill>
-                  <a:srgbClr val="FFFFFF"/>
-                </a:solidFill>
-                <a:latin typeface="Calibri"/>
-              </a:rPr>
-              <a:t>MIN ja MAX </a:t>
-            </a:r>
-            <a:r>
-              <a:rPr sz="2400" b="1" dirty="0" err="1">
-                <a:solidFill>
-                  <a:srgbClr val="FFFFFF"/>
-                </a:solidFill>
-                <a:latin typeface="Calibri"/>
-              </a:rPr>
-              <a:t>ühes</a:t>
-            </a:r>
-            <a:r>
-              <a:rPr sz="2400" b="1" dirty="0">
-                <a:solidFill>
-                  <a:srgbClr val="FFFFFF"/>
-                </a:solidFill>
-                <a:latin typeface="Calibri"/>
-              </a:rPr>
+          <p:cNvPr id="2" name="Title 1">
+            <a:extLst>
+              <a:ext uri="{FF2B5EF4-FFF2-40B4-BE49-F238E27FC236}">
+                <a16:creationId xmlns:a16="http://schemas.microsoft.com/office/drawing/2014/main" id="{F1278F0D-204F-7E0D-7154-BE3146598123}"/>
+              </a:ext>
+            </a:extLst>
+          </p:cNvPr>
+          <p:cNvSpPr>
+            <a:spLocks noGrp="1"/>
+          </p:cNvSpPr>
+          <p:nvPr>
+            <p:ph type="ctrTitle"/>
+          </p:nvPr>
+        </p:nvSpPr>
+        <p:spPr/>
+        <p:txBody>
+          <a:bodyPr/>
+          <a:lstStyle/>
+          <a:p>
+            <a:r>
+              <a:rPr lang="en-GB" dirty="0" err="1"/>
+              <a:t>Harjutused</a:t>
+            </a:r>
+            <a:endParaRPr lang="en-GB" dirty="0"/>
+          </a:p>
+        </p:txBody>
+      </p:sp>
+      <p:sp>
+        <p:nvSpPr>
+          <p:cNvPr id="3" name="Content Placeholder 2">
+            <a:extLst>
+              <a:ext uri="{FF2B5EF4-FFF2-40B4-BE49-F238E27FC236}">
+                <a16:creationId xmlns:a16="http://schemas.microsoft.com/office/drawing/2014/main" id="{8BBE29B7-549D-D70B-986B-39317625D197}"/>
+              </a:ext>
+            </a:extLst>
+          </p:cNvPr>
+          <p:cNvSpPr>
+            <a:spLocks noGrp="1"/>
+          </p:cNvSpPr>
+          <p:nvPr>
+            <p:ph sz="quarter" idx="10"/>
+          </p:nvPr>
+        </p:nvSpPr>
+        <p:spPr/>
+        <p:txBody>
+          <a:bodyPr/>
+          <a:lstStyle/>
+          <a:p>
+            <a:r>
+              <a:rPr lang="en-GB" dirty="0"/>
+              <a:t>New SQL script</a:t>
+            </a:r>
+          </a:p>
+          <a:p>
+            <a:endParaRPr lang="en-GB" dirty="0"/>
+          </a:p>
+          <a:p>
+            <a:endParaRPr lang="en-GB" dirty="0"/>
+          </a:p>
+          <a:p>
+            <a:endParaRPr lang="en-GB" dirty="0"/>
+          </a:p>
+          <a:p>
+            <a:endParaRPr lang="en-GB" dirty="0"/>
+          </a:p>
+          <a:p>
+            <a:endParaRPr lang="en-GB" dirty="0"/>
+          </a:p>
+          <a:p>
+            <a:endParaRPr lang="en-GB" dirty="0"/>
+          </a:p>
+          <a:p>
+            <a:endParaRPr lang="en-GB" dirty="0"/>
+          </a:p>
+          <a:p>
+            <a:endParaRPr lang="en-GB" dirty="0"/>
+          </a:p>
+          <a:p>
+            <a:r>
+              <a:rPr lang="en-GB" dirty="0" err="1"/>
+              <a:t>Salvesta</a:t>
+            </a:r>
+            <a:r>
+              <a:rPr lang="en-GB" dirty="0"/>
+              <a:t> iga </a:t>
+            </a:r>
+            <a:r>
+              <a:rPr lang="en-GB" dirty="0" err="1"/>
+              <a:t>hrajtuse</a:t>
+            </a:r>
+            <a:r>
+              <a:rPr lang="en-GB" dirty="0"/>
+              <a:t> SQL </a:t>
+            </a:r>
+            <a:r>
+              <a:rPr lang="en-GB" dirty="0" err="1"/>
+              <a:t>päringud</a:t>
+            </a:r>
+            <a:r>
+              <a:rPr lang="en-GB" dirty="0"/>
               <a:t> </a:t>
             </a:r>
             <a:r>
-              <a:rPr sz="2400" b="1" dirty="0" err="1">
-                <a:solidFill>
-                  <a:srgbClr val="FFFFFF"/>
-                </a:solidFill>
-                <a:latin typeface="Calibri"/>
-              </a:rPr>
-              <a:t>päringus</a:t>
-            </a:r>
-            <a:r>
-              <a:rPr lang="en-GB" sz="2400" b="1" dirty="0">
-                <a:solidFill>
-                  <a:srgbClr val="FFFFFF"/>
-                </a:solidFill>
-                <a:latin typeface="Calibri"/>
-              </a:rPr>
+              <a:rPr lang="en-GB" dirty="0" err="1"/>
+              <a:t>eraldi</a:t>
+            </a:r>
+            <a:r>
+              <a:rPr lang="en-GB" dirty="0"/>
               <a:t> </a:t>
             </a:r>
             <a:r>
-              <a:rPr lang="en-GB" sz="2400" b="1" dirty="0">
-                <a:solidFill>
-                  <a:srgbClr val="92D050"/>
-                </a:solidFill>
-              </a:rPr>
-              <a:t>NÄITAN </a:t>
-            </a:r>
-            <a:endParaRPr sz="2400" b="1" dirty="0">
-              <a:solidFill>
-                <a:srgbClr val="FFFFFF"/>
-              </a:solidFill>
-              <a:latin typeface="Calibri"/>
-            </a:endParaRPr>
-          </a:p>
-        </p:txBody>
-      </p:sp>
-      <p:sp>
-        <p:nvSpPr>
-          <p:cNvPr id="8" name="TextBox 7"/>
-          <p:cNvSpPr txBox="1"/>
-          <p:nvPr/>
-        </p:nvSpPr>
-        <p:spPr>
-          <a:xfrm>
-            <a:off x="9601200" y="6601968"/>
-            <a:ext cx="2194560" cy="256032"/>
-          </a:xfrm>
-          <a:prstGeom prst="rect">
-            <a:avLst/>
-          </a:prstGeom>
-          <a:noFill/>
-        </p:spPr>
-        <p:txBody>
-          <a:bodyPr wrap="square" anchor="ctr">
-            <a:spAutoFit/>
-          </a:bodyPr>
-          <a:lstStyle/>
-          <a:p>
-            <a:pPr algn="r"/>
-            <a:r>
-              <a:rPr sz="1100" b="0">
-                <a:solidFill>
-                  <a:srgbClr val="94A3B8"/>
-                </a:solidFill>
-                <a:latin typeface="Calibri"/>
-              </a:rPr>
-              <a:t>11</a:t>
-            </a:r>
-          </a:p>
-        </p:txBody>
-      </p:sp>
-      <p:sp>
-        <p:nvSpPr>
-          <p:cNvPr id="9" name="Rounded Rectangle 8"/>
-          <p:cNvSpPr/>
-          <p:nvPr/>
-        </p:nvSpPr>
-        <p:spPr>
-          <a:xfrm>
-            <a:off x="365760" y="1097280"/>
-            <a:ext cx="11430000" cy="1554480"/>
-          </a:xfrm>
-          <a:prstGeom prst="roundRect">
-            <a:avLst>
-              <a:gd name="adj" fmla="val 8000"/>
-            </a:avLst>
-          </a:prstGeom>
-          <a:solidFill>
-            <a:srgbClr val="0F172A"/>
-          </a:solidFill>
-          <a:ln>
-            <a:noFill/>
-          </a:ln>
-          <a:effectLst/>
-        </p:spPr>
-        <p:style>
-          <a:lnRef idx="1">
-            <a:schemeClr val="accent1"/>
-          </a:lnRef>
-          <a:fillRef idx="3">
-            <a:schemeClr val="accent1"/>
-          </a:fillRef>
-          <a:effectRef idx="2">
-            <a:schemeClr val="accent1"/>
-          </a:effectRef>
-          <a:fontRef idx="minor">
-            <a:schemeClr val="lt1"/>
-          </a:fontRef>
-        </p:style>
-        <p:txBody>
-          <a:bodyPr rtlCol="0" anchor="ctr"/>
-          <a:lstStyle/>
-          <a:p>
-            <a:pPr algn="ctr"/>
-            <a:endParaRPr/>
-          </a:p>
-        </p:txBody>
-      </p:sp>
-      <p:sp>
-        <p:nvSpPr>
-          <p:cNvPr id="10" name="TextBox 9"/>
-          <p:cNvSpPr txBox="1"/>
-          <p:nvPr/>
-        </p:nvSpPr>
-        <p:spPr>
-          <a:xfrm>
-            <a:off x="530352" y="1207007"/>
-            <a:ext cx="11100816" cy="1254189"/>
-          </a:xfrm>
-          <a:prstGeom prst="rect">
-            <a:avLst/>
-          </a:prstGeom>
-          <a:noFill/>
-        </p:spPr>
-        <p:txBody>
-          <a:bodyPr wrap="square">
-            <a:spAutoFit/>
-          </a:bodyPr>
-          <a:lstStyle/>
-          <a:p>
-            <a:pPr>
-              <a:spcAft>
-                <a:spcPts val="300"/>
-              </a:spcAft>
-            </a:pPr>
-            <a:r>
-              <a:rPr sz="1700" b="0" dirty="0">
-                <a:solidFill>
-                  <a:srgbClr val="E2E8F0"/>
-                </a:solidFill>
-                <a:latin typeface="Consolas"/>
-              </a:rPr>
-              <a:t>SELECT </a:t>
-            </a:r>
-            <a:endParaRPr lang="en-GB" sz="1700" b="0" dirty="0">
-              <a:solidFill>
-                <a:srgbClr val="E2E8F0"/>
-              </a:solidFill>
-              <a:latin typeface="Consolas"/>
-            </a:endParaRPr>
-          </a:p>
-          <a:p>
-            <a:pPr>
-              <a:spcAft>
-                <a:spcPts val="300"/>
-              </a:spcAft>
-            </a:pPr>
-            <a:r>
-              <a:rPr lang="en-GB" sz="1700" b="0" dirty="0">
-                <a:solidFill>
-                  <a:srgbClr val="E2E8F0"/>
-                </a:solidFill>
-                <a:latin typeface="Consolas"/>
-              </a:rPr>
-              <a:t>	</a:t>
-            </a:r>
-            <a:r>
-              <a:rPr sz="1700" b="0" dirty="0">
-                <a:solidFill>
-                  <a:srgbClr val="E2E8F0"/>
-                </a:solidFill>
-                <a:latin typeface="Consolas"/>
-              </a:rPr>
-              <a:t>MIN(hind) AS </a:t>
-            </a:r>
-            <a:r>
-              <a:rPr sz="1700" b="0" dirty="0" err="1">
-                <a:solidFill>
-                  <a:srgbClr val="E2E8F0"/>
-                </a:solidFill>
-                <a:latin typeface="Consolas"/>
-              </a:rPr>
-              <a:t>odavaim</a:t>
-            </a:r>
-            <a:r>
-              <a:rPr sz="1700" b="0" dirty="0">
-                <a:solidFill>
-                  <a:srgbClr val="E2E8F0"/>
-                </a:solidFill>
-                <a:latin typeface="Consolas"/>
-              </a:rPr>
-              <a:t>,</a:t>
-            </a:r>
-            <a:r>
-              <a:rPr lang="en-GB" sz="1700" b="0" dirty="0">
-                <a:solidFill>
-                  <a:srgbClr val="E2E8F0"/>
-                </a:solidFill>
-                <a:latin typeface="Consolas"/>
-              </a:rPr>
-              <a:t> ----</a:t>
-            </a:r>
-            <a:r>
-              <a:rPr lang="en-GB" sz="1700" b="0" dirty="0" err="1">
-                <a:solidFill>
-                  <a:srgbClr val="E2E8F0"/>
-                </a:solidFill>
-                <a:latin typeface="Consolas"/>
-              </a:rPr>
-              <a:t>kõige</a:t>
-            </a:r>
-            <a:r>
-              <a:rPr lang="en-GB" sz="1700" b="0" dirty="0">
-                <a:solidFill>
-                  <a:srgbClr val="E2E8F0"/>
-                </a:solidFill>
-                <a:latin typeface="Consolas"/>
-              </a:rPr>
-              <a:t> </a:t>
-            </a:r>
-            <a:r>
-              <a:rPr lang="en-GB" sz="1700" b="0" dirty="0" err="1">
-                <a:solidFill>
-                  <a:srgbClr val="E2E8F0"/>
-                </a:solidFill>
-                <a:latin typeface="Consolas"/>
-              </a:rPr>
-              <a:t>odavam</a:t>
-            </a:r>
-            <a:r>
-              <a:rPr lang="en-GB" sz="1700" b="0" dirty="0">
-                <a:solidFill>
-                  <a:srgbClr val="E2E8F0"/>
-                </a:solidFill>
-                <a:latin typeface="Consolas"/>
-              </a:rPr>
-              <a:t> </a:t>
-            </a:r>
-            <a:r>
-              <a:rPr sz="1700" b="0" dirty="0">
-                <a:solidFill>
-                  <a:srgbClr val="E2E8F0"/>
-                </a:solidFill>
-                <a:latin typeface="Consolas"/>
-              </a:rPr>
-              <a:t> </a:t>
-            </a:r>
-            <a:endParaRPr lang="en-GB" sz="1700" b="0" dirty="0">
-              <a:solidFill>
-                <a:srgbClr val="E2E8F0"/>
-              </a:solidFill>
-              <a:latin typeface="Consolas"/>
-            </a:endParaRPr>
-          </a:p>
-          <a:p>
-            <a:pPr>
-              <a:spcAft>
-                <a:spcPts val="300"/>
-              </a:spcAft>
-            </a:pPr>
-            <a:r>
-              <a:rPr lang="en-GB" sz="1700" b="0" dirty="0">
-                <a:solidFill>
-                  <a:srgbClr val="E2E8F0"/>
-                </a:solidFill>
-                <a:latin typeface="Consolas"/>
-              </a:rPr>
-              <a:t>	</a:t>
-            </a:r>
-            <a:r>
-              <a:rPr sz="1700" b="0" dirty="0">
-                <a:solidFill>
-                  <a:srgbClr val="E2E8F0"/>
-                </a:solidFill>
-                <a:latin typeface="Consolas"/>
-              </a:rPr>
-              <a:t>MAX(hind) AS </a:t>
-            </a:r>
-            <a:r>
-              <a:rPr sz="1700" b="0" dirty="0" err="1">
-                <a:solidFill>
-                  <a:srgbClr val="E2E8F0"/>
-                </a:solidFill>
-                <a:latin typeface="Consolas"/>
-              </a:rPr>
-              <a:t>kalleim</a:t>
-            </a:r>
-            <a:r>
-              <a:rPr lang="en-GB" sz="1700" b="0" dirty="0">
-                <a:solidFill>
-                  <a:srgbClr val="E2E8F0"/>
-                </a:solidFill>
-                <a:latin typeface="Consolas"/>
-              </a:rPr>
-              <a:t> ---</a:t>
-            </a:r>
-            <a:r>
-              <a:rPr lang="en-GB" sz="1700" b="0" dirty="0" err="1">
-                <a:solidFill>
-                  <a:srgbClr val="E2E8F0"/>
-                </a:solidFill>
-                <a:latin typeface="Consolas"/>
-              </a:rPr>
-              <a:t>ja</a:t>
-            </a:r>
-            <a:r>
-              <a:rPr lang="en-GB" sz="1700" b="0" dirty="0">
-                <a:solidFill>
-                  <a:srgbClr val="E2E8F0"/>
-                </a:solidFill>
-                <a:latin typeface="Consolas"/>
-              </a:rPr>
-              <a:t> </a:t>
-            </a:r>
-            <a:r>
-              <a:rPr lang="en-GB" sz="1700" b="0" dirty="0" err="1">
-                <a:solidFill>
-                  <a:srgbClr val="E2E8F0"/>
-                </a:solidFill>
-                <a:latin typeface="Consolas"/>
-              </a:rPr>
-              <a:t>kõige</a:t>
-            </a:r>
-            <a:r>
-              <a:rPr lang="en-GB" sz="1700" b="0" dirty="0">
-                <a:solidFill>
-                  <a:srgbClr val="E2E8F0"/>
-                </a:solidFill>
-                <a:latin typeface="Consolas"/>
-              </a:rPr>
-              <a:t> </a:t>
-            </a:r>
-            <a:r>
-              <a:rPr lang="en-GB" sz="1700" b="0" dirty="0" err="1">
-                <a:solidFill>
-                  <a:srgbClr val="E2E8F0"/>
-                </a:solidFill>
-                <a:latin typeface="Consolas"/>
-              </a:rPr>
-              <a:t>kallim</a:t>
-            </a:r>
-            <a:r>
-              <a:rPr lang="en-GB" sz="1700" b="0" dirty="0">
-                <a:solidFill>
-                  <a:srgbClr val="E2E8F0"/>
-                </a:solidFill>
-                <a:latin typeface="Consolas"/>
-              </a:rPr>
-              <a:t> </a:t>
-            </a:r>
-            <a:r>
-              <a:rPr lang="en-GB" sz="1700" b="0" dirty="0" err="1">
-                <a:solidFill>
-                  <a:srgbClr val="E2E8F0"/>
-                </a:solidFill>
-                <a:latin typeface="Consolas"/>
-              </a:rPr>
-              <a:t>tootehind</a:t>
-            </a:r>
-            <a:endParaRPr sz="1700" b="0" dirty="0">
-              <a:solidFill>
-                <a:srgbClr val="E2E8F0"/>
-              </a:solidFill>
-              <a:latin typeface="Consolas"/>
-            </a:endParaRPr>
-          </a:p>
-          <a:p>
-            <a:pPr>
-              <a:spcAft>
-                <a:spcPts val="300"/>
-              </a:spcAft>
-            </a:pPr>
-            <a:r>
-              <a:rPr sz="1700" b="0" dirty="0">
-                <a:solidFill>
-                  <a:srgbClr val="E2E8F0"/>
-                </a:solidFill>
-                <a:latin typeface="Consolas"/>
-              </a:rPr>
-              <a:t>FROM tooted;</a:t>
-            </a:r>
-          </a:p>
-        </p:txBody>
-      </p:sp>
-      <p:sp>
-        <p:nvSpPr>
-          <p:cNvPr id="11" name="Rounded Rectangle 10"/>
-          <p:cNvSpPr/>
-          <p:nvPr/>
-        </p:nvSpPr>
-        <p:spPr>
-          <a:xfrm>
-            <a:off x="365760" y="2880360"/>
-            <a:ext cx="11430000" cy="1417320"/>
-          </a:xfrm>
-          <a:prstGeom prst="roundRect">
-            <a:avLst>
-              <a:gd name="adj" fmla="val 8000"/>
-            </a:avLst>
-          </a:prstGeom>
-          <a:solidFill>
-            <a:srgbClr val="0F172A"/>
-          </a:solidFill>
-          <a:ln>
-            <a:noFill/>
-          </a:ln>
-          <a:effectLst/>
-        </p:spPr>
-        <p:style>
-          <a:lnRef idx="1">
-            <a:schemeClr val="accent1"/>
-          </a:lnRef>
-          <a:fillRef idx="3">
-            <a:schemeClr val="accent1"/>
-          </a:fillRef>
-          <a:effectRef idx="2">
-            <a:schemeClr val="accent1"/>
-          </a:effectRef>
-          <a:fontRef idx="minor">
-            <a:schemeClr val="lt1"/>
-          </a:fontRef>
-        </p:style>
-        <p:txBody>
-          <a:bodyPr rtlCol="0" anchor="ctr"/>
-          <a:lstStyle/>
-          <a:p>
-            <a:pPr algn="ctr"/>
-            <a:endParaRPr/>
-          </a:p>
-        </p:txBody>
-      </p:sp>
-      <p:sp>
-        <p:nvSpPr>
-          <p:cNvPr id="12" name="TextBox 11"/>
-          <p:cNvSpPr txBox="1"/>
-          <p:nvPr/>
-        </p:nvSpPr>
-        <p:spPr>
-          <a:xfrm>
-            <a:off x="530352" y="2990088"/>
-            <a:ext cx="11100816" cy="954107"/>
-          </a:xfrm>
-          <a:prstGeom prst="rect">
-            <a:avLst/>
-          </a:prstGeom>
-          <a:noFill/>
-        </p:spPr>
-        <p:txBody>
-          <a:bodyPr wrap="square">
-            <a:spAutoFit/>
-          </a:bodyPr>
-          <a:lstStyle/>
-          <a:p>
-            <a:pPr>
-              <a:spcAft>
-                <a:spcPts val="300"/>
-              </a:spcAft>
-            </a:pPr>
-            <a:r>
-              <a:rPr sz="1700" b="0" dirty="0">
-                <a:solidFill>
-                  <a:srgbClr val="E2E8F0"/>
-                </a:solidFill>
-                <a:latin typeface="Consolas"/>
-              </a:rPr>
-              <a:t>SELECT </a:t>
-            </a:r>
-            <a:endParaRPr lang="en-GB" sz="1700" b="0" dirty="0">
-              <a:solidFill>
-                <a:srgbClr val="E2E8F0"/>
-              </a:solidFill>
-              <a:latin typeface="Consolas"/>
-            </a:endParaRPr>
-          </a:p>
-          <a:p>
-            <a:pPr>
-              <a:spcAft>
-                <a:spcPts val="300"/>
-              </a:spcAft>
-            </a:pPr>
-            <a:r>
-              <a:rPr lang="en-GB" sz="1700" b="0" dirty="0">
-                <a:solidFill>
-                  <a:srgbClr val="E2E8F0"/>
-                </a:solidFill>
-                <a:latin typeface="Consolas"/>
-              </a:rPr>
-              <a:t>	</a:t>
-            </a:r>
-            <a:r>
-              <a:rPr sz="1700" b="0" dirty="0">
-                <a:solidFill>
-                  <a:srgbClr val="E2E8F0"/>
-                </a:solidFill>
-                <a:latin typeface="Consolas"/>
-              </a:rPr>
-              <a:t>ROUND(AVG(hind), 2) AS </a:t>
-            </a:r>
-            <a:r>
-              <a:rPr sz="1700" b="0" dirty="0" err="1">
-                <a:solidFill>
-                  <a:srgbClr val="E2E8F0"/>
-                </a:solidFill>
-                <a:latin typeface="Consolas"/>
-              </a:rPr>
-              <a:t>keskmine_hind</a:t>
-            </a:r>
-            <a:endParaRPr sz="1700" b="0" dirty="0">
-              <a:solidFill>
-                <a:srgbClr val="E2E8F0"/>
-              </a:solidFill>
-              <a:latin typeface="Consolas"/>
-            </a:endParaRPr>
-          </a:p>
-          <a:p>
-            <a:pPr>
-              <a:spcAft>
-                <a:spcPts val="300"/>
-              </a:spcAft>
-            </a:pPr>
-            <a:r>
-              <a:rPr sz="1700" b="0" dirty="0">
-                <a:solidFill>
-                  <a:srgbClr val="E2E8F0"/>
-                </a:solidFill>
-                <a:latin typeface="Consolas"/>
-              </a:rPr>
-              <a:t>FROM tooted;</a:t>
-            </a:r>
-          </a:p>
-        </p:txBody>
-      </p:sp>
-      <p:sp>
-        <p:nvSpPr>
-          <p:cNvPr id="13" name="TextBox 12"/>
-          <p:cNvSpPr txBox="1"/>
-          <p:nvPr/>
-        </p:nvSpPr>
-        <p:spPr>
-          <a:xfrm>
-            <a:off x="457200" y="4526280"/>
-            <a:ext cx="11247120" cy="1645920"/>
-          </a:xfrm>
-          <a:prstGeom prst="rect">
-            <a:avLst/>
-          </a:prstGeom>
-          <a:noFill/>
-        </p:spPr>
-        <p:txBody>
-          <a:bodyPr wrap="square" anchor="t">
-            <a:spAutoFit/>
-          </a:bodyPr>
-          <a:lstStyle/>
-          <a:p>
-            <a:pPr algn="l"/>
-            <a:r>
-              <a:rPr sz="1600" b="0">
-                <a:solidFill>
-                  <a:srgbClr val="334155"/>
-                </a:solidFill>
-                <a:latin typeface="Calibri"/>
-              </a:rPr>
-              <a:t>Oodatav: odavaim ~20 €, kalleim 1200 €. MIN/MAX tagastab arvu, mitte nime.</a:t>
-            </a:r>
-          </a:p>
-        </p:txBody>
-      </p:sp>
+              <a:rPr lang="en-GB" dirty="0" err="1"/>
+              <a:t>faili</a:t>
+            </a:r>
+            <a:endParaRPr lang="en-GB" dirty="0"/>
+          </a:p>
+        </p:txBody>
+      </p:sp>
+      <p:pic>
+        <p:nvPicPr>
+          <p:cNvPr id="5" name="Picture 4">
+            <a:extLst>
+              <a:ext uri="{FF2B5EF4-FFF2-40B4-BE49-F238E27FC236}">
+                <a16:creationId xmlns:a16="http://schemas.microsoft.com/office/drawing/2014/main" id="{128F856E-CF6E-47F9-68EE-D0C7FA6C970A}"/>
+              </a:ext>
+            </a:extLst>
+          </p:cNvPr>
+          <p:cNvPicPr>
+            <a:picLocks noChangeAspect="1"/>
+          </p:cNvPicPr>
+          <p:nvPr/>
+        </p:nvPicPr>
+        <p:blipFill>
+          <a:blip r:embed="rId2"/>
+          <a:stretch>
+            <a:fillRect/>
+          </a:stretch>
+        </p:blipFill>
+        <p:spPr>
+          <a:xfrm>
+            <a:off x="2875463" y="479570"/>
+            <a:ext cx="7792537" cy="2429214"/>
+          </a:xfrm>
+          <a:prstGeom prst="rect">
+            <a:avLst/>
+          </a:prstGeom>
+        </p:spPr>
+      </p:pic>
+      <p:pic>
+        <p:nvPicPr>
+          <p:cNvPr id="7" name="Picture 6">
+            <a:extLst>
+              <a:ext uri="{FF2B5EF4-FFF2-40B4-BE49-F238E27FC236}">
+                <a16:creationId xmlns:a16="http://schemas.microsoft.com/office/drawing/2014/main" id="{74C0C32D-9A33-313A-BFEF-F9B1731EF868}"/>
+              </a:ext>
+            </a:extLst>
+          </p:cNvPr>
+          <p:cNvPicPr>
+            <a:picLocks noChangeAspect="1"/>
+          </p:cNvPicPr>
+          <p:nvPr/>
+        </p:nvPicPr>
+        <p:blipFill>
+          <a:blip r:embed="rId3"/>
+          <a:stretch>
+            <a:fillRect/>
+          </a:stretch>
+        </p:blipFill>
+        <p:spPr>
+          <a:xfrm>
+            <a:off x="4869800" y="3060156"/>
+            <a:ext cx="2764959" cy="2895381"/>
+          </a:xfrm>
+          <a:prstGeom prst="rect">
+            <a:avLst/>
+          </a:prstGeom>
+        </p:spPr>
+      </p:pic>
+      <p:pic>
+        <p:nvPicPr>
+          <p:cNvPr id="9" name="Picture 8">
+            <a:extLst>
+              <a:ext uri="{FF2B5EF4-FFF2-40B4-BE49-F238E27FC236}">
+                <a16:creationId xmlns:a16="http://schemas.microsoft.com/office/drawing/2014/main" id="{B7DEFDBF-DAE7-00C3-91FC-EE59828F0299}"/>
+              </a:ext>
+            </a:extLst>
+          </p:cNvPr>
+          <p:cNvPicPr>
+            <a:picLocks noChangeAspect="1"/>
+          </p:cNvPicPr>
+          <p:nvPr/>
+        </p:nvPicPr>
+        <p:blipFill>
+          <a:blip r:embed="rId4"/>
+          <a:stretch>
+            <a:fillRect/>
+          </a:stretch>
+        </p:blipFill>
+        <p:spPr>
+          <a:xfrm>
+            <a:off x="7911159" y="2966256"/>
+            <a:ext cx="3299386" cy="3199594"/>
+          </a:xfrm>
+          <a:prstGeom prst="rect">
+            <a:avLst/>
+          </a:prstGeom>
+        </p:spPr>
+      </p:pic>
     </p:spTree>
+    <p:extLst>
+      <p:ext uri="{BB962C8B-B14F-4D97-AF65-F5344CB8AC3E}">
+        <p14:creationId xmlns:p14="http://schemas.microsoft.com/office/powerpoint/2010/main" val="3999178794"/>
+      </p:ext>
+    </p:extLst>
   </p:cSld>
   <p:clrMapOvr>
     <a:masterClrMapping/>

--- a/Materjalid/Day7 SQL/7-paev-andmetarkus-esitlus.pptx
+++ b/Materjalid/Day7 SQL/7-paev-andmetarkus-esitlus.pptx
@@ -33410,7 +33410,7 @@
         </p:blipFill>
         <p:spPr>
           <a:xfrm>
-            <a:off x="1469060" y="2976499"/>
+            <a:off x="289800" y="0"/>
             <a:ext cx="6239746" cy="905001"/>
           </a:xfrm>
           <a:prstGeom prst="rect">
@@ -33432,8 +33432,8 @@
         </p:nvSpPr>
         <p:spPr>
           <a:xfrm>
-            <a:off x="1363133" y="1628507"/>
-            <a:ext cx="6096000" cy="1200329"/>
+            <a:off x="4411133" y="751343"/>
+            <a:ext cx="6096000" cy="5355312"/>
           </a:xfrm>
           <a:prstGeom prst="rect">
             <a:avLst/>
@@ -33630,6 +33630,388 @@
               <a:rPr lang="en-GB" dirty="0" err="1"/>
               <a:t>tarneviisis</a:t>
             </a:r>
+            <a:endParaRPr lang="et-EE" dirty="0"/>
+          </a:p>
+          <a:p>
+            <a:endParaRPr lang="et-EE" dirty="0"/>
+          </a:p>
+          <a:p>
+            <a:r>
+              <a:rPr lang="en-GB" b="1" dirty="0"/>
+              <a:t>SELECT</a:t>
+            </a:r>
+            <a:endParaRPr lang="en-GB" dirty="0"/>
+          </a:p>
+          <a:p>
+            <a:r>
+              <a:rPr lang="en-GB" dirty="0" err="1"/>
+              <a:t>tarneviis</a:t>
+            </a:r>
+            <a:r>
+              <a:rPr lang="en-GB" dirty="0"/>
+              <a:t>,</a:t>
+            </a:r>
+          </a:p>
+          <a:p>
+            <a:r>
+              <a:rPr lang="en-GB" b="1" dirty="0"/>
+              <a:t>COUNT</a:t>
+            </a:r>
+            <a:r>
+              <a:rPr lang="en-GB" dirty="0"/>
+              <a:t>(*) </a:t>
+            </a:r>
+            <a:r>
+              <a:rPr lang="en-GB" b="1" dirty="0"/>
+              <a:t>AS</a:t>
+            </a:r>
+            <a:r>
+              <a:rPr lang="en-GB" dirty="0"/>
+              <a:t> </a:t>
+            </a:r>
+            <a:r>
+              <a:rPr lang="en-GB" i="1" dirty="0" err="1"/>
+              <a:t>tellimuste_arv</a:t>
+            </a:r>
+            <a:r>
+              <a:rPr lang="en-GB" dirty="0"/>
+              <a:t>,</a:t>
+            </a:r>
+          </a:p>
+          <a:p>
+            <a:r>
+              <a:rPr lang="en-GB" b="1" dirty="0"/>
+              <a:t>MIN</a:t>
+            </a:r>
+            <a:r>
+              <a:rPr lang="en-GB" dirty="0"/>
+              <a:t>(</a:t>
+            </a:r>
+            <a:r>
+              <a:rPr lang="en-GB" u="sng" dirty="0" err="1"/>
+              <a:t>kuup</a:t>
+            </a:r>
+            <a:r>
+              <a:rPr lang="en-GB" dirty="0" err="1"/>
+              <a:t>ä</a:t>
+            </a:r>
+            <a:r>
+              <a:rPr lang="en-GB" u="sng" dirty="0" err="1"/>
+              <a:t>ev</a:t>
+            </a:r>
+            <a:r>
+              <a:rPr lang="en-GB" dirty="0"/>
+              <a:t>) </a:t>
+            </a:r>
+            <a:r>
+              <a:rPr lang="en-GB" b="1" dirty="0"/>
+              <a:t>AS</a:t>
+            </a:r>
+            <a:r>
+              <a:rPr lang="en-GB" dirty="0"/>
+              <a:t> </a:t>
+            </a:r>
+            <a:r>
+              <a:rPr lang="en-GB" i="1" dirty="0" err="1"/>
+              <a:t>esimene</a:t>
+            </a:r>
+            <a:r>
+              <a:rPr lang="en-GB" dirty="0"/>
+              <a:t>,</a:t>
+            </a:r>
+          </a:p>
+          <a:p>
+            <a:r>
+              <a:rPr lang="en-GB" b="1" dirty="0"/>
+              <a:t>MAX</a:t>
+            </a:r>
+            <a:r>
+              <a:rPr lang="en-GB" dirty="0"/>
+              <a:t>(</a:t>
+            </a:r>
+            <a:r>
+              <a:rPr lang="en-GB" u="sng" dirty="0" err="1"/>
+              <a:t>kuup</a:t>
+            </a:r>
+            <a:r>
+              <a:rPr lang="en-GB" dirty="0" err="1"/>
+              <a:t>ä</a:t>
+            </a:r>
+            <a:r>
+              <a:rPr lang="en-GB" u="sng" dirty="0" err="1"/>
+              <a:t>ev</a:t>
+            </a:r>
+            <a:r>
+              <a:rPr lang="en-GB" dirty="0"/>
+              <a:t>) </a:t>
+            </a:r>
+            <a:r>
+              <a:rPr lang="en-GB" b="1" dirty="0"/>
+              <a:t>AS</a:t>
+            </a:r>
+            <a:r>
+              <a:rPr lang="en-GB" dirty="0"/>
+              <a:t> </a:t>
+            </a:r>
+            <a:r>
+              <a:rPr lang="en-GB" i="1" dirty="0" err="1"/>
+              <a:t>viimane</a:t>
+            </a:r>
+            <a:r>
+              <a:rPr lang="en-GB" dirty="0"/>
+              <a:t>,</a:t>
+            </a:r>
+          </a:p>
+          <a:p>
+            <a:r>
+              <a:rPr lang="en-GB" b="1" dirty="0"/>
+              <a:t>MAX</a:t>
+            </a:r>
+            <a:r>
+              <a:rPr lang="en-GB" dirty="0"/>
+              <a:t>(</a:t>
+            </a:r>
+            <a:r>
+              <a:rPr lang="en-GB" u="sng" dirty="0" err="1"/>
+              <a:t>kuup</a:t>
+            </a:r>
+            <a:r>
+              <a:rPr lang="en-GB" dirty="0" err="1"/>
+              <a:t>ä</a:t>
+            </a:r>
+            <a:r>
+              <a:rPr lang="en-GB" u="sng" dirty="0" err="1"/>
+              <a:t>ev</a:t>
+            </a:r>
+            <a:r>
+              <a:rPr lang="en-GB" dirty="0"/>
+              <a:t>) - </a:t>
+            </a:r>
+            <a:r>
+              <a:rPr lang="en-GB" b="1" dirty="0"/>
+              <a:t>MIN</a:t>
+            </a:r>
+            <a:r>
+              <a:rPr lang="en-GB" dirty="0"/>
+              <a:t>(</a:t>
+            </a:r>
+            <a:r>
+              <a:rPr lang="en-GB" u="sng" dirty="0" err="1"/>
+              <a:t>kuup</a:t>
+            </a:r>
+            <a:r>
+              <a:rPr lang="en-GB" dirty="0" err="1"/>
+              <a:t>ä</a:t>
+            </a:r>
+            <a:r>
+              <a:rPr lang="en-GB" u="sng" dirty="0" err="1"/>
+              <a:t>ev</a:t>
+            </a:r>
+            <a:r>
+              <a:rPr lang="en-GB" dirty="0"/>
+              <a:t>) </a:t>
+            </a:r>
+            <a:r>
+              <a:rPr lang="en-GB" b="1" dirty="0"/>
+              <a:t>AS</a:t>
+            </a:r>
+            <a:r>
+              <a:rPr lang="en-GB" dirty="0"/>
+              <a:t> </a:t>
+            </a:r>
+            <a:r>
+              <a:rPr lang="en-GB" i="1" dirty="0" err="1"/>
+              <a:t>paevi_vahemikus</a:t>
+            </a:r>
+            <a:r>
+              <a:rPr lang="en-GB" dirty="0"/>
+              <a:t>,</a:t>
+            </a:r>
+          </a:p>
+          <a:p>
+            <a:r>
+              <a:rPr lang="en-GB" b="1" dirty="0"/>
+              <a:t>MIN</a:t>
+            </a:r>
+            <a:r>
+              <a:rPr lang="en-GB" dirty="0"/>
+              <a:t>(</a:t>
+            </a:r>
+            <a:r>
+              <a:rPr lang="en-GB" u="sng" dirty="0" err="1"/>
+              <a:t>kuup</a:t>
+            </a:r>
+            <a:r>
+              <a:rPr lang="en-GB" dirty="0" err="1"/>
+              <a:t>ä</a:t>
+            </a:r>
+            <a:r>
+              <a:rPr lang="en-GB" u="sng" dirty="0" err="1"/>
+              <a:t>ev</a:t>
+            </a:r>
+            <a:r>
+              <a:rPr lang="en-GB" dirty="0"/>
+              <a:t>) - </a:t>
+            </a:r>
+            <a:r>
+              <a:rPr lang="en-GB" b="1" dirty="0"/>
+              <a:t>CAST</a:t>
+            </a:r>
+            <a:r>
+              <a:rPr lang="en-GB" dirty="0"/>
+              <a:t>(</a:t>
+            </a:r>
+            <a:r>
+              <a:rPr lang="en-GB" b="1" dirty="0"/>
+              <a:t>DATE_TRUNC</a:t>
+            </a:r>
+            <a:r>
+              <a:rPr lang="en-GB" dirty="0"/>
+              <a:t>('year', CURRENT_DATE) </a:t>
+            </a:r>
+            <a:r>
+              <a:rPr lang="en-GB" b="1" dirty="0"/>
+              <a:t>AS</a:t>
+            </a:r>
+            <a:r>
+              <a:rPr lang="en-GB" dirty="0"/>
+              <a:t> </a:t>
+            </a:r>
+            <a:r>
+              <a:rPr lang="en-GB" b="1" dirty="0"/>
+              <a:t>date</a:t>
+            </a:r>
+            <a:r>
+              <a:rPr lang="en-GB" dirty="0"/>
+              <a:t>)</a:t>
+            </a:r>
+          </a:p>
+          <a:p>
+            <a:r>
+              <a:rPr lang="en-GB" b="1" dirty="0"/>
+              <a:t>AS</a:t>
+            </a:r>
+            <a:r>
+              <a:rPr lang="en-GB" dirty="0"/>
+              <a:t> </a:t>
+            </a:r>
+            <a:r>
+              <a:rPr lang="en-GB" i="1" dirty="0" err="1"/>
+              <a:t>paevi_aasta_algusest</a:t>
+            </a:r>
+            <a:endParaRPr lang="en-GB" dirty="0"/>
+          </a:p>
+          <a:p>
+            <a:r>
+              <a:rPr lang="en-GB" b="1" dirty="0"/>
+              <a:t>FROM</a:t>
+            </a:r>
+            <a:r>
+              <a:rPr lang="en-GB" dirty="0"/>
+              <a:t> </a:t>
+            </a:r>
+            <a:r>
+              <a:rPr lang="en-GB" dirty="0" err="1"/>
+              <a:t>tellimused</a:t>
+            </a:r>
+            <a:endParaRPr lang="en-GB" dirty="0"/>
+          </a:p>
+          <a:p>
+            <a:r>
+              <a:rPr lang="et-EE" b="1" dirty="0"/>
+              <a:t>--</a:t>
+            </a:r>
+            <a:r>
+              <a:rPr lang="en-GB" b="1" dirty="0"/>
+              <a:t>where</a:t>
+            </a:r>
+            <a:r>
+              <a:rPr lang="en-GB" dirty="0"/>
+              <a:t> </a:t>
+            </a:r>
+            <a:r>
+              <a:rPr lang="en-GB" dirty="0" err="1"/>
+              <a:t>kuupäev</a:t>
+            </a:r>
+            <a:r>
+              <a:rPr lang="en-GB" dirty="0"/>
+              <a:t> </a:t>
+            </a:r>
+            <a:r>
+              <a:rPr lang="en-GB" b="1" dirty="0"/>
+              <a:t>between</a:t>
+            </a:r>
+            <a:r>
+              <a:rPr lang="en-GB" dirty="0"/>
+              <a:t> '2026-01-01' </a:t>
+            </a:r>
+            <a:r>
+              <a:rPr lang="en-GB" b="1" dirty="0"/>
+              <a:t>and</a:t>
+            </a:r>
+            <a:r>
+              <a:rPr lang="en-GB" dirty="0"/>
+              <a:t> '2026-12-31'</a:t>
+            </a:r>
+          </a:p>
+          <a:p>
+            <a:r>
+              <a:rPr lang="en-GB" b="1" dirty="0"/>
+              <a:t>GROUP</a:t>
+            </a:r>
+            <a:r>
+              <a:rPr lang="en-GB" dirty="0"/>
+              <a:t> </a:t>
+            </a:r>
+            <a:r>
+              <a:rPr lang="en-GB" b="1" dirty="0"/>
+              <a:t>BY</a:t>
+            </a:r>
+            <a:r>
+              <a:rPr lang="en-GB" dirty="0"/>
+              <a:t> </a:t>
+            </a:r>
+            <a:r>
+              <a:rPr lang="en-GB" dirty="0" err="1"/>
+              <a:t>tarneviis</a:t>
+            </a:r>
+            <a:endParaRPr lang="en-GB" dirty="0"/>
+          </a:p>
+          <a:p>
+            <a:r>
+              <a:rPr lang="en-GB" b="1" dirty="0"/>
+              <a:t>ORDER</a:t>
+            </a:r>
+            <a:r>
+              <a:rPr lang="en-GB" dirty="0"/>
+              <a:t> </a:t>
+            </a:r>
+            <a:r>
+              <a:rPr lang="en-GB" b="1" dirty="0"/>
+              <a:t>BY</a:t>
+            </a:r>
+            <a:r>
+              <a:rPr lang="en-GB" dirty="0"/>
+              <a:t> </a:t>
+            </a:r>
+            <a:r>
+              <a:rPr lang="en-GB" i="1" dirty="0" err="1"/>
+              <a:t>tellimuste_arv</a:t>
+            </a:r>
+            <a:r>
+              <a:rPr lang="en-GB" dirty="0"/>
+              <a:t> </a:t>
+            </a:r>
+            <a:r>
+              <a:rPr lang="en-GB" b="1" dirty="0"/>
+              <a:t>DESC</a:t>
+            </a:r>
+            <a:r>
+              <a:rPr lang="en-GB" dirty="0"/>
+              <a:t>;</a:t>
+            </a:r>
+          </a:p>
+          <a:p>
             <a:endParaRPr lang="en-GB" dirty="0"/>
           </a:p>
         </p:txBody>
